--- a/docs/summit_20261023_reframe/poster_visual_final_review.pptx
+++ b/docs/summit_20261023_reframe/poster_visual_final_review.pptx
@@ -3520,7 +3520,7 @@
         </p:blipFill>
         <p:spPr>
           <a:xfrm>
-            <a:off x="850851" y="40416971"/>
+            <a:off x="850851" y="40452963"/>
             <a:ext cx="3526990" cy="719401"/>
           </a:xfrm>
           <a:prstGeom prst="rect">
@@ -3544,7 +3544,7 @@
         </p:blipFill>
         <p:spPr>
           <a:xfrm>
-            <a:off x="4495544" y="40416971"/>
+            <a:off x="4495544" y="40452963"/>
             <a:ext cx="4679004" cy="719401"/>
           </a:xfrm>
           <a:prstGeom prst="rect">
@@ -4033,8 +4033,8 @@
         </p:nvSpPr>
         <p:spPr>
           <a:xfrm>
-            <a:off x="19378353" y="38784221"/>
-            <a:ext cx="9570397" cy="2269464"/>
+            <a:off x="19378353" y="38784212"/>
+            <a:ext cx="9519789" cy="3190000"/>
           </a:xfrm>
           <a:prstGeom prst="roundRect">
             <a:avLst>
@@ -7384,7 +7384,7 @@
         </p:nvSpPr>
         <p:spPr>
           <a:xfrm>
-            <a:off x="1058151" y="38947408"/>
+            <a:off x="1058151" y="38983412"/>
             <a:ext cx="17381508" cy="528876"/>
           </a:xfrm>
           <a:prstGeom prst="rect">
@@ -7418,7 +7418,7 @@
         </p:nvSpPr>
         <p:spPr>
           <a:xfrm>
-            <a:off x="1058151" y="39463547"/>
+            <a:off x="1058151" y="39499551"/>
             <a:ext cx="13065356" cy="528876"/>
           </a:xfrm>
           <a:prstGeom prst="rect">
@@ -7470,7 +7470,7 @@
         </p:nvSpPr>
         <p:spPr>
           <a:xfrm>
-            <a:off x="9571444" y="40417951"/>
+            <a:off x="9571444" y="40453955"/>
             <a:ext cx="5553286" cy="312517"/>
           </a:xfrm>
           <a:prstGeom prst="rect">
@@ -7522,7 +7522,7 @@
         </p:nvSpPr>
         <p:spPr>
           <a:xfrm>
-            <a:off x="9571444" y="40822829"/>
+            <a:off x="9571444" y="40858833"/>
             <a:ext cx="5338896" cy="312517"/>
           </a:xfrm>
           <a:prstGeom prst="rect">
@@ -7565,8 +7565,8 @@
         </p:nvSpPr>
         <p:spPr>
           <a:xfrm>
-            <a:off x="19555245" y="38950658"/>
-            <a:ext cx="9110214" cy="312774"/>
+            <a:off x="19529945" y="38926172"/>
+            <a:ext cx="7730294" cy="288714"/>
           </a:xfrm>
           <a:prstGeom prst="rect">
             <a:avLst/>
@@ -7580,16 +7580,16 @@
           <a:lstStyle/>
           <a:p>
             <a:r>
-              <a:rPr sz="2460" b="1" i="0">
-                <a:solidFill>
-                  <a:srgbClr val="0B0B0B"/>
-                </a:solidFill>
-                <a:latin typeface="Arial"/>
-              </a:rPr>
-              <a:t>Neural</a:t>
-            </a:r>
-            <a:r>
-              <a:rPr sz="2460" b="1" i="0">
+              <a:rPr sz="2270" b="1" i="0">
+                <a:solidFill>
+                  <a:srgbClr val="0B0B0B"/>
+                </a:solidFill>
+                <a:latin typeface="Arial"/>
+              </a:rPr>
+              <a:t>Two</a:t>
+            </a:r>
+            <a:r>
+              <a:rPr sz="2270" b="1" i="0">
                 <a:solidFill>
                   <a:srgbClr val="0B0B0B"/>
                 </a:solidFill>
@@ -7598,16 +7598,52 @@
               <a:t> </a:t>
             </a:r>
             <a:r>
-              <a:rPr sz="2460" b="1" i="0">
-                <a:solidFill>
-                  <a:srgbClr val="0B0B0B"/>
-                </a:solidFill>
-                <a:latin typeface="Arial"/>
-              </a:rPr>
-              <a:t>baseline</a:t>
-            </a:r>
-            <a:r>
-              <a:rPr sz="2460" b="0" i="0">
+              <a:rPr sz="2270" b="1" i="0">
+                <a:solidFill>
+                  <a:srgbClr val="0B0B0B"/>
+                </a:solidFill>
+                <a:latin typeface="Arial"/>
+              </a:rPr>
+              <a:t>approaches</a:t>
+            </a:r>
+            <a:r>
+              <a:rPr sz="2270" b="1" i="0">
+                <a:solidFill>
+                  <a:srgbClr val="0B0B0B"/>
+                </a:solidFill>
+                <a:latin typeface="Arial"/>
+              </a:rPr>
+              <a:t> </a:t>
+            </a:r>
+            <a:r>
+              <a:rPr sz="2270" b="1" i="0">
+                <a:solidFill>
+                  <a:srgbClr val="0B0B0B"/>
+                </a:solidFill>
+                <a:latin typeface="Arial"/>
+              </a:rPr>
+              <a:t>to</a:t>
+            </a:r>
+            <a:r>
+              <a:rPr sz="2270" b="1" i="0">
+                <a:solidFill>
+                  <a:srgbClr val="0B0B0B"/>
+                </a:solidFill>
+                <a:latin typeface="Arial"/>
+              </a:rPr>
+              <a:t> </a:t>
+            </a:r>
+            <a:r>
+              <a:rPr sz="2270" b="1" i="0">
+                <a:solidFill>
+                  <a:srgbClr val="0B0B0B"/>
+                </a:solidFill>
+                <a:latin typeface="Arial"/>
+              </a:rPr>
+              <a:t>ARC</a:t>
+            </a:r>
+            <a:r>
+              <a:rPr sz="2270" b="0" i="0">
                 <a:solidFill>
                   <a:srgbClr val="0B0B0B"/>
                 </a:solidFill>
@@ -7616,7 +7652,7 @@
               <a:t>,</a:t>
             </a:r>
             <a:r>
-              <a:rPr sz="2460" b="0" i="0">
+              <a:rPr sz="2270" b="0" i="0">
                 <a:solidFill>
                   <a:srgbClr val="0B0B0B"/>
                 </a:solidFill>
@@ -7625,7 +7661,7 @@
               <a:t> </a:t>
             </a:r>
             <a:r>
-              <a:rPr sz="2460" b="0" i="0">
+              <a:rPr sz="2270" b="0" i="0">
                 <a:solidFill>
                   <a:srgbClr val="0B0B0B"/>
                 </a:solidFill>
@@ -7634,7 +7670,7 @@
               <a:t>official</a:t>
             </a:r>
             <a:r>
-              <a:rPr sz="2460" b="0" i="0">
+              <a:rPr sz="2270" b="0" i="0">
                 <a:solidFill>
                   <a:srgbClr val="0B0B0B"/>
                 </a:solidFill>
@@ -7643,7 +7679,7 @@
               <a:t> </a:t>
             </a:r>
             <a:r>
-              <a:rPr sz="2460" b="0" i="0">
+              <a:rPr sz="2270" b="0" i="0">
                 <a:solidFill>
                   <a:srgbClr val="0B0B0B"/>
                 </a:solidFill>
@@ -7652,7 +7688,7 @@
               <a:t>public</a:t>
             </a:r>
             <a:r>
-              <a:rPr sz="2460" b="0" i="0">
+              <a:rPr sz="2270" b="0" i="0">
                 <a:solidFill>
                   <a:srgbClr val="0B0B0B"/>
                 </a:solidFill>
@@ -7661,16 +7697,16 @@
               <a:t> </a:t>
             </a:r>
             <a:r>
-              <a:rPr sz="2460" b="0" i="0">
-                <a:solidFill>
-                  <a:srgbClr val="0B0B0B"/>
-                </a:solidFill>
-                <a:latin typeface="Arial"/>
-              </a:rPr>
-              <a:t>ARC-AGI-2:</a:t>
-            </a:r>
-            <a:r>
-              <a:rPr sz="2460" b="0" i="0">
+              <a:rPr sz="2270" b="0" i="0">
+                <a:solidFill>
+                  <a:srgbClr val="0B0B0B"/>
+                </a:solidFill>
+                <a:latin typeface="Arial"/>
+              </a:rPr>
+              <a:t>ARC-AGI-2</a:t>
+            </a:r>
+            <a:r>
+              <a:rPr sz="2270" b="0" i="0">
                 <a:solidFill>
                   <a:srgbClr val="0B0B0B"/>
                 </a:solidFill>
@@ -7679,49 +7715,13 @@
               <a:t> </a:t>
             </a:r>
             <a:r>
-              <a:rPr sz="2460" b="0" i="0">
-                <a:solidFill>
-                  <a:srgbClr val="0B0B0B"/>
-                </a:solidFill>
-                <a:latin typeface="Arial"/>
-              </a:rPr>
-              <a:t>native</a:t>
-            </a:r>
-            <a:r>
-              <a:rPr sz="2460" b="0" i="0">
-                <a:solidFill>
-                  <a:srgbClr val="0B0B0B"/>
-                </a:solidFill>
-                <a:latin typeface="Arial"/>
-              </a:rPr>
-              <a:t> </a:t>
-            </a:r>
-            <a:r>
-              <a:rPr sz="2460" b="0" i="0">
-                <a:solidFill>
-                  <a:srgbClr val="0B0B0B"/>
-                </a:solidFill>
-                <a:latin typeface="Arial"/>
-              </a:rPr>
-              <a:t>CORA</a:t>
-            </a:r>
-            <a:r>
-              <a:rPr sz="2460" b="1" i="0">
-                <a:solidFill>
-                  <a:srgbClr val="0B0B0B"/>
-                </a:solidFill>
-                <a:latin typeface="Arial"/>
-              </a:rPr>
-              <a:t> </a:t>
-            </a:r>
-            <a:r>
-              <a:rPr sz="2460" b="1" i="0">
-                <a:solidFill>
-                  <a:srgbClr val="0B0B0B"/>
-                </a:solidFill>
-                <a:latin typeface="Arial"/>
-              </a:rPr>
-              <a:t>0.00%</a:t>
+              <a:rPr sz="2270" b="0" i="0">
+                <a:solidFill>
+                  <a:srgbClr val="0B0B0B"/>
+                </a:solidFill>
+                <a:latin typeface="Arial"/>
+              </a:rPr>
+              <a:t>scores</a:t>
             </a:r>
           </a:p>
         </p:txBody>
@@ -7734,8 +7734,8 @@
         </p:nvSpPr>
         <p:spPr>
           <a:xfrm>
-            <a:off x="19555243" y="39345982"/>
-            <a:ext cx="8424236" cy="322324"/>
+            <a:off x="19529945" y="39314332"/>
+            <a:ext cx="3906868" cy="288475"/>
           </a:xfrm>
           <a:prstGeom prst="rect">
             <a:avLst/>
@@ -7749,16 +7749,16 @@
           <a:lstStyle/>
           <a:p>
             <a:r>
-              <a:rPr sz="2480" b="0" i="1">
-                <a:solidFill>
-                  <a:srgbClr val="0B0B0B"/>
-                </a:solidFill>
-                <a:latin typeface="Arial"/>
-              </a:rPr>
-              <a:t>·</a:t>
-            </a:r>
-            <a:r>
-              <a:rPr sz="2460" b="0" i="0">
+              <a:rPr sz="2270" b="1" i="0">
+                <a:solidFill>
+                  <a:srgbClr val="0B0B0B"/>
+                </a:solidFill>
+                <a:latin typeface="Arial"/>
+              </a:rPr>
+              <a:t>NVARC</a:t>
+            </a:r>
+            <a:r>
+              <a:rPr sz="2270" b="1" i="0">
                 <a:solidFill>
                   <a:srgbClr val="0B0B0B"/>
                 </a:solidFill>
@@ -7767,16 +7767,16 @@
               <a:t> </a:t>
             </a:r>
             <a:r>
-              <a:rPr sz="2460" b="0" i="0">
-                <a:solidFill>
-                  <a:srgbClr val="0B0B0B"/>
-                </a:solidFill>
-                <a:latin typeface="Arial"/>
-              </a:rPr>
-              <a:t>CORA</a:t>
-            </a:r>
-            <a:r>
-              <a:rPr sz="2460" b="0" i="0">
+              <a:rPr sz="2270" b="1" i="0">
+                <a:solidFill>
+                  <a:srgbClr val="0B0B0B"/>
+                </a:solidFill>
+                <a:latin typeface="Arial"/>
+              </a:rPr>
+              <a:t>/</a:t>
+            </a:r>
+            <a:r>
+              <a:rPr sz="2270" b="1" i="0">
                 <a:solidFill>
                   <a:srgbClr val="0B0B0B"/>
                 </a:solidFill>
@@ -7785,16 +7785,16 @@
               <a:t> </a:t>
             </a:r>
             <a:r>
-              <a:rPr sz="2460" b="0" i="0">
-                <a:solidFill>
-                  <a:srgbClr val="0B0B0B"/>
-                </a:solidFill>
-                <a:latin typeface="Arial"/>
-              </a:rPr>
-              <a:t>with</a:t>
-            </a:r>
-            <a:r>
-              <a:rPr sz="2460" b="0" i="0">
+              <a:rPr sz="2270" b="1" i="0">
+                <a:solidFill>
+                  <a:srgbClr val="0B0B0B"/>
+                </a:solidFill>
+                <a:latin typeface="Arial"/>
+              </a:rPr>
+              <a:t>Qwen3-4B:</a:t>
+            </a:r>
+            <a:r>
+              <a:rPr sz="2270" b="1" i="0">
                 <a:solidFill>
                   <a:srgbClr val="0B0B0B"/>
                 </a:solidFill>
@@ -7803,103 +7803,13 @@
               <a:t> </a:t>
             </a:r>
             <a:r>
-              <a:rPr sz="2460" b="0" i="0">
-                <a:solidFill>
-                  <a:srgbClr val="0B0B0B"/>
-                </a:solidFill>
-                <a:latin typeface="Arial"/>
-              </a:rPr>
-              <a:t>rule</a:t>
-            </a:r>
-            <a:r>
-              <a:rPr sz="2460" b="0" i="0">
-                <a:solidFill>
-                  <a:srgbClr val="0B0B0B"/>
-                </a:solidFill>
-                <a:latin typeface="Arial"/>
-              </a:rPr>
-              <a:t> </a:t>
-            </a:r>
-            <a:r>
-              <a:rPr sz="2460" b="0" i="0">
-                <a:solidFill>
-                  <a:srgbClr val="0B0B0B"/>
-                </a:solidFill>
-                <a:latin typeface="Arial"/>
-              </a:rPr>
-              <a:t>construction</a:t>
-            </a:r>
-            <a:r>
-              <a:rPr sz="2460" b="1" i="0">
-                <a:solidFill>
-                  <a:srgbClr val="0B0B0B"/>
-                </a:solidFill>
-                <a:latin typeface="Arial"/>
-              </a:rPr>
-              <a:t> </a:t>
-            </a:r>
-            <a:r>
-              <a:rPr sz="2460" b="1" i="0">
-                <a:solidFill>
-                  <a:srgbClr val="0B0B0B"/>
-                </a:solidFill>
-                <a:latin typeface="Arial"/>
-              </a:rPr>
-              <a:t>0.00%</a:t>
-            </a:r>
-            <a:r>
-              <a:rPr sz="2480" b="0" i="1">
-                <a:solidFill>
-                  <a:srgbClr val="0B0B0B"/>
-                </a:solidFill>
-                <a:latin typeface="Arial"/>
-              </a:rPr>
-              <a:t> </a:t>
-            </a:r>
-            <a:r>
-              <a:rPr sz="2480" b="0" i="1">
-                <a:solidFill>
-                  <a:srgbClr val="0B0B0B"/>
-                </a:solidFill>
-                <a:latin typeface="Arial"/>
-              </a:rPr>
-              <a:t>·</a:t>
-            </a:r>
-            <a:r>
-              <a:rPr sz="2460" b="0" i="0">
-                <a:solidFill>
-                  <a:srgbClr val="0B0B0B"/>
-                </a:solidFill>
-                <a:latin typeface="Arial"/>
-              </a:rPr>
-              <a:t> </a:t>
-            </a:r>
-            <a:r>
-              <a:rPr sz="2460" b="0" i="0">
-                <a:solidFill>
-                  <a:srgbClr val="0B0B0B"/>
-                </a:solidFill>
-                <a:latin typeface="Arial"/>
-              </a:rPr>
-              <a:t>NVARC</a:t>
-            </a:r>
-            <a:r>
-              <a:rPr sz="2460" b="0" i="0">
-                <a:solidFill>
-                  <a:srgbClr val="0B0B0B"/>
-                </a:solidFill>
-                <a:latin typeface="Arial"/>
-              </a:rPr>
-              <a:t> </a:t>
-            </a:r>
-            <a:r>
-              <a:rPr sz="2460" b="0" i="0">
-                <a:solidFill>
-                  <a:srgbClr val="0B0B0B"/>
-                </a:solidFill>
-                <a:latin typeface="Arial"/>
-              </a:rPr>
-              <a:t>reproduction</a:t>
+              <a:rPr sz="2270" b="1" i="0">
+                <a:solidFill>
+                  <a:srgbClr val="0B0B0B"/>
+                </a:solidFill>
+                <a:latin typeface="Arial"/>
+              </a:rPr>
+              <a:t>27.64%</a:t>
             </a:r>
           </a:p>
         </p:txBody>
@@ -7912,8 +7822,8 @@
         </p:nvSpPr>
         <p:spPr>
           <a:xfrm>
-            <a:off x="19555245" y="39760422"/>
-            <a:ext cx="9021453" cy="312774"/>
+            <a:off x="24073742" y="39314093"/>
+            <a:ext cx="4154565" cy="288714"/>
           </a:xfrm>
           <a:prstGeom prst="rect">
             <a:avLst/>
@@ -7927,25 +7837,16 @@
           <a:lstStyle/>
           <a:p>
             <a:r>
-              <a:rPr sz="2460" b="1" i="0">
-                <a:solidFill>
-                  <a:srgbClr val="0B0B0B"/>
-                </a:solidFill>
-                <a:latin typeface="Arial"/>
-              </a:rPr>
-              <a:t>27.64%</a:t>
-            </a:r>
-            <a:r>
-              <a:rPr sz="2460" b="0" i="0">
-                <a:solidFill>
-                  <a:srgbClr val="0B0B0B"/>
-                </a:solidFill>
-                <a:latin typeface="Arial"/>
-              </a:rPr>
-              <a:t>,</a:t>
-            </a:r>
-            <a:r>
-              <a:rPr sz="2460" b="0" i="0">
+              <a:rPr sz="2270" b="1" i="0">
+                <a:solidFill>
+                  <a:srgbClr val="0B0B0B"/>
+                </a:solidFill>
+                <a:latin typeface="Arial"/>
+              </a:rPr>
+              <a:t>CORA:</a:t>
+            </a:r>
+            <a:r>
+              <a:rPr sz="2270" b="1" i="0">
                 <a:solidFill>
                   <a:srgbClr val="0B0B0B"/>
                 </a:solidFill>
@@ -7954,16 +7855,16 @@
               <a:t> </a:t>
             </a:r>
             <a:r>
-              <a:rPr sz="2460" b="0" i="0">
-                <a:solidFill>
-                  <a:srgbClr val="0B0B0B"/>
-                </a:solidFill>
-                <a:latin typeface="Arial"/>
-              </a:rPr>
-              <a:t>a</a:t>
-            </a:r>
-            <a:r>
-              <a:rPr sz="2460" b="0" i="0">
+              <a:rPr sz="2270" b="1" i="0">
+                <a:solidFill>
+                  <a:srgbClr val="0B0B0B"/>
+                </a:solidFill>
+                <a:latin typeface="Arial"/>
+              </a:rPr>
+              <a:t>0.00%</a:t>
+            </a:r>
+            <a:r>
+              <a:rPr sz="2270" b="0" i="0">
                 <a:solidFill>
                   <a:srgbClr val="0B0B0B"/>
                 </a:solidFill>
@@ -7972,16 +7873,16 @@
               <a:t> </a:t>
             </a:r>
             <a:r>
-              <a:rPr sz="2460" b="0" i="0">
-                <a:solidFill>
-                  <a:srgbClr val="0B0B0B"/>
-                </a:solidFill>
-                <a:latin typeface="Arial"/>
-              </a:rPr>
-              <a:t>third-party</a:t>
-            </a:r>
-            <a:r>
-              <a:rPr sz="2460" b="0" i="0">
+              <a:rPr sz="2270" b="0" i="0">
+                <a:solidFill>
+                  <a:srgbClr val="0B0B0B"/>
+                </a:solidFill>
+                <a:latin typeface="Arial"/>
+              </a:rPr>
+              <a:t>(also</a:t>
+            </a:r>
+            <a:r>
+              <a:rPr sz="2270" b="0" i="0">
                 <a:solidFill>
                   <a:srgbClr val="0B0B0B"/>
                 </a:solidFill>
@@ -7990,16 +7891,16 @@
               <a:t> </a:t>
             </a:r>
             <a:r>
-              <a:rPr sz="2460" b="0" i="0">
-                <a:solidFill>
-                  <a:srgbClr val="0B0B0B"/>
-                </a:solidFill>
-                <a:latin typeface="Arial"/>
-              </a:rPr>
-              <a:t>Qwen3-4B</a:t>
-            </a:r>
-            <a:r>
-              <a:rPr sz="2460" b="0" i="0">
+              <a:rPr sz="2270" b="0" i="0">
+                <a:solidFill>
+                  <a:srgbClr val="0B0B0B"/>
+                </a:solidFill>
+                <a:latin typeface="Arial"/>
+              </a:rPr>
+              <a:t>0.00%</a:t>
+            </a:r>
+            <a:r>
+              <a:rPr sz="2270" b="0" i="0">
                 <a:solidFill>
                   <a:srgbClr val="0B0B0B"/>
                 </a:solidFill>
@@ -8008,94 +7909,13 @@
               <a:t> </a:t>
             </a:r>
             <a:r>
-              <a:rPr sz="2460" b="0" i="0">
-                <a:solidFill>
-                  <a:srgbClr val="0B0B0B"/>
-                </a:solidFill>
-                <a:latin typeface="Arial"/>
-              </a:rPr>
-              <a:t>method,</a:t>
-            </a:r>
-            <a:r>
-              <a:rPr sz="2460" b="1" i="0">
-                <a:solidFill>
-                  <a:srgbClr val="0B0B0B"/>
-                </a:solidFill>
-                <a:latin typeface="Arial"/>
-              </a:rPr>
-              <a:t> </a:t>
-            </a:r>
-            <a:r>
-              <a:rPr sz="2460" b="1" i="0">
-                <a:solidFill>
-                  <a:srgbClr val="0B0B0B"/>
-                </a:solidFill>
-                <a:latin typeface="Arial"/>
-              </a:rPr>
-              <a:t>not</a:t>
-            </a:r>
-            <a:r>
-              <a:rPr sz="2460" b="1" i="0">
-                <a:solidFill>
-                  <a:srgbClr val="0B0B0B"/>
-                </a:solidFill>
-                <a:latin typeface="Arial"/>
-              </a:rPr>
-              <a:t> </a:t>
-            </a:r>
-            <a:r>
-              <a:rPr sz="2460" b="1" i="0">
-                <a:solidFill>
-                  <a:srgbClr val="0B0B0B"/>
-                </a:solidFill>
-                <a:latin typeface="Arial"/>
-              </a:rPr>
-              <a:t>CORA</a:t>
-            </a:r>
-            <a:r>
-              <a:rPr sz="2460" b="0" i="0">
-                <a:solidFill>
-                  <a:srgbClr val="0B0B0B"/>
-                </a:solidFill>
-                <a:latin typeface="Arial"/>
-              </a:rPr>
-              <a:t>:</a:t>
-            </a:r>
-            <a:r>
-              <a:rPr sz="2460" b="0" i="0">
-                <a:solidFill>
-                  <a:srgbClr val="0B0B0B"/>
-                </a:solidFill>
-                <a:latin typeface="Arial"/>
-              </a:rPr>
-              <a:t> </a:t>
-            </a:r>
-            <a:r>
-              <a:rPr sz="2460" b="0" i="0">
-                <a:solidFill>
-                  <a:srgbClr val="0B0B0B"/>
-                </a:solidFill>
-                <a:latin typeface="Arial"/>
-              </a:rPr>
-              <a:t>a</a:t>
-            </a:r>
-            <a:r>
-              <a:rPr sz="2460" b="0" i="0">
-                <a:solidFill>
-                  <a:srgbClr val="0B0B0B"/>
-                </a:solidFill>
-                <a:latin typeface="Arial"/>
-              </a:rPr>
-              <a:t> </a:t>
-            </a:r>
-            <a:r>
-              <a:rPr sz="2460" b="0" i="0">
-                <a:solidFill>
-                  <a:srgbClr val="0B0B0B"/>
-                </a:solidFill>
-                <a:latin typeface="Arial"/>
-              </a:rPr>
-              <a:t>compet-</a:t>
+              <a:rPr sz="2270" b="0" i="0">
+                <a:solidFill>
+                  <a:srgbClr val="0B0B0B"/>
+                </a:solidFill>
+                <a:latin typeface="Arial"/>
+              </a:rPr>
+              <a:t>with</a:t>
             </a:r>
           </a:p>
         </p:txBody>
@@ -8108,8 +7928,8 @@
         </p:nvSpPr>
         <p:spPr>
           <a:xfrm>
-            <a:off x="19555245" y="40165297"/>
-            <a:ext cx="8791908" cy="312517"/>
+            <a:off x="24073775" y="39681010"/>
+            <a:ext cx="2287647" cy="288475"/>
           </a:xfrm>
           <a:prstGeom prst="rect">
             <a:avLst/>
@@ -8123,16 +7943,16 @@
           <a:lstStyle/>
           <a:p>
             <a:r>
-              <a:rPr sz="2460" b="0" i="0">
-                <a:solidFill>
-                  <a:srgbClr val="0B0B0B"/>
-                </a:solidFill>
-                <a:latin typeface="Arial"/>
-              </a:rPr>
-              <a:t>itive</a:t>
-            </a:r>
-            <a:r>
-              <a:rPr sz="2460" b="0" i="0">
+              <a:rPr sz="2270" b="0" i="0">
+                <a:solidFill>
+                  <a:srgbClr val="0B0B0B"/>
+                </a:solidFill>
+                <a:latin typeface="Arial"/>
+              </a:rPr>
+              <a:t>rule</a:t>
+            </a:r>
+            <a:r>
+              <a:rPr sz="2270" b="0" i="0">
                 <a:solidFill>
                   <a:srgbClr val="0B0B0B"/>
                 </a:solidFill>
@@ -8141,139 +7961,13 @@
               <a:t> </a:t>
             </a:r>
             <a:r>
-              <a:rPr sz="2460" b="0" i="0">
-                <a:solidFill>
-                  <a:srgbClr val="0B0B0B"/>
-                </a:solidFill>
-                <a:latin typeface="Arial"/>
-              </a:rPr>
-              <a:t>baseline.</a:t>
-            </a:r>
-            <a:r>
-              <a:rPr sz="2460" b="0" i="0">
-                <a:solidFill>
-                  <a:srgbClr val="0B0B0B"/>
-                </a:solidFill>
-                <a:latin typeface="Arial"/>
-              </a:rPr>
-              <a:t> </a:t>
-            </a:r>
-            <a:r>
-              <a:rPr sz="2460" b="0" i="0">
-                <a:solidFill>
-                  <a:srgbClr val="0B0B0B"/>
-                </a:solidFill>
-                <a:latin typeface="Arial"/>
-              </a:rPr>
-              <a:t>CORA</a:t>
-            </a:r>
-            <a:r>
-              <a:rPr sz="2460" b="0" i="0">
-                <a:solidFill>
-                  <a:srgbClr val="0B0B0B"/>
-                </a:solidFill>
-                <a:latin typeface="Arial"/>
-              </a:rPr>
-              <a:t> </a:t>
-            </a:r>
-            <a:r>
-              <a:rPr sz="2460" b="0" i="0">
-                <a:solidFill>
-                  <a:srgbClr val="0B0B0B"/>
-                </a:solidFill>
-                <a:latin typeface="Arial"/>
-              </a:rPr>
-              <a:t>asks</a:t>
-            </a:r>
-            <a:r>
-              <a:rPr sz="2460" b="0" i="0">
-                <a:solidFill>
-                  <a:srgbClr val="0B0B0B"/>
-                </a:solidFill>
-                <a:latin typeface="Arial"/>
-              </a:rPr>
-              <a:t> </a:t>
-            </a:r>
-            <a:r>
-              <a:rPr sz="2460" b="0" i="0">
-                <a:solidFill>
-                  <a:srgbClr val="0B0B0B"/>
-                </a:solidFill>
-                <a:latin typeface="Arial"/>
-              </a:rPr>
-              <a:t>whether</a:t>
-            </a:r>
-            <a:r>
-              <a:rPr sz="2460" b="0" i="0">
-                <a:solidFill>
-                  <a:srgbClr val="0B0B0B"/>
-                </a:solidFill>
-                <a:latin typeface="Arial"/>
-              </a:rPr>
-              <a:t> </a:t>
-            </a:r>
-            <a:r>
-              <a:rPr sz="2460" b="0" i="0">
-                <a:solidFill>
-                  <a:srgbClr val="0B0B0B"/>
-                </a:solidFill>
-                <a:latin typeface="Arial"/>
-              </a:rPr>
-              <a:t>executable</a:t>
-            </a:r>
-            <a:r>
-              <a:rPr sz="2460" b="0" i="0">
-                <a:solidFill>
-                  <a:srgbClr val="0B0B0B"/>
-                </a:solidFill>
-                <a:latin typeface="Arial"/>
-              </a:rPr>
-              <a:t> </a:t>
-            </a:r>
-            <a:r>
-              <a:rPr sz="2460" b="0" i="0">
-                <a:solidFill>
-                  <a:srgbClr val="0B0B0B"/>
-                </a:solidFill>
-                <a:latin typeface="Arial"/>
-              </a:rPr>
-              <a:t>revision</a:t>
-            </a:r>
-            <a:r>
-              <a:rPr sz="2460" b="0" i="0">
-                <a:solidFill>
-                  <a:srgbClr val="0B0B0B"/>
-                </a:solidFill>
-                <a:latin typeface="Arial"/>
-              </a:rPr>
-              <a:t> </a:t>
-            </a:r>
-            <a:r>
-              <a:rPr sz="2460" b="0" i="0">
-                <a:solidFill>
-                  <a:srgbClr val="0B0B0B"/>
-                </a:solidFill>
-                <a:latin typeface="Arial"/>
-              </a:rPr>
-              <a:t>adds</a:t>
-            </a:r>
-            <a:r>
-              <a:rPr sz="2460" b="0" i="0">
-                <a:solidFill>
-                  <a:srgbClr val="0B0B0B"/>
-                </a:solidFill>
-                <a:latin typeface="Arial"/>
-              </a:rPr>
-              <a:t> </a:t>
-            </a:r>
-            <a:r>
-              <a:rPr sz="2460" b="0" i="0">
-                <a:solidFill>
-                  <a:srgbClr val="0B0B0B"/>
-                </a:solidFill>
-                <a:latin typeface="Arial"/>
-              </a:rPr>
-              <a:t>a</a:t>
+              <a:rPr sz="2270" b="0" i="0">
+                <a:solidFill>
+                  <a:srgbClr val="0B0B0B"/>
+                </a:solidFill>
+                <a:latin typeface="Arial"/>
+              </a:rPr>
+              <a:t>construction)</a:t>
             </a:r>
           </a:p>
         </p:txBody>
@@ -8286,8 +7980,8 @@
         </p:nvSpPr>
         <p:spPr>
           <a:xfrm>
-            <a:off x="19555245" y="40570187"/>
-            <a:ext cx="2725949" cy="312517"/>
+            <a:off x="19529944" y="40047936"/>
+            <a:ext cx="4054281" cy="288475"/>
           </a:xfrm>
           <a:prstGeom prst="rect">
             <a:avLst/>
@@ -8301,16 +7995,16 @@
           <a:lstStyle/>
           <a:p>
             <a:r>
-              <a:rPr sz="2460" b="0" i="0">
-                <a:solidFill>
-                  <a:srgbClr val="0B0B0B"/>
-                </a:solidFill>
-                <a:latin typeface="Arial"/>
-              </a:rPr>
-              <a:t>separate</a:t>
-            </a:r>
-            <a:r>
-              <a:rPr sz="2460" b="0" i="0">
+              <a:rPr sz="2270" b="0" i="0">
+                <a:solidFill>
+                  <a:srgbClr val="0B0B0B"/>
+                </a:solidFill>
+                <a:latin typeface="Arial"/>
+              </a:rPr>
+              <a:t>reproduced</a:t>
+            </a:r>
+            <a:r>
+              <a:rPr sz="2270" b="0" i="0">
                 <a:solidFill>
                   <a:srgbClr val="0B0B0B"/>
                 </a:solidFill>
@@ -8319,13 +8013,31 @@
               <a:t> </a:t>
             </a:r>
             <a:r>
-              <a:rPr sz="2460" b="0" i="0">
-                <a:solidFill>
-                  <a:srgbClr val="0B0B0B"/>
-                </a:solidFill>
-                <a:latin typeface="Arial"/>
-              </a:rPr>
-              <a:t>capability.</a:t>
+              <a:rPr sz="2270" b="0" i="0">
+                <a:solidFill>
+                  <a:srgbClr val="0B0B0B"/>
+                </a:solidFill>
+                <a:latin typeface="Arial"/>
+              </a:rPr>
+              <a:t>third-party</a:t>
+            </a:r>
+            <a:r>
+              <a:rPr sz="2270" b="0" i="0">
+                <a:solidFill>
+                  <a:srgbClr val="0B0B0B"/>
+                </a:solidFill>
+                <a:latin typeface="Arial"/>
+              </a:rPr>
+              <a:t> </a:t>
+            </a:r>
+            <a:r>
+              <a:rPr sz="2270" b="0" i="0">
+                <a:solidFill>
+                  <a:srgbClr val="0B0B0B"/>
+                </a:solidFill>
+                <a:latin typeface="Arial"/>
+              </a:rPr>
+              <a:t>method,</a:t>
             </a:r>
           </a:p>
         </p:txBody>
@@ -8338,8 +8050,8 @@
         </p:nvSpPr>
         <p:spPr>
           <a:xfrm>
-            <a:off x="936003" y="41490007"/>
-            <a:ext cx="28454909" cy="264439"/>
+            <a:off x="19529944" y="40414866"/>
+            <a:ext cx="4036480" cy="288714"/>
           </a:xfrm>
           <a:prstGeom prst="rect">
             <a:avLst/>
@@ -8353,49 +8065,94 @@
           <a:lstStyle/>
           <a:p>
             <a:r>
-              <a:rPr sz="2080" b="0" i="0">
-                <a:solidFill>
-                  <a:srgbClr val="52514E"/>
-                </a:solidFill>
-                <a:latin typeface="Arial"/>
-              </a:rPr>
-              <a:t>Related work:</a:t>
-            </a:r>
-            <a:r>
-              <a:rPr sz="2080" b="0" i="0">
-                <a:solidFill>
-                  <a:srgbClr val="52514E"/>
+              <a:rPr sz="2270" b="1" i="0">
+                <a:solidFill>
+                  <a:srgbClr val="0B0B0B"/>
+                </a:solidFill>
+                <a:latin typeface="Arial"/>
+              </a:rPr>
+              <a:t>not</a:t>
+            </a:r>
+            <a:r>
+              <a:rPr sz="2270" b="1" i="0">
+                <a:solidFill>
+                  <a:srgbClr val="0B0B0B"/>
                 </a:solidFill>
                 <a:latin typeface="Arial"/>
               </a:rPr>
               <a:t> </a:t>
             </a:r>
             <a:r>
-              <a:rPr sz="2080" b="0" i="0">
-                <a:solidFill>
-                  <a:srgbClr val="52514E"/>
-                </a:solidFill>
-                <a:latin typeface="Arial"/>
-              </a:rPr>
-              <a:t>Popper (Cropper &amp; Morel 2021); DreamCoder (Ellis et al. 2021); LILO (Grand et al. 2024); Model Discovery Agent (Murphy 2026).</a:t>
-            </a:r>
-            <a:r>
-              <a:rPr sz="2080" b="0" i="0">
-                <a:solidFill>
-                  <a:srgbClr val="52514E"/>
+              <a:rPr sz="2270" b="1" i="0">
+                <a:solidFill>
+                  <a:srgbClr val="0B0B0B"/>
+                </a:solidFill>
+                <a:latin typeface="Arial"/>
+              </a:rPr>
+              <a:t>CORA</a:t>
+            </a:r>
+            <a:r>
+              <a:rPr sz="2270" b="0" i="0">
+                <a:solidFill>
+                  <a:srgbClr val="0B0B0B"/>
+                </a:solidFill>
+                <a:latin typeface="Arial"/>
+              </a:rPr>
+              <a:t>;</a:t>
+            </a:r>
+            <a:r>
+              <a:rPr sz="2270" b="0" i="0">
+                <a:solidFill>
+                  <a:srgbClr val="0B0B0B"/>
                 </a:solidFill>
                 <a:latin typeface="Arial"/>
               </a:rPr>
               <a:t> </a:t>
             </a:r>
             <a:r>
-              <a:rPr sz="2080" b="0" i="0">
-                <a:solidFill>
-                  <a:srgbClr val="52514E"/>
-                </a:solidFill>
-                <a:latin typeface="Arial"/>
-              </a:rPr>
-              <a:t>The failure-to-revision idea is not new; the question is which component to revise, against matched</a:t>
+              <a:rPr sz="2270" b="0" i="0">
+                <a:solidFill>
+                  <a:srgbClr val="0B0B0B"/>
+                </a:solidFill>
+                <a:latin typeface="Arial"/>
+              </a:rPr>
+              <a:t>neural</a:t>
+            </a:r>
+            <a:r>
+              <a:rPr sz="2270" b="0" i="0">
+                <a:solidFill>
+                  <a:srgbClr val="0B0B0B"/>
+                </a:solidFill>
+                <a:latin typeface="Arial"/>
+              </a:rPr>
+              <a:t> </a:t>
+            </a:r>
+            <a:r>
+              <a:rPr sz="2270" b="0" i="0">
+                <a:solidFill>
+                  <a:srgbClr val="0B0B0B"/>
+                </a:solidFill>
+                <a:latin typeface="Arial"/>
+              </a:rPr>
+              <a:t>training</a:t>
+            </a:r>
+            <a:r>
+              <a:rPr sz="2270" b="0" i="0">
+                <a:solidFill>
+                  <a:srgbClr val="0B0B0B"/>
+                </a:solidFill>
+                <a:latin typeface="Arial"/>
+              </a:rPr>
+              <a:t> </a:t>
+            </a:r>
+            <a:r>
+              <a:rPr sz="2270" b="0" i="0">
+                <a:solidFill>
+                  <a:srgbClr val="0B0B0B"/>
+                </a:solidFill>
+                <a:latin typeface="Arial"/>
+              </a:rPr>
+              <a:t>and</a:t>
             </a:r>
           </a:p>
         </p:txBody>
@@ -8408,7 +8165,643 @@
         </p:nvSpPr>
         <p:spPr>
           <a:xfrm>
-            <a:off x="936003" y="41826684"/>
+            <a:off x="19529944" y="40781780"/>
+            <a:ext cx="2536028" cy="288475"/>
+          </a:xfrm>
+          <a:prstGeom prst="rect">
+            <a:avLst/>
+          </a:prstGeom>
+          <a:noFill/>
+        </p:spPr>
+        <p:txBody>
+          <a:bodyPr wrap="none" lIns="0" rIns="0" tIns="0" bIns="0">
+            <a:spAutoFit/>
+          </a:bodyPr>
+          <a:lstStyle/>
+          <a:p>
+            <a:r>
+              <a:rPr sz="2270" b="0" i="0">
+                <a:solidFill>
+                  <a:srgbClr val="0B0B0B"/>
+                </a:solidFill>
+                <a:latin typeface="Arial"/>
+              </a:rPr>
+              <a:t>per-task</a:t>
+            </a:r>
+            <a:r>
+              <a:rPr sz="2270" b="0" i="0">
+                <a:solidFill>
+                  <a:srgbClr val="0B0B0B"/>
+                </a:solidFill>
+                <a:latin typeface="Arial"/>
+              </a:rPr>
+              <a:t> </a:t>
+            </a:r>
+            <a:r>
+              <a:rPr sz="2270" b="0" i="0">
+                <a:solidFill>
+                  <a:srgbClr val="0B0B0B"/>
+                </a:solidFill>
+                <a:latin typeface="Arial"/>
+              </a:rPr>
+              <a:t>adaptation</a:t>
+            </a:r>
+          </a:p>
+        </p:txBody>
+      </p:sp>
+      <p:sp>
+        <p:nvSpPr>
+          <p:cNvPr id="117" name="TextBox 116"/>
+          <p:cNvSpPr txBox="1"/>
+          <p:nvPr/>
+        </p:nvSpPr>
+        <p:spPr>
+          <a:xfrm>
+            <a:off x="24073775" y="40047936"/>
+            <a:ext cx="3252609" cy="288475"/>
+          </a:xfrm>
+          <a:prstGeom prst="rect">
+            <a:avLst/>
+          </a:prstGeom>
+          <a:noFill/>
+        </p:spPr>
+        <p:txBody>
+          <a:bodyPr wrap="none" lIns="0" rIns="0" tIns="0" bIns="0">
+            <a:spAutoFit/>
+          </a:bodyPr>
+          <a:lstStyle/>
+          <a:p>
+            <a:r>
+              <a:rPr sz="2270" b="0" i="0">
+                <a:solidFill>
+                  <a:srgbClr val="0B0B0B"/>
+                </a:solidFill>
+                <a:latin typeface="Arial"/>
+              </a:rPr>
+              <a:t>original</a:t>
+            </a:r>
+            <a:r>
+              <a:rPr sz="2270" b="0" i="0">
+                <a:solidFill>
+                  <a:srgbClr val="0B0B0B"/>
+                </a:solidFill>
+                <a:latin typeface="Arial"/>
+              </a:rPr>
+              <a:t> </a:t>
+            </a:r>
+            <a:r>
+              <a:rPr sz="2270" b="0" i="0">
+                <a:solidFill>
+                  <a:srgbClr val="0B0B0B"/>
+                </a:solidFill>
+                <a:latin typeface="Arial"/>
+              </a:rPr>
+              <a:t>research;</a:t>
+            </a:r>
+            <a:r>
+              <a:rPr sz="2270" b="0" i="0">
+                <a:solidFill>
+                  <a:srgbClr val="0B0B0B"/>
+                </a:solidFill>
+                <a:latin typeface="Arial"/>
+              </a:rPr>
+              <a:t> </a:t>
+            </a:r>
+            <a:r>
+              <a:rPr sz="2270" b="0" i="0">
+                <a:solidFill>
+                  <a:srgbClr val="0B0B0B"/>
+                </a:solidFill>
+                <a:latin typeface="Arial"/>
+              </a:rPr>
+              <a:t>explicit</a:t>
+            </a:r>
+          </a:p>
+        </p:txBody>
+      </p:sp>
+      <p:sp>
+        <p:nvSpPr>
+          <p:cNvPr id="118" name="TextBox 117"/>
+          <p:cNvSpPr txBox="1"/>
+          <p:nvPr/>
+        </p:nvSpPr>
+        <p:spPr>
+          <a:xfrm>
+            <a:off x="24073775" y="40414866"/>
+            <a:ext cx="3700901" cy="288475"/>
+          </a:xfrm>
+          <a:prstGeom prst="rect">
+            <a:avLst/>
+          </a:prstGeom>
+          <a:noFill/>
+        </p:spPr>
+        <p:txBody>
+          <a:bodyPr wrap="none" lIns="0" rIns="0" tIns="0" bIns="0">
+            <a:spAutoFit/>
+          </a:bodyPr>
+          <a:lstStyle/>
+          <a:p>
+            <a:r>
+              <a:rPr sz="2270" b="0" i="0">
+                <a:solidFill>
+                  <a:srgbClr val="0B0B0B"/>
+                </a:solidFill>
+                <a:latin typeface="Arial"/>
+              </a:rPr>
+              <a:t>hypotheses,</a:t>
+            </a:r>
+            <a:r>
+              <a:rPr sz="2270" b="0" i="0">
+                <a:solidFill>
+                  <a:srgbClr val="0B0B0B"/>
+                </a:solidFill>
+                <a:latin typeface="Arial"/>
+              </a:rPr>
+              <a:t> </a:t>
+            </a:r>
+            <a:r>
+              <a:rPr sz="2270" b="0" i="0">
+                <a:solidFill>
+                  <a:srgbClr val="0B0B0B"/>
+                </a:solidFill>
+                <a:latin typeface="Arial"/>
+              </a:rPr>
+              <a:t>tested</a:t>
+            </a:r>
+            <a:r>
+              <a:rPr sz="2270" b="0" i="0">
+                <a:solidFill>
+                  <a:srgbClr val="0B0B0B"/>
+                </a:solidFill>
+                <a:latin typeface="Arial"/>
+              </a:rPr>
+              <a:t> </a:t>
+            </a:r>
+            <a:r>
+              <a:rPr sz="2270" b="0" i="0">
+                <a:solidFill>
+                  <a:srgbClr val="0B0B0B"/>
+                </a:solidFill>
+                <a:latin typeface="Arial"/>
+              </a:rPr>
+              <a:t>revisions</a:t>
+            </a:r>
+          </a:p>
+        </p:txBody>
+      </p:sp>
+      <p:sp>
+        <p:nvSpPr>
+          <p:cNvPr id="119" name="TextBox 118"/>
+          <p:cNvSpPr txBox="1"/>
+          <p:nvPr/>
+        </p:nvSpPr>
+        <p:spPr>
+          <a:xfrm>
+            <a:off x="19529944" y="41172649"/>
+            <a:ext cx="9234247" cy="288714"/>
+          </a:xfrm>
+          <a:prstGeom prst="rect">
+            <a:avLst/>
+          </a:prstGeom>
+          <a:noFill/>
+        </p:spPr>
+        <p:txBody>
+          <a:bodyPr wrap="none" lIns="0" rIns="0" tIns="0" bIns="0">
+            <a:spAutoFit/>
+          </a:bodyPr>
+          <a:lstStyle/>
+          <a:p>
+            <a:r>
+              <a:rPr sz="2270" b="1" i="0">
+                <a:solidFill>
+                  <a:srgbClr val="0B0B0B"/>
+                </a:solidFill>
+                <a:latin typeface="Arial"/>
+              </a:rPr>
+              <a:t>Open</a:t>
+            </a:r>
+            <a:r>
+              <a:rPr sz="2270" b="1" i="0">
+                <a:solidFill>
+                  <a:srgbClr val="0B0B0B"/>
+                </a:solidFill>
+                <a:latin typeface="Arial"/>
+              </a:rPr>
+              <a:t> </a:t>
+            </a:r>
+            <a:r>
+              <a:rPr sz="2270" b="1" i="0">
+                <a:solidFill>
+                  <a:srgbClr val="0B0B0B"/>
+                </a:solidFill>
+                <a:latin typeface="Arial"/>
+              </a:rPr>
+              <a:t>question:</a:t>
+            </a:r>
+            <a:r>
+              <a:rPr sz="2270" b="0" i="0">
+                <a:solidFill>
+                  <a:srgbClr val="0B0B0B"/>
+                </a:solidFill>
+                <a:latin typeface="Arial"/>
+              </a:rPr>
+              <a:t> </a:t>
+            </a:r>
+            <a:r>
+              <a:rPr sz="2270" b="0" i="0">
+                <a:solidFill>
+                  <a:srgbClr val="0B0B0B"/>
+                </a:solidFill>
+                <a:latin typeface="Arial"/>
+              </a:rPr>
+              <a:t>can</a:t>
+            </a:r>
+            <a:r>
+              <a:rPr sz="2270" b="0" i="0">
+                <a:solidFill>
+                  <a:srgbClr val="0B0B0B"/>
+                </a:solidFill>
+                <a:latin typeface="Arial"/>
+              </a:rPr>
+              <a:t> </a:t>
+            </a:r>
+            <a:r>
+              <a:rPr sz="2270" b="0" i="0">
+                <a:solidFill>
+                  <a:srgbClr val="0B0B0B"/>
+                </a:solidFill>
+                <a:latin typeface="Arial"/>
+              </a:rPr>
+              <a:t>learned</a:t>
+            </a:r>
+            <a:r>
+              <a:rPr sz="2270" b="0" i="0">
+                <a:solidFill>
+                  <a:srgbClr val="0B0B0B"/>
+                </a:solidFill>
+                <a:latin typeface="Arial"/>
+              </a:rPr>
+              <a:t> </a:t>
+            </a:r>
+            <a:r>
+              <a:rPr sz="2270" b="0" i="0">
+                <a:solidFill>
+                  <a:srgbClr val="0B0B0B"/>
+                </a:solidFill>
+                <a:latin typeface="Arial"/>
+              </a:rPr>
+              <a:t>neural</a:t>
+            </a:r>
+            <a:r>
+              <a:rPr sz="2270" b="0" i="0">
+                <a:solidFill>
+                  <a:srgbClr val="0B0B0B"/>
+                </a:solidFill>
+                <a:latin typeface="Arial"/>
+              </a:rPr>
+              <a:t> </a:t>
+            </a:r>
+            <a:r>
+              <a:rPr sz="2270" b="0" i="0">
+                <a:solidFill>
+                  <a:srgbClr val="0B0B0B"/>
+                </a:solidFill>
+                <a:latin typeface="Arial"/>
+              </a:rPr>
+              <a:t>proposals</a:t>
+            </a:r>
+            <a:r>
+              <a:rPr sz="2270" b="0" i="0">
+                <a:solidFill>
+                  <a:srgbClr val="0B0B0B"/>
+                </a:solidFill>
+                <a:latin typeface="Arial"/>
+              </a:rPr>
+              <a:t> </a:t>
+            </a:r>
+            <a:r>
+              <a:rPr sz="2270" b="0" i="0">
+                <a:solidFill>
+                  <a:srgbClr val="0B0B0B"/>
+                </a:solidFill>
+                <a:latin typeface="Arial"/>
+              </a:rPr>
+              <a:t>help</a:t>
+            </a:r>
+            <a:r>
+              <a:rPr sz="2270" b="0" i="0">
+                <a:solidFill>
+                  <a:srgbClr val="0B0B0B"/>
+                </a:solidFill>
+                <a:latin typeface="Arial"/>
+              </a:rPr>
+              <a:t> </a:t>
+            </a:r>
+            <a:r>
+              <a:rPr sz="2270" b="0" i="0">
+                <a:solidFill>
+                  <a:srgbClr val="0B0B0B"/>
+                </a:solidFill>
+                <a:latin typeface="Arial"/>
+              </a:rPr>
+              <a:t>an</a:t>
+            </a:r>
+            <a:r>
+              <a:rPr sz="2270" b="0" i="0">
+                <a:solidFill>
+                  <a:srgbClr val="0B0B0B"/>
+                </a:solidFill>
+                <a:latin typeface="Arial"/>
+              </a:rPr>
+              <a:t> </a:t>
+            </a:r>
+            <a:r>
+              <a:rPr sz="2270" b="0" i="0">
+                <a:solidFill>
+                  <a:srgbClr val="0B0B0B"/>
+                </a:solidFill>
+                <a:latin typeface="Arial"/>
+              </a:rPr>
+              <a:t>executable</a:t>
+            </a:r>
+            <a:r>
+              <a:rPr sz="2270" b="0" i="0">
+                <a:solidFill>
+                  <a:srgbClr val="0B0B0B"/>
+                </a:solidFill>
+                <a:latin typeface="Arial"/>
+              </a:rPr>
+              <a:t> </a:t>
+            </a:r>
+            <a:r>
+              <a:rPr sz="2270" b="0" i="0">
+                <a:solidFill>
+                  <a:srgbClr val="0B0B0B"/>
+                </a:solidFill>
+                <a:latin typeface="Arial"/>
+              </a:rPr>
+              <a:t>rea-</a:t>
+            </a:r>
+          </a:p>
+        </p:txBody>
+      </p:sp>
+      <p:sp>
+        <p:nvSpPr>
+          <p:cNvPr id="120" name="TextBox 119"/>
+          <p:cNvSpPr txBox="1"/>
+          <p:nvPr/>
+        </p:nvSpPr>
+        <p:spPr>
+          <a:xfrm>
+            <a:off x="19529944" y="41539579"/>
+            <a:ext cx="6185256" cy="288475"/>
+          </a:xfrm>
+          <a:prstGeom prst="rect">
+            <a:avLst/>
+          </a:prstGeom>
+          <a:noFill/>
+        </p:spPr>
+        <p:txBody>
+          <a:bodyPr wrap="none" lIns="0" rIns="0" tIns="0" bIns="0">
+            <a:spAutoFit/>
+          </a:bodyPr>
+          <a:lstStyle/>
+          <a:p>
+            <a:r>
+              <a:rPr sz="2270" b="0" i="0">
+                <a:solidFill>
+                  <a:srgbClr val="0B0B0B"/>
+                </a:solidFill>
+                <a:latin typeface="Arial"/>
+              </a:rPr>
+              <a:t>soner</a:t>
+            </a:r>
+            <a:r>
+              <a:rPr sz="2270" b="0" i="0">
+                <a:solidFill>
+                  <a:srgbClr val="0B0B0B"/>
+                </a:solidFill>
+                <a:latin typeface="Arial"/>
+              </a:rPr>
+              <a:t> </a:t>
+            </a:r>
+            <a:r>
+              <a:rPr sz="2270" b="0" i="0">
+                <a:solidFill>
+                  <a:srgbClr val="0B0B0B"/>
+                </a:solidFill>
+                <a:latin typeface="Arial"/>
+              </a:rPr>
+              <a:t>find</a:t>
+            </a:r>
+            <a:r>
+              <a:rPr sz="2270" b="0" i="0">
+                <a:solidFill>
+                  <a:srgbClr val="0B0B0B"/>
+                </a:solidFill>
+                <a:latin typeface="Arial"/>
+              </a:rPr>
+              <a:t> </a:t>
+            </a:r>
+            <a:r>
+              <a:rPr sz="2270" b="0" i="0">
+                <a:solidFill>
+                  <a:srgbClr val="0B0B0B"/>
+                </a:solidFill>
+                <a:latin typeface="Arial"/>
+              </a:rPr>
+              <a:t>which</a:t>
+            </a:r>
+            <a:r>
+              <a:rPr sz="2270" b="0" i="0">
+                <a:solidFill>
+                  <a:srgbClr val="0B0B0B"/>
+                </a:solidFill>
+                <a:latin typeface="Arial"/>
+              </a:rPr>
+              <a:t> </a:t>
+            </a:r>
+            <a:r>
+              <a:rPr sz="2270" b="0" i="0">
+                <a:solidFill>
+                  <a:srgbClr val="0B0B0B"/>
+                </a:solidFill>
+                <a:latin typeface="Arial"/>
+              </a:rPr>
+              <a:t>part</a:t>
+            </a:r>
+            <a:r>
+              <a:rPr sz="2270" b="0" i="0">
+                <a:solidFill>
+                  <a:srgbClr val="0B0B0B"/>
+                </a:solidFill>
+                <a:latin typeface="Arial"/>
+              </a:rPr>
+              <a:t> </a:t>
+            </a:r>
+            <a:r>
+              <a:rPr sz="2270" b="0" i="0">
+                <a:solidFill>
+                  <a:srgbClr val="0B0B0B"/>
+                </a:solidFill>
+                <a:latin typeface="Arial"/>
+              </a:rPr>
+              <a:t>of</a:t>
+            </a:r>
+            <a:r>
+              <a:rPr sz="2270" b="0" i="0">
+                <a:solidFill>
+                  <a:srgbClr val="0B0B0B"/>
+                </a:solidFill>
+                <a:latin typeface="Arial"/>
+              </a:rPr>
+              <a:t> </a:t>
+            </a:r>
+            <a:r>
+              <a:rPr sz="2270" b="0" i="0">
+                <a:solidFill>
+                  <a:srgbClr val="0B0B0B"/>
+                </a:solidFill>
+                <a:latin typeface="Arial"/>
+              </a:rPr>
+              <a:t>a</a:t>
+            </a:r>
+            <a:r>
+              <a:rPr sz="2270" b="0" i="0">
+                <a:solidFill>
+                  <a:srgbClr val="0B0B0B"/>
+                </a:solidFill>
+                <a:latin typeface="Arial"/>
+              </a:rPr>
+              <a:t> </a:t>
+            </a:r>
+            <a:r>
+              <a:rPr sz="2270" b="0" i="0">
+                <a:solidFill>
+                  <a:srgbClr val="0B0B0B"/>
+                </a:solidFill>
+                <a:latin typeface="Arial"/>
+              </a:rPr>
+              <a:t>hypothesis</a:t>
+            </a:r>
+            <a:r>
+              <a:rPr sz="2270" b="0" i="0">
+                <a:solidFill>
+                  <a:srgbClr val="0B0B0B"/>
+                </a:solidFill>
+                <a:latin typeface="Arial"/>
+              </a:rPr>
+              <a:t> </a:t>
+            </a:r>
+            <a:r>
+              <a:rPr sz="2270" b="0" i="0">
+                <a:solidFill>
+                  <a:srgbClr val="0B0B0B"/>
+                </a:solidFill>
+                <a:latin typeface="Arial"/>
+              </a:rPr>
+              <a:t>to</a:t>
+            </a:r>
+            <a:r>
+              <a:rPr sz="2270" b="0" i="0">
+                <a:solidFill>
+                  <a:srgbClr val="0B0B0B"/>
+                </a:solidFill>
+                <a:latin typeface="Arial"/>
+              </a:rPr>
+              <a:t> </a:t>
+            </a:r>
+            <a:r>
+              <a:rPr sz="2270" b="0" i="0">
+                <a:solidFill>
+                  <a:srgbClr val="0B0B0B"/>
+                </a:solidFill>
+                <a:latin typeface="Arial"/>
+              </a:rPr>
+              <a:t>revise?</a:t>
+            </a:r>
+          </a:p>
+        </p:txBody>
+      </p:sp>
+      <p:sp>
+        <p:nvSpPr>
+          <p:cNvPr id="121" name="TextBox 120"/>
+          <p:cNvSpPr txBox="1"/>
+          <p:nvPr/>
+        </p:nvSpPr>
+        <p:spPr>
+          <a:xfrm>
+            <a:off x="936003" y="42230048"/>
+            <a:ext cx="28454909" cy="264439"/>
+          </a:xfrm>
+          <a:prstGeom prst="rect">
+            <a:avLst/>
+          </a:prstGeom>
+          <a:noFill/>
+        </p:spPr>
+        <p:txBody>
+          <a:bodyPr wrap="none" lIns="0" rIns="0" tIns="0" bIns="0">
+            <a:spAutoFit/>
+          </a:bodyPr>
+          <a:lstStyle/>
+          <a:p>
+            <a:r>
+              <a:rPr sz="2080" b="0" i="0">
+                <a:solidFill>
+                  <a:srgbClr val="52514E"/>
+                </a:solidFill>
+                <a:latin typeface="Arial"/>
+              </a:rPr>
+              <a:t>Related work:</a:t>
+            </a:r>
+            <a:r>
+              <a:rPr sz="2080" b="0" i="0">
+                <a:solidFill>
+                  <a:srgbClr val="52514E"/>
+                </a:solidFill>
+                <a:latin typeface="Arial"/>
+              </a:rPr>
+              <a:t> </a:t>
+            </a:r>
+            <a:r>
+              <a:rPr sz="2080" b="0" i="0">
+                <a:solidFill>
+                  <a:srgbClr val="52514E"/>
+                </a:solidFill>
+                <a:latin typeface="Arial"/>
+              </a:rPr>
+              <a:t>Popper (Cropper &amp; Morel 2021); DreamCoder (Ellis et al. 2021); LILO (Grand et al. 2024); Model Discovery Agent (Murphy 2026).</a:t>
+            </a:r>
+            <a:r>
+              <a:rPr sz="2080" b="0" i="0">
+                <a:solidFill>
+                  <a:srgbClr val="52514E"/>
+                </a:solidFill>
+                <a:latin typeface="Arial"/>
+              </a:rPr>
+              <a:t> </a:t>
+            </a:r>
+            <a:r>
+              <a:rPr sz="2080" b="0" i="0">
+                <a:solidFill>
+                  <a:srgbClr val="52514E"/>
+                </a:solidFill>
+                <a:latin typeface="Arial"/>
+              </a:rPr>
+              <a:t>The failure-to-revision idea is not new; the question is which component to revise, against matched</a:t>
+            </a:r>
+          </a:p>
+        </p:txBody>
+      </p:sp>
+      <p:sp>
+        <p:nvSpPr>
+          <p:cNvPr id="122" name="TextBox 121"/>
+          <p:cNvSpPr txBox="1"/>
+          <p:nvPr/>
+        </p:nvSpPr>
+        <p:spPr>
+          <a:xfrm>
+            <a:off x="936003" y="42566725"/>
             <a:ext cx="20198843" cy="282671"/>
           </a:xfrm>
           <a:prstGeom prst="rect">

--- a/docs/summit_20261023_reframe/poster_visual_final_review.pptx
+++ b/docs/summit_20261023_reframe/poster_visual_final_review.pptx
@@ -3232,8 +3232,8 @@
         </p:blipFill>
         <p:spPr>
           <a:xfrm>
-            <a:off x="21279259" y="10763580"/>
-            <a:ext cx="7976554" cy="8283090"/>
+            <a:off x="13432606" y="13416146"/>
+            <a:ext cx="230133" cy="203200"/>
           </a:xfrm>
           <a:prstGeom prst="rect">
             <a:avLst/>
@@ -3256,8 +3256,8 @@
         </p:blipFill>
         <p:spPr>
           <a:xfrm>
-            <a:off x="25230694" y="11303420"/>
-            <a:ext cx="203200" cy="206351"/>
+            <a:off x="21279259" y="10763580"/>
+            <a:ext cx="7976554" cy="8283089"/>
           </a:xfrm>
           <a:prstGeom prst="rect">
             <a:avLst/>
@@ -3280,8 +3280,8 @@
         </p:blipFill>
         <p:spPr>
           <a:xfrm>
-            <a:off x="25230694" y="12098581"/>
-            <a:ext cx="203200" cy="234331"/>
+            <a:off x="25230694" y="11303420"/>
+            <a:ext cx="203200" cy="206351"/>
           </a:xfrm>
           <a:prstGeom prst="rect">
             <a:avLst/>
@@ -3304,8 +3304,8 @@
         </p:blipFill>
         <p:spPr>
           <a:xfrm>
-            <a:off x="25230694" y="12921721"/>
-            <a:ext cx="203200" cy="238773"/>
+            <a:off x="25230694" y="12098580"/>
+            <a:ext cx="203200" cy="234331"/>
           </a:xfrm>
           <a:prstGeom prst="rect">
             <a:avLst/>
@@ -3328,8 +3328,8 @@
         </p:blipFill>
         <p:spPr>
           <a:xfrm>
-            <a:off x="25230694" y="13791026"/>
-            <a:ext cx="203200" cy="344123"/>
+            <a:off x="25230694" y="12921721"/>
+            <a:ext cx="203200" cy="238773"/>
           </a:xfrm>
           <a:prstGeom prst="rect">
             <a:avLst/>
@@ -3352,8 +3352,8 @@
         </p:blipFill>
         <p:spPr>
           <a:xfrm>
-            <a:off x="22926667" y="16044392"/>
-            <a:ext cx="203200" cy="251311"/>
+            <a:off x="25230694" y="13791024"/>
+            <a:ext cx="203200" cy="344124"/>
           </a:xfrm>
           <a:prstGeom prst="rect">
             <a:avLst/>
@@ -3376,8 +3376,8 @@
         </p:blipFill>
         <p:spPr>
           <a:xfrm>
-            <a:off x="25374693" y="16044392"/>
-            <a:ext cx="203200" cy="224998"/>
+            <a:off x="22926667" y="16044391"/>
+            <a:ext cx="203200" cy="251311"/>
           </a:xfrm>
           <a:prstGeom prst="rect">
             <a:avLst/>
@@ -3400,8 +3400,8 @@
         </p:blipFill>
         <p:spPr>
           <a:xfrm>
-            <a:off x="24006680" y="17212519"/>
-            <a:ext cx="203200" cy="246695"/>
+            <a:off x="25374693" y="16044391"/>
+            <a:ext cx="203200" cy="225000"/>
           </a:xfrm>
           <a:prstGeom prst="rect">
             <a:avLst/>
@@ -3424,8 +3424,8 @@
         </p:blipFill>
         <p:spPr>
           <a:xfrm>
-            <a:off x="25230694" y="18031908"/>
-            <a:ext cx="203200" cy="211824"/>
+            <a:off x="24006680" y="17212518"/>
+            <a:ext cx="203200" cy="246695"/>
           </a:xfrm>
           <a:prstGeom prst="rect">
             <a:avLst/>
@@ -3448,8 +3448,8 @@
         </p:blipFill>
         <p:spPr>
           <a:xfrm>
-            <a:off x="20813185" y="34238982"/>
-            <a:ext cx="8423045" cy="1833909"/>
+            <a:off x="25230694" y="18031907"/>
+            <a:ext cx="203200" cy="211824"/>
           </a:xfrm>
           <a:prstGeom prst="rect">
             <a:avLst/>
@@ -3472,8 +3472,8 @@
         </p:blipFill>
         <p:spPr>
           <a:xfrm>
-            <a:off x="23289409" y="35054337"/>
-            <a:ext cx="248270" cy="203200"/>
+            <a:off x="20813185" y="34238982"/>
+            <a:ext cx="8423045" cy="1833909"/>
           </a:xfrm>
           <a:prstGeom prst="rect">
             <a:avLst/>
@@ -3496,7 +3496,7 @@
         </p:blipFill>
         <p:spPr>
           <a:xfrm>
-            <a:off x="26241449" y="35054337"/>
+            <a:off x="23289409" y="35054337"/>
             <a:ext cx="248270" cy="203200"/>
           </a:xfrm>
           <a:prstGeom prst="rect">
@@ -3520,8 +3520,8 @@
         </p:blipFill>
         <p:spPr>
           <a:xfrm>
-            <a:off x="850851" y="40452963"/>
-            <a:ext cx="3526990" cy="719401"/>
+            <a:off x="26241449" y="35054337"/>
+            <a:ext cx="248270" cy="203200"/>
           </a:xfrm>
           <a:prstGeom prst="rect">
             <a:avLst/>
@@ -3544,6 +3544,30 @@
         </p:blipFill>
         <p:spPr>
           <a:xfrm>
+            <a:off x="850851" y="40452963"/>
+            <a:ext cx="3526990" cy="719401"/>
+          </a:xfrm>
+          <a:prstGeom prst="rect">
+            <a:avLst/>
+          </a:prstGeom>
+        </p:spPr>
+      </p:pic>
+      <p:pic>
+        <p:nvPicPr>
+          <p:cNvPr id="21" name="Picture 20" descr="image.png"/>
+          <p:cNvPicPr>
+            <a:picLocks noChangeAspect="1"/>
+          </p:cNvPicPr>
+          <p:nvPr/>
+        </p:nvPicPr>
+        <p:blipFill>
+          <a:blip r:embed="rId21"/>
+          <a:stretch>
+            <a:fillRect/>
+          </a:stretch>
+        </p:blipFill>
+        <p:spPr>
+          <a:xfrm>
             <a:off x="4495544" y="40452963"/>
             <a:ext cx="4679004" cy="719401"/>
           </a:xfrm>
@@ -3554,7 +3578,7 @@
       </p:pic>
       <p:sp>
         <p:nvSpPr>
-          <p:cNvPr id="21" name="Rectangle 20"/>
+          <p:cNvPr id="22" name="Rectangle 21"/>
           <p:cNvSpPr/>
           <p:nvPr/>
         </p:nvSpPr>
@@ -3597,7 +3621,7 @@
       </p:sp>
       <p:sp>
         <p:nvSpPr>
-          <p:cNvPr id="22" name="Rectangle 21"/>
+          <p:cNvPr id="23" name="Rectangle 22"/>
           <p:cNvSpPr/>
           <p:nvPr/>
         </p:nvSpPr>
@@ -3640,7 +3664,7 @@
       </p:sp>
       <p:sp>
         <p:nvSpPr>
-          <p:cNvPr id="23" name="Rectangle 22"/>
+          <p:cNvPr id="24" name="Rectangle 23"/>
           <p:cNvSpPr/>
           <p:nvPr/>
         </p:nvSpPr>
@@ -3683,7 +3707,7 @@
       </p:sp>
       <p:sp>
         <p:nvSpPr>
-          <p:cNvPr id="24" name="Rectangle 23"/>
+          <p:cNvPr id="25" name="Rectangle 24"/>
           <p:cNvSpPr/>
           <p:nvPr/>
         </p:nvSpPr>
@@ -3726,13 +3750,13 @@
       </p:sp>
       <p:sp>
         <p:nvSpPr>
-          <p:cNvPr id="25" name="Rectangle 24"/>
+          <p:cNvPr id="26" name="Rectangle 25"/>
           <p:cNvSpPr/>
           <p:nvPr/>
         </p:nvSpPr>
         <p:spPr>
           <a:xfrm>
-            <a:off x="10475281" y="15971627"/>
+            <a:off x="10475281" y="16847185"/>
             <a:ext cx="9295048" cy="71999"/>
           </a:xfrm>
           <a:prstGeom prst="rect">
@@ -3769,13 +3793,13 @@
       </p:sp>
       <p:sp>
         <p:nvSpPr>
-          <p:cNvPr id="26" name="Rectangle 25"/>
+          <p:cNvPr id="27" name="Rectangle 26"/>
           <p:cNvSpPr/>
           <p:nvPr/>
         </p:nvSpPr>
         <p:spPr>
           <a:xfrm>
-            <a:off x="10475281" y="21651899"/>
+            <a:off x="10475281" y="22527456"/>
             <a:ext cx="9295048" cy="71999"/>
           </a:xfrm>
           <a:prstGeom prst="rect">
@@ -3812,13 +3836,13 @@
       </p:sp>
       <p:sp>
         <p:nvSpPr>
-          <p:cNvPr id="27" name="Rectangle 26"/>
+          <p:cNvPr id="28" name="Rectangle 27"/>
           <p:cNvSpPr/>
           <p:nvPr/>
         </p:nvSpPr>
         <p:spPr>
           <a:xfrm>
-            <a:off x="10475281" y="33513865"/>
+            <a:off x="10475281" y="34389421"/>
             <a:ext cx="9295048" cy="71999"/>
           </a:xfrm>
           <a:prstGeom prst="rect">
@@ -3855,7 +3879,7 @@
       </p:sp>
       <p:sp>
         <p:nvSpPr>
-          <p:cNvPr id="28" name="Rectangle 27"/>
+          <p:cNvPr id="29" name="Rectangle 28"/>
           <p:cNvSpPr/>
           <p:nvPr/>
         </p:nvSpPr>
@@ -3898,7 +3922,7 @@
       </p:sp>
       <p:sp>
         <p:nvSpPr>
-          <p:cNvPr id="29" name="Rectangle 28"/>
+          <p:cNvPr id="30" name="Rectangle 29"/>
           <p:cNvSpPr/>
           <p:nvPr/>
         </p:nvSpPr>
@@ -3941,7 +3965,7 @@
       </p:sp>
       <p:sp>
         <p:nvSpPr>
-          <p:cNvPr id="30" name="Rectangle 29"/>
+          <p:cNvPr id="31" name="Rectangle 30"/>
           <p:cNvSpPr/>
           <p:nvPr/>
         </p:nvSpPr>
@@ -3984,7 +4008,7 @@
       </p:sp>
       <p:sp>
         <p:nvSpPr>
-          <p:cNvPr id="31" name="Rectangle 30"/>
+          <p:cNvPr id="32" name="Rectangle 31"/>
           <p:cNvSpPr/>
           <p:nvPr/>
         </p:nvSpPr>
@@ -4027,7 +4051,7 @@
       </p:sp>
       <p:sp>
         <p:nvSpPr>
-          <p:cNvPr id="32" name="Rounded Rectangle 31"/>
+          <p:cNvPr id="33" name="Rounded Rectangle 32"/>
           <p:cNvSpPr/>
           <p:nvPr/>
         </p:nvSpPr>
@@ -4072,31 +4096,7 @@
       </p:sp>
       <p:pic>
         <p:nvPicPr>
-          <p:cNvPr id="33" name="Picture 32" descr="fig_arc_intro_00dbd492.png"/>
-          <p:cNvPicPr>
-            <a:picLocks noChangeAspect="1"/>
-          </p:cNvPicPr>
-          <p:nvPr/>
-        </p:nvPicPr>
-        <p:blipFill>
-          <a:blip r:embed="rId21"/>
-          <a:stretch>
-            <a:fillRect/>
-          </a:stretch>
-        </p:blipFill>
-        <p:spPr>
-          <a:xfrm>
-            <a:off x="936003" y="11553632"/>
-            <a:ext cx="8570548" cy="8643762"/>
-          </a:xfrm>
-          <a:prstGeom prst="rect">
-            <a:avLst/>
-          </a:prstGeom>
-        </p:spPr>
-      </p:pic>
-      <p:pic>
-        <p:nvPicPr>
-          <p:cNvPr id="34" name="Picture 33" descr="fig_four_reasons_ILLUSTRATIVE.png"/>
+          <p:cNvPr id="34" name="Picture 33" descr="fig_arc_intro_00dbd492.png"/>
           <p:cNvPicPr>
             <a:picLocks noChangeAspect="1"/>
           </p:cNvPicPr>
@@ -4110,8 +4110,8 @@
         </p:blipFill>
         <p:spPr>
           <a:xfrm>
-            <a:off x="936003" y="22972349"/>
-            <a:ext cx="8570548" cy="10341399"/>
+            <a:off x="936003" y="11553632"/>
+            <a:ext cx="8570548" cy="8643762"/>
           </a:xfrm>
           <a:prstGeom prst="rect">
             <a:avLst/>
@@ -4120,7 +4120,7 @@
       </p:pic>
       <p:pic>
         <p:nvPicPr>
-          <p:cNvPr id="35" name="Picture 34" descr="fig_real_rule_ka95aa62f67d9.png"/>
+          <p:cNvPr id="35" name="Picture 34" descr="fig_four_reasons_ILLUSTRATIVE.png"/>
           <p:cNvPicPr>
             <a:picLocks noChangeAspect="1"/>
           </p:cNvPicPr>
@@ -4134,8 +4134,8 @@
         </p:blipFill>
         <p:spPr>
           <a:xfrm>
-            <a:off x="10837874" y="22298400"/>
-            <a:ext cx="8570549" cy="6589210"/>
+            <a:off x="936003" y="22972349"/>
+            <a:ext cx="8570548" cy="10341399"/>
           </a:xfrm>
           <a:prstGeom prst="rect">
             <a:avLst/>
@@ -4144,7 +4144,7 @@
       </p:pic>
       <p:pic>
         <p:nvPicPr>
-          <p:cNvPr id="36" name="Picture 35" descr="fig_v2_uncertified_00dbd492_poster.png"/>
+          <p:cNvPr id="36" name="Picture 35" descr="fig_real_rule_ka95aa62f67d9.png"/>
           <p:cNvPicPr>
             <a:picLocks noChangeAspect="1"/>
           </p:cNvPicPr>
@@ -4158,6 +4158,30 @@
         </p:blipFill>
         <p:spPr>
           <a:xfrm>
+            <a:off x="10837874" y="23173937"/>
+            <a:ext cx="8570549" cy="6589210"/>
+          </a:xfrm>
+          <a:prstGeom prst="rect">
+            <a:avLst/>
+          </a:prstGeom>
+        </p:spPr>
+      </p:pic>
+      <p:pic>
+        <p:nvPicPr>
+          <p:cNvPr id="37" name="Picture 36" descr="fig_v2_uncertified_00dbd492_poster.png"/>
+          <p:cNvPicPr>
+            <a:picLocks noChangeAspect="1"/>
+          </p:cNvPicPr>
+          <p:nvPr/>
+        </p:nvPicPr>
+        <p:blipFill>
+          <a:blip r:embed="rId25"/>
+          <a:stretch>
+            <a:fillRect/>
+          </a:stretch>
+        </p:blipFill>
+        <p:spPr>
+          <a:xfrm>
             <a:off x="20739735" y="23475950"/>
             <a:ext cx="8570549" cy="3843706"/>
           </a:xfrm>
@@ -4168,7 +4192,7 @@
       </p:pic>
       <p:sp>
         <p:nvSpPr>
-          <p:cNvPr id="37" name="TextBox 36"/>
+          <p:cNvPr id="38" name="TextBox 37"/>
           <p:cNvSpPr txBox="1"/>
           <p:nvPr/>
         </p:nvSpPr>
@@ -4202,7 +4226,7 @@
       </p:sp>
       <p:sp>
         <p:nvSpPr>
-          <p:cNvPr id="38" name="TextBox 37"/>
+          <p:cNvPr id="39" name="TextBox 38"/>
           <p:cNvSpPr txBox="1"/>
           <p:nvPr/>
         </p:nvSpPr>
@@ -4236,7 +4260,7 @@
       </p:sp>
       <p:sp>
         <p:nvSpPr>
-          <p:cNvPr id="39" name="TextBox 38"/>
+          <p:cNvPr id="40" name="TextBox 39"/>
           <p:cNvSpPr txBox="1"/>
           <p:nvPr/>
         </p:nvSpPr>
@@ -4306,7 +4330,7 @@
       </p:sp>
       <p:sp>
         <p:nvSpPr>
-          <p:cNvPr id="40" name="TextBox 39"/>
+          <p:cNvPr id="41" name="TextBox 40"/>
           <p:cNvSpPr txBox="1"/>
           <p:nvPr/>
         </p:nvSpPr>
@@ -4358,7 +4382,7 @@
       </p:sp>
       <p:sp>
         <p:nvSpPr>
-          <p:cNvPr id="41" name="TextBox 40"/>
+          <p:cNvPr id="42" name="TextBox 41"/>
           <p:cNvSpPr txBox="1"/>
           <p:nvPr/>
         </p:nvSpPr>
@@ -4392,7 +4416,7 @@
       </p:sp>
       <p:sp>
         <p:nvSpPr>
-          <p:cNvPr id="42" name="TextBox 41"/>
+          <p:cNvPr id="43" name="TextBox 42"/>
           <p:cNvSpPr txBox="1"/>
           <p:nvPr/>
         </p:nvSpPr>
@@ -4426,7 +4450,7 @@
       </p:sp>
       <p:sp>
         <p:nvSpPr>
-          <p:cNvPr id="43" name="TextBox 42"/>
+          <p:cNvPr id="44" name="TextBox 43"/>
           <p:cNvSpPr txBox="1"/>
           <p:nvPr/>
         </p:nvSpPr>
@@ -4496,7 +4520,7 @@
       </p:sp>
       <p:sp>
         <p:nvSpPr>
-          <p:cNvPr id="44" name="TextBox 43"/>
+          <p:cNvPr id="45" name="TextBox 44"/>
           <p:cNvSpPr txBox="1"/>
           <p:nvPr/>
         </p:nvSpPr>
@@ -4548,7 +4572,7 @@
       </p:sp>
       <p:sp>
         <p:nvSpPr>
-          <p:cNvPr id="45" name="TextBox 44"/>
+          <p:cNvPr id="46" name="TextBox 45"/>
           <p:cNvSpPr txBox="1"/>
           <p:nvPr/>
         </p:nvSpPr>
@@ -4582,7 +4606,7 @@
       </p:sp>
       <p:sp>
         <p:nvSpPr>
-          <p:cNvPr id="46" name="TextBox 45"/>
+          <p:cNvPr id="47" name="TextBox 46"/>
           <p:cNvSpPr txBox="1"/>
           <p:nvPr/>
         </p:nvSpPr>
@@ -4616,7 +4640,7 @@
       </p:sp>
       <p:sp>
         <p:nvSpPr>
-          <p:cNvPr id="47" name="TextBox 46"/>
+          <p:cNvPr id="48" name="TextBox 47"/>
           <p:cNvSpPr txBox="1"/>
           <p:nvPr/>
         </p:nvSpPr>
@@ -4668,7 +4692,7 @@
       </p:sp>
       <p:sp>
         <p:nvSpPr>
-          <p:cNvPr id="48" name="TextBox 47"/>
+          <p:cNvPr id="49" name="TextBox 48"/>
           <p:cNvSpPr txBox="1"/>
           <p:nvPr/>
         </p:nvSpPr>
@@ -4702,7 +4726,7 @@
       </p:sp>
       <p:sp>
         <p:nvSpPr>
-          <p:cNvPr id="49" name="TextBox 48"/>
+          <p:cNvPr id="50" name="TextBox 49"/>
           <p:cNvSpPr txBox="1"/>
           <p:nvPr/>
         </p:nvSpPr>
@@ -4853,7 +4877,7 @@
       </p:sp>
       <p:sp>
         <p:nvSpPr>
-          <p:cNvPr id="50" name="TextBox 49"/>
+          <p:cNvPr id="51" name="TextBox 50"/>
           <p:cNvSpPr txBox="1"/>
           <p:nvPr/>
         </p:nvSpPr>
@@ -4887,7 +4911,7 @@
       </p:sp>
       <p:sp>
         <p:nvSpPr>
-          <p:cNvPr id="51" name="TextBox 50"/>
+          <p:cNvPr id="52" name="TextBox 51"/>
           <p:cNvSpPr txBox="1"/>
           <p:nvPr/>
         </p:nvSpPr>
@@ -4957,7 +4981,7 @@
       </p:sp>
       <p:sp>
         <p:nvSpPr>
-          <p:cNvPr id="52" name="TextBox 51"/>
+          <p:cNvPr id="53" name="TextBox 52"/>
           <p:cNvSpPr txBox="1"/>
           <p:nvPr/>
         </p:nvSpPr>
@@ -4991,7 +5015,7 @@
       </p:sp>
       <p:sp>
         <p:nvSpPr>
-          <p:cNvPr id="53" name="TextBox 52"/>
+          <p:cNvPr id="54" name="TextBox 53"/>
           <p:cNvSpPr txBox="1"/>
           <p:nvPr/>
         </p:nvSpPr>
@@ -5025,7 +5049,7 @@
       </p:sp>
       <p:sp>
         <p:nvSpPr>
-          <p:cNvPr id="54" name="TextBox 53"/>
+          <p:cNvPr id="55" name="TextBox 54"/>
           <p:cNvSpPr txBox="1"/>
           <p:nvPr/>
         </p:nvSpPr>
@@ -5059,7 +5083,7 @@
       </p:sp>
       <p:sp>
         <p:nvSpPr>
-          <p:cNvPr id="55" name="TextBox 54"/>
+          <p:cNvPr id="56" name="TextBox 55"/>
           <p:cNvSpPr txBox="1"/>
           <p:nvPr/>
         </p:nvSpPr>
@@ -5093,7 +5117,7 @@
       </p:sp>
       <p:sp>
         <p:nvSpPr>
-          <p:cNvPr id="56" name="TextBox 55"/>
+          <p:cNvPr id="57" name="TextBox 56"/>
           <p:cNvSpPr txBox="1"/>
           <p:nvPr/>
         </p:nvSpPr>
@@ -5145,7 +5169,7 @@
       </p:sp>
       <p:sp>
         <p:nvSpPr>
-          <p:cNvPr id="57" name="TextBox 56"/>
+          <p:cNvPr id="58" name="TextBox 57"/>
           <p:cNvSpPr txBox="1"/>
           <p:nvPr/>
         </p:nvSpPr>
@@ -5179,7 +5203,7 @@
       </p:sp>
       <p:sp>
         <p:nvSpPr>
-          <p:cNvPr id="58" name="TextBox 57"/>
+          <p:cNvPr id="59" name="TextBox 58"/>
           <p:cNvSpPr txBox="1"/>
           <p:nvPr/>
         </p:nvSpPr>
@@ -5213,7 +5237,7 @@
       </p:sp>
       <p:sp>
         <p:nvSpPr>
-          <p:cNvPr id="59" name="TextBox 58"/>
+          <p:cNvPr id="60" name="TextBox 59"/>
           <p:cNvSpPr txBox="1"/>
           <p:nvPr/>
         </p:nvSpPr>
@@ -5283,7 +5307,7 @@
       </p:sp>
       <p:sp>
         <p:nvSpPr>
-          <p:cNvPr id="60" name="TextBox 59"/>
+          <p:cNvPr id="61" name="TextBox 60"/>
           <p:cNvSpPr txBox="1"/>
           <p:nvPr/>
         </p:nvSpPr>
@@ -5317,7 +5341,7 @@
       </p:sp>
       <p:sp>
         <p:nvSpPr>
-          <p:cNvPr id="61" name="TextBox 60"/>
+          <p:cNvPr id="62" name="TextBox 61"/>
           <p:cNvSpPr txBox="1"/>
           <p:nvPr/>
         </p:nvSpPr>
@@ -5351,7 +5375,7 @@
       </p:sp>
       <p:sp>
         <p:nvSpPr>
-          <p:cNvPr id="62" name="TextBox 61"/>
+          <p:cNvPr id="63" name="TextBox 62"/>
           <p:cNvSpPr txBox="1"/>
           <p:nvPr/>
         </p:nvSpPr>
@@ -5385,14 +5409,14 @@
       </p:sp>
       <p:sp>
         <p:nvSpPr>
-          <p:cNvPr id="63" name="TextBox 62"/>
+          <p:cNvPr id="64" name="TextBox 63"/>
           <p:cNvSpPr txBox="1"/>
           <p:nvPr/>
         </p:nvSpPr>
         <p:spPr>
           <a:xfrm>
-            <a:off x="10837862" y="15168511"/>
-            <a:ext cx="5968431" cy="480795"/>
+            <a:off x="10837862" y="14377261"/>
+            <a:ext cx="7635267" cy="312774"/>
           </a:xfrm>
           <a:prstGeom prst="rect">
             <a:avLst/>
@@ -5406,36 +5430,54 @@
           <a:lstStyle/>
           <a:p>
             <a:r>
-              <a:rPr sz="3790" b="1" i="0">
-                <a:solidFill>
-                  <a:srgbClr val="2A78D6"/>
-                </a:solidFill>
-                <a:latin typeface="Arial"/>
-              </a:rPr>
-              <a:t>Fitting is not enough</a:t>
-            </a:r>
-            <a:r>
               <a:rPr sz="2460" b="1" i="0">
                 <a:solidFill>
-                  <a:srgbClr val="0CA30C"/>
-                </a:solidFill>
-                <a:latin typeface="Arial"/>
-              </a:rPr>
-              <a:t> [DONE]</a:t>
-            </a:r>
-          </a:p>
-        </p:txBody>
-      </p:sp>
-      <p:sp>
-        <p:nvSpPr>
-          <p:cNvPr id="64" name="TextBox 63"/>
+                  <a:srgbClr val="52514E"/>
+                </a:solidFill>
+                <a:latin typeface="Arial"/>
+              </a:rPr>
+              <a:t>Being tested</a:t>
+            </a:r>
+            <a:r>
+              <a:rPr sz="2460" b="0" i="0">
+                <a:solidFill>
+                  <a:srgbClr val="52514E"/>
+                </a:solidFill>
+                <a:latin typeface="Arial"/>
+              </a:rPr>
+              <a:t> (dashed):</a:t>
+            </a:r>
+            <a:r>
+              <a:rPr sz="2460" b="0" i="0">
+                <a:solidFill>
+                  <a:srgbClr val="52514E"/>
+                </a:solidFill>
+                <a:latin typeface="Arial"/>
+              </a:rPr>
+              <a:t> </a:t>
+            </a:r>
+            <a:r>
+              <a:rPr sz="2460" b="0" i="0">
+                <a:solidFill>
+                  <a:srgbClr val="52514E"/>
+                </a:solidFill>
+                <a:latin typeface="Arial"/>
+              </a:rPr>
+              <a:t>neural candidates, checked by</a:t>
+            </a:r>
+          </a:p>
+        </p:txBody>
+      </p:sp>
+      <p:sp>
+        <p:nvSpPr>
+          <p:cNvPr id="65" name="TextBox 64"/>
           <p:cNvSpPr txBox="1"/>
           <p:nvPr/>
         </p:nvSpPr>
         <p:spPr>
           <a:xfrm>
-            <a:off x="12321070" y="16397501"/>
-            <a:ext cx="852767" cy="1442386"/>
+            <a:off x="10837862" y="14782136"/>
+            <a:ext cx="5530160" cy="312515"/>
           </a:xfrm>
           <a:prstGeom prst="rect">
             <a:avLst/>
@@ -5449,27 +5491,45 @@
           <a:lstStyle/>
           <a:p>
             <a:r>
-              <a:rPr sz="11360" b="1" i="0">
-                <a:solidFill>
-                  <a:srgbClr val="0CA30C"/>
-                </a:solidFill>
-                <a:latin typeface="Arial"/>
-              </a:rPr>
-              <a:t>6</a:t>
-            </a:r>
-          </a:p>
-        </p:txBody>
-      </p:sp>
-      <p:sp>
-        <p:nvSpPr>
-          <p:cNvPr id="65" name="TextBox 64"/>
+              <a:rPr sz="2460" b="0" i="0">
+                <a:solidFill>
+                  <a:srgbClr val="52514E"/>
+                </a:solidFill>
+                <a:latin typeface="Arial"/>
+              </a:rPr>
+              <a:t>CORA’s executable rules.</a:t>
+            </a:r>
+            <a:r>
+              <a:rPr sz="2460" b="0" i="0">
+                <a:solidFill>
+                  <a:srgbClr val="52514E"/>
+                </a:solidFill>
+                <a:latin typeface="Arial"/>
+              </a:rPr>
+              <a:t> </a:t>
+            </a:r>
+            <a:r>
+              <a:rPr sz="2460" b="0" i="0">
+                <a:solidFill>
+                  <a:srgbClr val="52514E"/>
+                </a:solidFill>
+                <a:latin typeface="Arial"/>
+              </a:rPr>
+              <a:t>No result yet.</a:t>
+            </a:r>
+          </a:p>
+        </p:txBody>
+      </p:sp>
+      <p:sp>
+        <p:nvSpPr>
+          <p:cNvPr id="66" name="TextBox 65"/>
           <p:cNvSpPr txBox="1"/>
           <p:nvPr/>
         </p:nvSpPr>
         <p:spPr>
           <a:xfrm>
-            <a:off x="11216158" y="17763880"/>
-            <a:ext cx="3062499" cy="360596"/>
+            <a:off x="10837862" y="16044064"/>
+            <a:ext cx="5968431" cy="480795"/>
           </a:xfrm>
           <a:prstGeom prst="rect">
             <a:avLst/>
@@ -5483,45 +5543,36 @@
           <a:lstStyle/>
           <a:p>
             <a:r>
-              <a:rPr sz="2840" b="0" i="0">
+              <a:rPr sz="3790" b="1" i="0">
+                <a:solidFill>
+                  <a:srgbClr val="2A78D6"/>
+                </a:solidFill>
+                <a:latin typeface="Arial"/>
+              </a:rPr>
+              <a:t>Fitting is not enough</a:t>
+            </a:r>
+            <a:r>
+              <a:rPr sz="2460" b="1" i="0">
                 <a:solidFill>
                   <a:srgbClr val="0CA30C"/>
                 </a:solidFill>
                 <a:latin typeface="Arial"/>
               </a:rPr>
-              <a:t>answers</a:t>
-            </a:r>
-            <a:r>
-              <a:rPr sz="2840" b="0" i="0">
-                <a:solidFill>
-                  <a:srgbClr val="0CA30C"/>
-                </a:solidFill>
-                <a:latin typeface="Arial"/>
-              </a:rPr>
-              <a:t> </a:t>
-            </a:r>
-            <a:r>
-              <a:rPr sz="2840" b="0" i="0">
-                <a:solidFill>
-                  <a:srgbClr val="0CA30C"/>
-                </a:solidFill>
-                <a:latin typeface="Arial"/>
-              </a:rPr>
-              <a:t>accepted,</a:t>
-            </a:r>
-          </a:p>
-        </p:txBody>
-      </p:sp>
-      <p:sp>
-        <p:nvSpPr>
-          <p:cNvPr id="66" name="TextBox 65"/>
+              <a:t> [DONE]</a:t>
+            </a:r>
+          </a:p>
+        </p:txBody>
+      </p:sp>
+      <p:sp>
+        <p:nvSpPr>
+          <p:cNvPr id="67" name="TextBox 66"/>
           <p:cNvSpPr txBox="1"/>
           <p:nvPr/>
         </p:nvSpPr>
         <p:spPr>
           <a:xfrm>
-            <a:off x="11930672" y="18244677"/>
-            <a:ext cx="1633456" cy="360596"/>
+            <a:off x="12321070" y="17273052"/>
+            <a:ext cx="852767" cy="1442386"/>
           </a:xfrm>
           <a:prstGeom prst="rect">
             <a:avLst/>
@@ -5535,45 +5586,27 @@
           <a:lstStyle/>
           <a:p>
             <a:r>
-              <a:rPr sz="2840" b="0" i="0">
+              <a:rPr sz="11360" b="1" i="0">
                 <a:solidFill>
                   <a:srgbClr val="0CA30C"/>
                 </a:solidFill>
                 <a:latin typeface="Arial"/>
               </a:rPr>
-              <a:t>all</a:t>
-            </a:r>
-            <a:r>
-              <a:rPr sz="2840" b="0" i="0">
-                <a:solidFill>
-                  <a:srgbClr val="0CA30C"/>
-                </a:solidFill>
-                <a:latin typeface="Arial"/>
-              </a:rPr>
-              <a:t> </a:t>
-            </a:r>
-            <a:r>
-              <a:rPr sz="2840" b="0" i="0">
-                <a:solidFill>
-                  <a:srgbClr val="0CA30C"/>
-                </a:solidFill>
-                <a:latin typeface="Arial"/>
-              </a:rPr>
-              <a:t>correct</a:t>
-            </a:r>
-          </a:p>
-        </p:txBody>
-      </p:sp>
-      <p:sp>
-        <p:nvSpPr>
-          <p:cNvPr id="67" name="TextBox 66"/>
+              <a:t>6</a:t>
+            </a:r>
+          </a:p>
+        </p:txBody>
+      </p:sp>
+      <p:sp>
+        <p:nvSpPr>
+          <p:cNvPr id="68" name="TextBox 67"/>
           <p:cNvSpPr txBox="1"/>
           <p:nvPr/>
         </p:nvSpPr>
         <p:spPr>
           <a:xfrm>
-            <a:off x="15952088" y="16397501"/>
-            <a:ext cx="1654733" cy="1442386"/>
+            <a:off x="11216158" y="18639431"/>
+            <a:ext cx="3062499" cy="360596"/>
           </a:xfrm>
           <a:prstGeom prst="rect">
             <a:avLst/>
@@ -5587,27 +5620,45 @@
           <a:lstStyle/>
           <a:p>
             <a:r>
-              <a:rPr sz="11360" b="1" i="0">
-                <a:solidFill>
-                  <a:srgbClr val="D03B3B"/>
-                </a:solidFill>
-                <a:latin typeface="Arial"/>
-              </a:rPr>
-              <a:t>26</a:t>
-            </a:r>
-          </a:p>
-        </p:txBody>
-      </p:sp>
-      <p:sp>
-        <p:nvSpPr>
-          <p:cNvPr id="68" name="TextBox 67"/>
+              <a:rPr sz="2840" b="0" i="0">
+                <a:solidFill>
+                  <a:srgbClr val="0CA30C"/>
+                </a:solidFill>
+                <a:latin typeface="Arial"/>
+              </a:rPr>
+              <a:t>answers</a:t>
+            </a:r>
+            <a:r>
+              <a:rPr sz="2840" b="0" i="0">
+                <a:solidFill>
+                  <a:srgbClr val="0CA30C"/>
+                </a:solidFill>
+                <a:latin typeface="Arial"/>
+              </a:rPr>
+              <a:t> </a:t>
+            </a:r>
+            <a:r>
+              <a:rPr sz="2840" b="0" i="0">
+                <a:solidFill>
+                  <a:srgbClr val="0CA30C"/>
+                </a:solidFill>
+                <a:latin typeface="Arial"/>
+              </a:rPr>
+              <a:t>accepted,</a:t>
+            </a:r>
+          </a:p>
+        </p:txBody>
+      </p:sp>
+      <p:sp>
+        <p:nvSpPr>
+          <p:cNvPr id="69" name="TextBox 68"/>
           <p:cNvSpPr txBox="1"/>
           <p:nvPr/>
         </p:nvSpPr>
         <p:spPr>
           <a:xfrm>
-            <a:off x="14922436" y="17763880"/>
-            <a:ext cx="3714091" cy="360596"/>
+            <a:off x="11930672" y="19120228"/>
+            <a:ext cx="1633456" cy="360596"/>
           </a:xfrm>
           <a:prstGeom prst="rect">
             <a:avLst/>
@@ -5623,16 +5674,16 @@
             <a:r>
               <a:rPr sz="2840" b="0" i="0">
                 <a:solidFill>
-                  <a:srgbClr val="D03B3B"/>
-                </a:solidFill>
-                <a:latin typeface="Arial"/>
-              </a:rPr>
-              <a:t>tasks</a:t>
+                  <a:srgbClr val="0CA30C"/>
+                </a:solidFill>
+                <a:latin typeface="Arial"/>
+              </a:rPr>
+              <a:t>all</a:t>
             </a:r>
             <a:r>
               <a:rPr sz="2840" b="0" i="0">
                 <a:solidFill>
-                  <a:srgbClr val="D03B3B"/>
+                  <a:srgbClr val="0CA30C"/>
                 </a:solidFill>
                 <a:latin typeface="Arial"/>
               </a:rPr>
@@ -5641,61 +5692,25 @@
             <a:r>
               <a:rPr sz="2840" b="0" i="0">
                 <a:solidFill>
-                  <a:srgbClr val="D03B3B"/>
-                </a:solidFill>
-                <a:latin typeface="Arial"/>
-              </a:rPr>
-              <a:t>where</a:t>
-            </a:r>
-            <a:r>
-              <a:rPr sz="2840" b="0" i="0">
-                <a:solidFill>
-                  <a:srgbClr val="D03B3B"/>
-                </a:solidFill>
-                <a:latin typeface="Arial"/>
-              </a:rPr>
-              <a:t> </a:t>
-            </a:r>
-            <a:r>
-              <a:rPr sz="2840" b="0" i="0">
-                <a:solidFill>
-                  <a:srgbClr val="D03B3B"/>
-                </a:solidFill>
-                <a:latin typeface="Arial"/>
-              </a:rPr>
-              <a:t>every</a:t>
-            </a:r>
-            <a:r>
-              <a:rPr sz="2840" b="0" i="0">
-                <a:solidFill>
-                  <a:srgbClr val="D03B3B"/>
-                </a:solidFill>
-                <a:latin typeface="Arial"/>
-              </a:rPr>
-              <a:t> </a:t>
-            </a:r>
-            <a:r>
-              <a:rPr sz="2840" b="0" i="0">
-                <a:solidFill>
-                  <a:srgbClr val="D03B3B"/>
-                </a:solidFill>
-                <a:latin typeface="Arial"/>
-              </a:rPr>
-              <a:t>rule</a:t>
-            </a:r>
-          </a:p>
-        </p:txBody>
-      </p:sp>
-      <p:sp>
-        <p:nvSpPr>
-          <p:cNvPr id="69" name="TextBox 68"/>
+                  <a:srgbClr val="0CA30C"/>
+                </a:solidFill>
+                <a:latin typeface="Arial"/>
+              </a:rPr>
+              <a:t>correct</a:t>
+            </a:r>
+          </a:p>
+        </p:txBody>
+      </p:sp>
+      <p:sp>
+        <p:nvSpPr>
+          <p:cNvPr id="70" name="TextBox 69"/>
           <p:cNvSpPr txBox="1"/>
           <p:nvPr/>
         </p:nvSpPr>
         <p:spPr>
           <a:xfrm>
-            <a:off x="15116072" y="18244677"/>
-            <a:ext cx="3326812" cy="360596"/>
+            <a:off x="15952088" y="17273052"/>
+            <a:ext cx="1654733" cy="1442386"/>
           </a:xfrm>
           <a:prstGeom prst="rect">
             <a:avLst/>
@@ -5709,81 +5724,27 @@
           <a:lstStyle/>
           <a:p>
             <a:r>
-              <a:rPr sz="2840" b="0" i="0">
+              <a:rPr sz="11360" b="1" i="0">
                 <a:solidFill>
                   <a:srgbClr val="D03B3B"/>
                 </a:solidFill>
                 <a:latin typeface="Arial"/>
               </a:rPr>
-              <a:t>that</a:t>
-            </a:r>
-            <a:r>
-              <a:rPr sz="2840" b="0" i="0">
-                <a:solidFill>
-                  <a:srgbClr val="D03B3B"/>
-                </a:solidFill>
-                <a:latin typeface="Arial"/>
-              </a:rPr>
-              <a:t> </a:t>
-            </a:r>
-            <a:r>
-              <a:rPr sz="2840" b="0" i="0">
-                <a:solidFill>
-                  <a:srgbClr val="D03B3B"/>
-                </a:solidFill>
-                <a:latin typeface="Arial"/>
-              </a:rPr>
-              <a:t>fit</a:t>
-            </a:r>
-            <a:r>
-              <a:rPr sz="2840" b="0" i="0">
-                <a:solidFill>
-                  <a:srgbClr val="D03B3B"/>
-                </a:solidFill>
-                <a:latin typeface="Arial"/>
-              </a:rPr>
-              <a:t> </a:t>
-            </a:r>
-            <a:r>
-              <a:rPr sz="2840" b="0" i="0">
-                <a:solidFill>
-                  <a:srgbClr val="D03B3B"/>
-                </a:solidFill>
-                <a:latin typeface="Arial"/>
-              </a:rPr>
-              <a:t>the</a:t>
-            </a:r>
-            <a:r>
-              <a:rPr sz="2840" b="0" i="0">
-                <a:solidFill>
-                  <a:srgbClr val="D03B3B"/>
-                </a:solidFill>
-                <a:latin typeface="Arial"/>
-              </a:rPr>
-              <a:t> </a:t>
-            </a:r>
-            <a:r>
-              <a:rPr sz="2840" b="0" i="0">
-                <a:solidFill>
-                  <a:srgbClr val="D03B3B"/>
-                </a:solidFill>
-                <a:latin typeface="Arial"/>
-              </a:rPr>
-              <a:t>examples</a:t>
-            </a:r>
-          </a:p>
-        </p:txBody>
-      </p:sp>
-      <p:sp>
-        <p:nvSpPr>
-          <p:cNvPr id="70" name="TextBox 69"/>
+              <a:t>26</a:t>
+            </a:r>
+          </a:p>
+        </p:txBody>
+      </p:sp>
+      <p:sp>
+        <p:nvSpPr>
+          <p:cNvPr id="71" name="TextBox 70"/>
           <p:cNvSpPr txBox="1"/>
           <p:nvPr/>
         </p:nvSpPr>
         <p:spPr>
           <a:xfrm>
-            <a:off x="15667113" y="18725474"/>
-            <a:ext cx="2224831" cy="360596"/>
+            <a:off x="14922436" y="18639431"/>
+            <a:ext cx="3714091" cy="360596"/>
           </a:xfrm>
           <a:prstGeom prst="rect">
             <a:avLst/>
@@ -5803,7 +5764,7 @@
                 </a:solidFill>
                 <a:latin typeface="Arial"/>
               </a:rPr>
-              <a:t>failed</a:t>
+              <a:t>tasks</a:t>
             </a:r>
             <a:r>
               <a:rPr sz="2840" b="0" i="0">
@@ -5821,7 +5782,7 @@
                 </a:solidFill>
                 <a:latin typeface="Arial"/>
               </a:rPr>
-              <a:t>the</a:t>
+              <a:t>where</a:t>
             </a:r>
             <a:r>
               <a:rPr sz="2840" b="0" i="0">
@@ -5839,21 +5800,39 @@
                 </a:solidFill>
                 <a:latin typeface="Arial"/>
               </a:rPr>
-              <a:t>test</a:t>
-            </a:r>
-          </a:p>
-        </p:txBody>
-      </p:sp>
-      <p:sp>
-        <p:nvSpPr>
-          <p:cNvPr id="71" name="TextBox 70"/>
+              <a:t>every</a:t>
+            </a:r>
+            <a:r>
+              <a:rPr sz="2840" b="0" i="0">
+                <a:solidFill>
+                  <a:srgbClr val="D03B3B"/>
+                </a:solidFill>
+                <a:latin typeface="Arial"/>
+              </a:rPr>
+              <a:t> </a:t>
+            </a:r>
+            <a:r>
+              <a:rPr sz="2840" b="0" i="0">
+                <a:solidFill>
+                  <a:srgbClr val="D03B3B"/>
+                </a:solidFill>
+                <a:latin typeface="Arial"/>
+              </a:rPr>
+              <a:t>rule</a:t>
+            </a:r>
+          </a:p>
+        </p:txBody>
+      </p:sp>
+      <p:sp>
+        <p:nvSpPr>
+          <p:cNvPr id="72" name="TextBox 71"/>
           <p:cNvSpPr txBox="1"/>
           <p:nvPr/>
         </p:nvSpPr>
         <p:spPr>
           <a:xfrm>
-            <a:off x="10837861" y="19291692"/>
-            <a:ext cx="7446828" cy="312515"/>
+            <a:off x="15116072" y="19120228"/>
+            <a:ext cx="3326812" cy="360596"/>
           </a:xfrm>
           <a:prstGeom prst="rect">
             <a:avLst/>
@@ -5867,27 +5846,81 @@
           <a:lstStyle/>
           <a:p>
             <a:r>
-              <a:rPr sz="2460" b="0" i="0">
-                <a:solidFill>
-                  <a:srgbClr val="52514E"/>
-                </a:solidFill>
-                <a:latin typeface="Arial"/>
-              </a:rPr>
-              <a:t>60 exposed ARC-AGI-2 training tasks; CORA’s object</a:t>
-            </a:r>
-          </a:p>
-        </p:txBody>
-      </p:sp>
-      <p:sp>
-        <p:nvSpPr>
-          <p:cNvPr id="72" name="TextBox 71"/>
+              <a:rPr sz="2840" b="0" i="0">
+                <a:solidFill>
+                  <a:srgbClr val="D03B3B"/>
+                </a:solidFill>
+                <a:latin typeface="Arial"/>
+              </a:rPr>
+              <a:t>that</a:t>
+            </a:r>
+            <a:r>
+              <a:rPr sz="2840" b="0" i="0">
+                <a:solidFill>
+                  <a:srgbClr val="D03B3B"/>
+                </a:solidFill>
+                <a:latin typeface="Arial"/>
+              </a:rPr>
+              <a:t> </a:t>
+            </a:r>
+            <a:r>
+              <a:rPr sz="2840" b="0" i="0">
+                <a:solidFill>
+                  <a:srgbClr val="D03B3B"/>
+                </a:solidFill>
+                <a:latin typeface="Arial"/>
+              </a:rPr>
+              <a:t>fit</a:t>
+            </a:r>
+            <a:r>
+              <a:rPr sz="2840" b="0" i="0">
+                <a:solidFill>
+                  <a:srgbClr val="D03B3B"/>
+                </a:solidFill>
+                <a:latin typeface="Arial"/>
+              </a:rPr>
+              <a:t> </a:t>
+            </a:r>
+            <a:r>
+              <a:rPr sz="2840" b="0" i="0">
+                <a:solidFill>
+                  <a:srgbClr val="D03B3B"/>
+                </a:solidFill>
+                <a:latin typeface="Arial"/>
+              </a:rPr>
+              <a:t>the</a:t>
+            </a:r>
+            <a:r>
+              <a:rPr sz="2840" b="0" i="0">
+                <a:solidFill>
+                  <a:srgbClr val="D03B3B"/>
+                </a:solidFill>
+                <a:latin typeface="Arial"/>
+              </a:rPr>
+              <a:t> </a:t>
+            </a:r>
+            <a:r>
+              <a:rPr sz="2840" b="0" i="0">
+                <a:solidFill>
+                  <a:srgbClr val="D03B3B"/>
+                </a:solidFill>
+                <a:latin typeface="Arial"/>
+              </a:rPr>
+              <a:t>examples</a:t>
+            </a:r>
+          </a:p>
+        </p:txBody>
+      </p:sp>
+      <p:sp>
+        <p:nvSpPr>
+          <p:cNvPr id="73" name="TextBox 72"/>
           <p:cNvSpPr txBox="1"/>
           <p:nvPr/>
         </p:nvSpPr>
         <p:spPr>
           <a:xfrm>
-            <a:off x="10837861" y="19696580"/>
-            <a:ext cx="3229408" cy="312515"/>
+            <a:off x="15667113" y="19601025"/>
+            <a:ext cx="2224831" cy="360596"/>
           </a:xfrm>
           <a:prstGeom prst="rect">
             <a:avLst/>
@@ -5901,27 +5934,63 @@
           <a:lstStyle/>
           <a:p>
             <a:r>
-              <a:rPr sz="2460" b="0" i="0">
-                <a:solidFill>
-                  <a:srgbClr val="52514E"/>
-                </a:solidFill>
-                <a:latin typeface="Arial"/>
-              </a:rPr>
-              <a:t>reasoner as submitted.</a:t>
-            </a:r>
-          </a:p>
-        </p:txBody>
-      </p:sp>
-      <p:sp>
-        <p:nvSpPr>
-          <p:cNvPr id="73" name="TextBox 72"/>
+              <a:rPr sz="2840" b="0" i="0">
+                <a:solidFill>
+                  <a:srgbClr val="D03B3B"/>
+                </a:solidFill>
+                <a:latin typeface="Arial"/>
+              </a:rPr>
+              <a:t>failed</a:t>
+            </a:r>
+            <a:r>
+              <a:rPr sz="2840" b="0" i="0">
+                <a:solidFill>
+                  <a:srgbClr val="D03B3B"/>
+                </a:solidFill>
+                <a:latin typeface="Arial"/>
+              </a:rPr>
+              <a:t> </a:t>
+            </a:r>
+            <a:r>
+              <a:rPr sz="2840" b="0" i="0">
+                <a:solidFill>
+                  <a:srgbClr val="D03B3B"/>
+                </a:solidFill>
+                <a:latin typeface="Arial"/>
+              </a:rPr>
+              <a:t>the</a:t>
+            </a:r>
+            <a:r>
+              <a:rPr sz="2840" b="0" i="0">
+                <a:solidFill>
+                  <a:srgbClr val="D03B3B"/>
+                </a:solidFill>
+                <a:latin typeface="Arial"/>
+              </a:rPr>
+              <a:t> </a:t>
+            </a:r>
+            <a:r>
+              <a:rPr sz="2840" b="0" i="0">
+                <a:solidFill>
+                  <a:srgbClr val="D03B3B"/>
+                </a:solidFill>
+                <a:latin typeface="Arial"/>
+              </a:rPr>
+              <a:t>test</a:t>
+            </a:r>
+          </a:p>
+        </p:txBody>
+      </p:sp>
+      <p:sp>
+        <p:nvSpPr>
+          <p:cNvPr id="74" name="TextBox 73"/>
           <p:cNvSpPr txBox="1"/>
           <p:nvPr/>
         </p:nvSpPr>
         <p:spPr>
           <a:xfrm>
-            <a:off x="10837874" y="20896301"/>
-            <a:ext cx="6857131" cy="480795"/>
+            <a:off x="10837861" y="20167243"/>
+            <a:ext cx="7446828" cy="312515"/>
           </a:xfrm>
           <a:prstGeom prst="rect">
             <a:avLst/>
@@ -5935,36 +6004,27 @@
           <a:lstStyle/>
           <a:p>
             <a:r>
-              <a:rPr sz="3790" b="1" i="0">
-                <a:solidFill>
-                  <a:srgbClr val="2A78D6"/>
-                </a:solidFill>
-                <a:latin typeface="Arial"/>
-              </a:rPr>
-              <a:t>A rule CORA built</a:t>
-            </a:r>
-            <a:r>
-              <a:rPr sz="2460" b="1" i="0">
-                <a:solidFill>
-                  <a:srgbClr val="0CA30C"/>
-                </a:solidFill>
-                <a:latin typeface="Arial"/>
-              </a:rPr>
-              <a:t> [DONE, NARROW]</a:t>
-            </a:r>
-          </a:p>
-        </p:txBody>
-      </p:sp>
-      <p:sp>
-        <p:nvSpPr>
-          <p:cNvPr id="74" name="TextBox 73"/>
+              <a:rPr sz="2460" b="0" i="0">
+                <a:solidFill>
+                  <a:srgbClr val="52514E"/>
+                </a:solidFill>
+                <a:latin typeface="Arial"/>
+              </a:rPr>
+              <a:t>60 exposed ARC-AGI-2 training tasks; CORA’s object</a:t>
+            </a:r>
+          </a:p>
+        </p:txBody>
+      </p:sp>
+      <p:sp>
+        <p:nvSpPr>
+          <p:cNvPr id="75" name="TextBox 74"/>
           <p:cNvSpPr txBox="1"/>
           <p:nvPr/>
         </p:nvSpPr>
         <p:spPr>
           <a:xfrm>
-            <a:off x="10837874" y="29217363"/>
-            <a:ext cx="8571681" cy="360595"/>
+            <a:off x="10837861" y="20572119"/>
+            <a:ext cx="3229408" cy="312515"/>
           </a:xfrm>
           <a:prstGeom prst="rect">
             <a:avLst/>
@@ -5978,27 +6038,27 @@
           <a:lstStyle/>
           <a:p>
             <a:r>
-              <a:rPr sz="2840" b="0" i="0">
-                <a:solidFill>
-                  <a:srgbClr val="0B0B0B"/>
-                </a:solidFill>
-                <a:latin typeface="Arial"/>
-              </a:rPr>
-              <a:t>Depending on an object’s colour, extend a line toward</a:t>
-            </a:r>
-          </a:p>
-        </p:txBody>
-      </p:sp>
-      <p:sp>
-        <p:nvSpPr>
-          <p:cNvPr id="75" name="TextBox 74"/>
+              <a:rPr sz="2460" b="0" i="0">
+                <a:solidFill>
+                  <a:srgbClr val="52514E"/>
+                </a:solidFill>
+                <a:latin typeface="Arial"/>
+              </a:rPr>
+              <a:t>reasoner as submitted.</a:t>
+            </a:r>
+          </a:p>
+        </p:txBody>
+      </p:sp>
+      <p:sp>
+        <p:nvSpPr>
+          <p:cNvPr id="76" name="TextBox 75"/>
           <p:cNvSpPr txBox="1"/>
           <p:nvPr/>
         </p:nvSpPr>
         <p:spPr>
           <a:xfrm>
-            <a:off x="10837874" y="29698159"/>
-            <a:ext cx="7732135" cy="360892"/>
+            <a:off x="10837874" y="21771852"/>
+            <a:ext cx="6857131" cy="480795"/>
           </a:xfrm>
           <a:prstGeom prst="rect">
             <a:avLst/>
@@ -6012,72 +6072,36 @@
           <a:lstStyle/>
           <a:p>
             <a:r>
-              <a:rPr sz="2840" b="0" i="0">
-                <a:solidFill>
-                  <a:srgbClr val="0B0B0B"/>
-                </a:solidFill>
-                <a:latin typeface="Arial"/>
-              </a:rPr>
-              <a:t>one of two corners:</a:t>
-            </a:r>
-            <a:r>
-              <a:rPr sz="2840" b="1" i="0">
-                <a:solidFill>
-                  <a:srgbClr val="0074D9"/>
-                </a:solidFill>
-                <a:latin typeface="Arial"/>
-              </a:rPr>
-              <a:t> </a:t>
-            </a:r>
-            <a:r>
-              <a:rPr sz="2840" b="1" i="0">
-                <a:solidFill>
-                  <a:srgbClr val="0074D9"/>
-                </a:solidFill>
-                <a:latin typeface="Arial"/>
-              </a:rPr>
-              <a:t>blue</a:t>
-            </a:r>
-            <a:r>
-              <a:rPr sz="2840" b="0" i="0">
-                <a:solidFill>
-                  <a:srgbClr val="0B0B0B"/>
-                </a:solidFill>
-                <a:latin typeface="Arial"/>
-              </a:rPr>
-              <a:t> up-left,</a:t>
-            </a:r>
-            <a:r>
-              <a:rPr sz="2840" b="1" i="0">
-                <a:solidFill>
-                  <a:srgbClr val="FF4136"/>
-                </a:solidFill>
-                <a:latin typeface="Arial"/>
-              </a:rPr>
-              <a:t> red</a:t>
-            </a:r>
-            <a:r>
-              <a:rPr sz="2840" b="0" i="0">
-                <a:solidFill>
-                  <a:srgbClr val="0B0B0B"/>
-                </a:solidFill>
-                <a:latin typeface="Arial"/>
-              </a:rPr>
-              <a:t> down-right.</a:t>
-            </a:r>
-          </a:p>
-        </p:txBody>
-      </p:sp>
-      <p:sp>
-        <p:nvSpPr>
-          <p:cNvPr id="76" name="TextBox 75"/>
+              <a:rPr sz="3790" b="1" i="0">
+                <a:solidFill>
+                  <a:srgbClr val="2A78D6"/>
+                </a:solidFill>
+                <a:latin typeface="Arial"/>
+              </a:rPr>
+              <a:t>A rule CORA built</a:t>
+            </a:r>
+            <a:r>
+              <a:rPr sz="2460" b="1" i="0">
+                <a:solidFill>
+                  <a:srgbClr val="0CA30C"/>
+                </a:solidFill>
+                <a:latin typeface="Arial"/>
+              </a:rPr>
+              <a:t> [DONE, NARROW]</a:t>
+            </a:r>
+          </a:p>
+        </p:txBody>
+      </p:sp>
+      <p:sp>
+        <p:nvSpPr>
+          <p:cNvPr id="77" name="TextBox 76"/>
           <p:cNvSpPr txBox="1"/>
           <p:nvPr/>
         </p:nvSpPr>
         <p:spPr>
           <a:xfrm>
-            <a:off x="10837874" y="30230201"/>
-            <a:ext cx="8461268" cy="312517"/>
+            <a:off x="10837874" y="30092913"/>
+            <a:ext cx="8571681" cy="360595"/>
           </a:xfrm>
           <a:prstGeom prst="rect">
             <a:avLst/>
@@ -6091,27 +6115,27 @@
           <a:lstStyle/>
           <a:p>
             <a:r>
-              <a:rPr sz="2460" b="0" i="0">
-                <a:solidFill>
-                  <a:srgbClr val="0B0B0B"/>
-                </a:solidFill>
-                <a:latin typeface="Arial"/>
-              </a:rPr>
-              <a:t>Automatically constructed conditional operation; rebuilt 3 of 3</a:t>
-            </a:r>
-          </a:p>
-        </p:txBody>
-      </p:sp>
-      <p:sp>
-        <p:nvSpPr>
-          <p:cNvPr id="77" name="TextBox 76"/>
+              <a:rPr sz="2840" b="0" i="0">
+                <a:solidFill>
+                  <a:srgbClr val="0B0B0B"/>
+                </a:solidFill>
+                <a:latin typeface="Arial"/>
+              </a:rPr>
+              <a:t>Depending on an object’s colour, extend a line toward</a:t>
+            </a:r>
+          </a:p>
+        </p:txBody>
+      </p:sp>
+      <p:sp>
+        <p:nvSpPr>
+          <p:cNvPr id="78" name="TextBox 77"/>
           <p:cNvSpPr txBox="1"/>
           <p:nvPr/>
         </p:nvSpPr>
         <p:spPr>
           <a:xfrm>
-            <a:off x="10837874" y="30635091"/>
-            <a:ext cx="8425327" cy="312517"/>
+            <a:off x="10837874" y="30573709"/>
+            <a:ext cx="7732135" cy="360892"/>
           </a:xfrm>
           <a:prstGeom prst="rect">
             <a:avLst/>
@@ -6125,45 +6149,72 @@
           <a:lstStyle/>
           <a:p>
             <a:r>
-              <a:rPr sz="2460" b="0" i="0">
-                <a:solidFill>
-                  <a:srgbClr val="0B0B0B"/>
-                </a:solidFill>
-                <a:latin typeface="Arial"/>
-              </a:rPr>
-              <a:t>times with one example held out.</a:t>
-            </a:r>
-            <a:r>
-              <a:rPr sz="2460" b="0" i="0">
-                <a:solidFill>
-                  <a:srgbClr val="52514E"/>
+              <a:rPr sz="2840" b="0" i="0">
+                <a:solidFill>
+                  <a:srgbClr val="0B0B0B"/>
+                </a:solidFill>
+                <a:latin typeface="Arial"/>
+              </a:rPr>
+              <a:t>one of two corners:</a:t>
+            </a:r>
+            <a:r>
+              <a:rPr sz="2840" b="1" i="0">
+                <a:solidFill>
+                  <a:srgbClr val="0074D9"/>
                 </a:solidFill>
                 <a:latin typeface="Arial"/>
               </a:rPr>
               <a:t> </a:t>
             </a:r>
             <a:r>
-              <a:rPr sz="2460" b="0" i="0">
-                <a:solidFill>
-                  <a:srgbClr val="52514E"/>
-                </a:solidFill>
-                <a:latin typeface="Arial"/>
-              </a:rPr>
-              <a:t>An exposed task chosen in</a:t>
-            </a:r>
-          </a:p>
-        </p:txBody>
-      </p:sp>
-      <p:sp>
-        <p:nvSpPr>
-          <p:cNvPr id="78" name="TextBox 77"/>
+              <a:rPr sz="2840" b="1" i="0">
+                <a:solidFill>
+                  <a:srgbClr val="0074D9"/>
+                </a:solidFill>
+                <a:latin typeface="Arial"/>
+              </a:rPr>
+              <a:t>blue</a:t>
+            </a:r>
+            <a:r>
+              <a:rPr sz="2840" b="0" i="0">
+                <a:solidFill>
+                  <a:srgbClr val="0B0B0B"/>
+                </a:solidFill>
+                <a:latin typeface="Arial"/>
+              </a:rPr>
+              <a:t> up-left,</a:t>
+            </a:r>
+            <a:r>
+              <a:rPr sz="2840" b="1" i="0">
+                <a:solidFill>
+                  <a:srgbClr val="FF4136"/>
+                </a:solidFill>
+                <a:latin typeface="Arial"/>
+              </a:rPr>
+              <a:t> red</a:t>
+            </a:r>
+            <a:r>
+              <a:rPr sz="2840" b="0" i="0">
+                <a:solidFill>
+                  <a:srgbClr val="0B0B0B"/>
+                </a:solidFill>
+                <a:latin typeface="Arial"/>
+              </a:rPr>
+              <a:t> down-right.</a:t>
+            </a:r>
+          </a:p>
+        </p:txBody>
+      </p:sp>
+      <p:sp>
+        <p:nvSpPr>
+          <p:cNvPr id="79" name="TextBox 78"/>
           <p:cNvSpPr txBox="1"/>
           <p:nvPr/>
         </p:nvSpPr>
         <p:spPr>
           <a:xfrm>
-            <a:off x="10837874" y="31039968"/>
-            <a:ext cx="7967177" cy="312517"/>
+            <a:off x="10837874" y="31105750"/>
+            <a:ext cx="8461268" cy="312517"/>
           </a:xfrm>
           <a:prstGeom prst="rect">
             <a:avLst/>
@@ -6179,25 +6230,25 @@
             <a:r>
               <a:rPr sz="2460" b="0" i="0">
                 <a:solidFill>
-                  <a:srgbClr val="52514E"/>
-                </a:solidFill>
-                <a:latin typeface="Arial"/>
-              </a:rPr>
-              <a:t>development; a constructor that ignored the failure record</a:t>
-            </a:r>
-          </a:p>
-        </p:txBody>
-      </p:sp>
-      <p:sp>
-        <p:nvSpPr>
-          <p:cNvPr id="79" name="TextBox 78"/>
+                  <a:srgbClr val="0B0B0B"/>
+                </a:solidFill>
+                <a:latin typeface="Arial"/>
+              </a:rPr>
+              <a:t>Automatically constructed conditional operation; rebuilt 3 of 3</a:t>
+            </a:r>
+          </a:p>
+        </p:txBody>
+      </p:sp>
+      <p:sp>
+        <p:nvSpPr>
+          <p:cNvPr id="80" name="TextBox 79"/>
           <p:cNvSpPr txBox="1"/>
           <p:nvPr/>
         </p:nvSpPr>
         <p:spPr>
           <a:xfrm>
-            <a:off x="10837874" y="31444843"/>
-            <a:ext cx="7997491" cy="312517"/>
+            <a:off x="10837874" y="31510628"/>
+            <a:ext cx="8425327" cy="312517"/>
           </a:xfrm>
           <a:prstGeom prst="rect">
             <a:avLst/>
@@ -6213,25 +6264,43 @@
             <a:r>
               <a:rPr sz="2460" b="0" i="0">
                 <a:solidFill>
+                  <a:srgbClr val="0B0B0B"/>
+                </a:solidFill>
+                <a:latin typeface="Arial"/>
+              </a:rPr>
+              <a:t>times with one example held out.</a:t>
+            </a:r>
+            <a:r>
+              <a:rPr sz="2460" b="0" i="0">
+                <a:solidFill>
                   <a:srgbClr val="52514E"/>
                 </a:solidFill>
                 <a:latin typeface="Arial"/>
               </a:rPr>
-              <a:t>found the same rule, so diagnosis did not cause this gain.</a:t>
-            </a:r>
-          </a:p>
-        </p:txBody>
-      </p:sp>
-      <p:sp>
-        <p:nvSpPr>
-          <p:cNvPr id="80" name="TextBox 79"/>
+              <a:t> </a:t>
+            </a:r>
+            <a:r>
+              <a:rPr sz="2460" b="0" i="0">
+                <a:solidFill>
+                  <a:srgbClr val="52514E"/>
+                </a:solidFill>
+                <a:latin typeface="Arial"/>
+              </a:rPr>
+              <a:t>An exposed task chosen in</a:t>
+            </a:r>
+          </a:p>
+        </p:txBody>
+      </p:sp>
+      <p:sp>
+        <p:nvSpPr>
+          <p:cNvPr id="81" name="TextBox 80"/>
           <p:cNvSpPr txBox="1"/>
           <p:nvPr/>
         </p:nvSpPr>
         <p:spPr>
           <a:xfrm>
-            <a:off x="10837874" y="32710524"/>
-            <a:ext cx="5871036" cy="480795"/>
+            <a:off x="10837874" y="31915518"/>
+            <a:ext cx="7967177" cy="312517"/>
           </a:xfrm>
           <a:prstGeom prst="rect">
             <a:avLst/>
@@ -6245,36 +6314,27 @@
           <a:lstStyle/>
           <a:p>
             <a:r>
-              <a:rPr sz="3790" b="1" i="0">
-                <a:solidFill>
-                  <a:srgbClr val="2A78D6"/>
-                </a:solidFill>
-                <a:latin typeface="Arial"/>
-              </a:rPr>
-              <a:t>Did it generalize?</a:t>
-            </a:r>
-            <a:r>
-              <a:rPr sz="2460" b="1" i="0">
-                <a:solidFill>
-                  <a:srgbClr val="D03B3B"/>
-                </a:solidFill>
-                <a:latin typeface="Arial"/>
-              </a:rPr>
-              <a:t> [NEGATIVE]</a:t>
-            </a:r>
-          </a:p>
-        </p:txBody>
-      </p:sp>
-      <p:sp>
-        <p:nvSpPr>
-          <p:cNvPr id="81" name="TextBox 80"/>
+              <a:rPr sz="2460" b="0" i="0">
+                <a:solidFill>
+                  <a:srgbClr val="52514E"/>
+                </a:solidFill>
+                <a:latin typeface="Arial"/>
+              </a:rPr>
+              <a:t>development; a constructor that ignored the failure record</a:t>
+            </a:r>
+          </a:p>
+        </p:txBody>
+      </p:sp>
+      <p:sp>
+        <p:nvSpPr>
+          <p:cNvPr id="82" name="TextBox 81"/>
           <p:cNvSpPr txBox="1"/>
           <p:nvPr/>
         </p:nvSpPr>
         <p:spPr>
           <a:xfrm>
-            <a:off x="13318413" y="33850336"/>
-            <a:ext cx="3659649" cy="1442386"/>
+            <a:off x="10837874" y="32320393"/>
+            <a:ext cx="7997491" cy="312517"/>
           </a:xfrm>
           <a:prstGeom prst="rect">
             <a:avLst/>
@@ -6288,27 +6348,27 @@
           <a:lstStyle/>
           <a:p>
             <a:r>
-              <a:rPr sz="11360" b="1" i="0">
-                <a:solidFill>
-                  <a:srgbClr val="D03B3B"/>
-                </a:solidFill>
-                <a:latin typeface="Arial"/>
-              </a:rPr>
-              <a:t>0 / 58</a:t>
-            </a:r>
-          </a:p>
-        </p:txBody>
-      </p:sp>
-      <p:sp>
-        <p:nvSpPr>
-          <p:cNvPr id="82" name="TextBox 81"/>
+              <a:rPr sz="2460" b="0" i="0">
+                <a:solidFill>
+                  <a:srgbClr val="52514E"/>
+                </a:solidFill>
+                <a:latin typeface="Arial"/>
+              </a:rPr>
+              <a:t>found the same rule, so diagnosis did not cause this gain.</a:t>
+            </a:r>
+          </a:p>
+        </p:txBody>
+      </p:sp>
+      <p:sp>
+        <p:nvSpPr>
+          <p:cNvPr id="83" name="TextBox 82"/>
           <p:cNvSpPr txBox="1"/>
           <p:nvPr/>
         </p:nvSpPr>
         <p:spPr>
           <a:xfrm>
-            <a:off x="11820867" y="35216718"/>
-            <a:ext cx="6654751" cy="360595"/>
+            <a:off x="10837874" y="33586064"/>
+            <a:ext cx="5871036" cy="480795"/>
           </a:xfrm>
           <a:prstGeom prst="rect">
             <a:avLst/>
@@ -6322,27 +6382,36 @@
           <a:lstStyle/>
           <a:p>
             <a:r>
-              <a:rPr sz="2840" b="0" i="0">
-                <a:solidFill>
-                  <a:srgbClr val="0B0B0B"/>
-                </a:solidFill>
-                <a:latin typeface="Arial"/>
-              </a:rPr>
-              <a:t>new verified solves from rule construction</a:t>
-            </a:r>
-          </a:p>
-        </p:txBody>
-      </p:sp>
-      <p:sp>
-        <p:nvSpPr>
-          <p:cNvPr id="83" name="TextBox 82"/>
+              <a:rPr sz="3790" b="1" i="0">
+                <a:solidFill>
+                  <a:srgbClr val="2A78D6"/>
+                </a:solidFill>
+                <a:latin typeface="Arial"/>
+              </a:rPr>
+              <a:t>Did it generalize?</a:t>
+            </a:r>
+            <a:r>
+              <a:rPr sz="2460" b="1" i="0">
+                <a:solidFill>
+                  <a:srgbClr val="D03B3B"/>
+                </a:solidFill>
+                <a:latin typeface="Arial"/>
+              </a:rPr>
+              <a:t> [NEGATIVE]</a:t>
+            </a:r>
+          </a:p>
+        </p:txBody>
+      </p:sp>
+      <p:sp>
+        <p:nvSpPr>
+          <p:cNvPr id="84" name="TextBox 83"/>
           <p:cNvSpPr txBox="1"/>
           <p:nvPr/>
         </p:nvSpPr>
         <p:spPr>
           <a:xfrm>
-            <a:off x="10837874" y="35748760"/>
-            <a:ext cx="7913109" cy="312517"/>
+            <a:off x="13318413" y="34725886"/>
+            <a:ext cx="3659649" cy="1442386"/>
           </a:xfrm>
           <a:prstGeom prst="rect">
             <a:avLst/>
@@ -6356,27 +6425,27 @@
           <a:lstStyle/>
           <a:p>
             <a:r>
-              <a:rPr sz="2460" b="0" i="0">
-                <a:solidFill>
-                  <a:srgbClr val="52514E"/>
-                </a:solidFill>
-                <a:latin typeface="Arial"/>
-              </a:rPr>
-              <a:t>58 separately selected, still exposed training tasks; every</a:t>
-            </a:r>
-          </a:p>
-        </p:txBody>
-      </p:sp>
-      <p:sp>
-        <p:nvSpPr>
-          <p:cNvPr id="84" name="TextBox 83"/>
+              <a:rPr sz="11360" b="1" i="0">
+                <a:solidFill>
+                  <a:srgbClr val="D03B3B"/>
+                </a:solidFill>
+                <a:latin typeface="Arial"/>
+              </a:rPr>
+              <a:t>0 / 58</a:t>
+            </a:r>
+          </a:p>
+        </p:txBody>
+      </p:sp>
+      <p:sp>
+        <p:nvSpPr>
+          <p:cNvPr id="85" name="TextBox 84"/>
           <p:cNvSpPr txBox="1"/>
           <p:nvPr/>
         </p:nvSpPr>
         <p:spPr>
           <a:xfrm>
-            <a:off x="10837874" y="36153635"/>
-            <a:ext cx="8230627" cy="312517"/>
+            <a:off x="11820867" y="36092268"/>
+            <a:ext cx="6654751" cy="360595"/>
           </a:xfrm>
           <a:prstGeom prst="rect">
             <a:avLst/>
@@ -6390,27 +6459,27 @@
           <a:lstStyle/>
           <a:p>
             <a:r>
-              <a:rPr sz="2460" b="0" i="0">
-                <a:solidFill>
-                  <a:srgbClr val="52514E"/>
-                </a:solidFill>
-                <a:latin typeface="Arial"/>
-              </a:rPr>
-              <a:t>construction variant; no wrong answers; no advantage from</a:t>
-            </a:r>
-          </a:p>
-        </p:txBody>
-      </p:sp>
-      <p:sp>
-        <p:nvSpPr>
-          <p:cNvPr id="85" name="TextBox 84"/>
+              <a:rPr sz="2840" b="0" i="0">
+                <a:solidFill>
+                  <a:srgbClr val="0B0B0B"/>
+                </a:solidFill>
+                <a:latin typeface="Arial"/>
+              </a:rPr>
+              <a:t>new verified solves from rule construction</a:t>
+            </a:r>
+          </a:p>
+        </p:txBody>
+      </p:sp>
+      <p:sp>
+        <p:nvSpPr>
+          <p:cNvPr id="86" name="TextBox 85"/>
           <p:cNvSpPr txBox="1"/>
           <p:nvPr/>
         </p:nvSpPr>
         <p:spPr>
           <a:xfrm>
-            <a:off x="10837874" y="36558525"/>
-            <a:ext cx="2473117" cy="312517"/>
+            <a:off x="10837874" y="36624310"/>
+            <a:ext cx="7913109" cy="312517"/>
           </a:xfrm>
           <a:prstGeom prst="rect">
             <a:avLst/>
@@ -6430,21 +6499,21 @@
                 </a:solidFill>
                 <a:latin typeface="Arial"/>
               </a:rPr>
-              <a:t>the failure record.</a:t>
-            </a:r>
-          </a:p>
-        </p:txBody>
-      </p:sp>
-      <p:sp>
-        <p:nvSpPr>
-          <p:cNvPr id="86" name="TextBox 85"/>
+              <a:t>58 separately selected, still exposed training tasks; every</a:t>
+            </a:r>
+          </a:p>
+        </p:txBody>
+      </p:sp>
+      <p:sp>
+        <p:nvSpPr>
+          <p:cNvPr id="87" name="TextBox 86"/>
           <p:cNvSpPr txBox="1"/>
           <p:nvPr/>
         </p:nvSpPr>
         <p:spPr>
           <a:xfrm>
-            <a:off x="20739748" y="9336461"/>
-            <a:ext cx="6366857" cy="544059"/>
+            <a:off x="10837874" y="37029184"/>
+            <a:ext cx="8230627" cy="312517"/>
           </a:xfrm>
           <a:prstGeom prst="rect">
             <a:avLst/>
@@ -6458,63 +6527,27 @@
           <a:lstStyle/>
           <a:p>
             <a:r>
-              <a:rPr sz="3790" b="1" i="0">
-                <a:solidFill>
-                  <a:srgbClr val="2A78D6"/>
-                </a:solidFill>
-                <a:latin typeface="Arial"/>
-              </a:rPr>
-              <a:t>3</a:t>
-            </a:r>
-            <a:r>
-              <a:rPr sz="4280" b="0" i="1">
-                <a:solidFill>
-                  <a:srgbClr val="2A78D6"/>
-                </a:solidFill>
-                <a:latin typeface="Arial"/>
-              </a:rPr>
-              <a:t> </a:t>
-            </a:r>
-            <a:r>
-              <a:rPr sz="4280" b="0" i="1">
-                <a:solidFill>
-                  <a:srgbClr val="2A78D6"/>
-                </a:solidFill>
-                <a:latin typeface="Arial"/>
-              </a:rPr>
-              <a:t>·</a:t>
-            </a:r>
-            <a:r>
-              <a:rPr sz="3790" b="1" i="0">
-                <a:solidFill>
-                  <a:srgbClr val="2A78D6"/>
-                </a:solidFill>
-                <a:latin typeface="Arial"/>
-              </a:rPr>
-              <a:t> </a:t>
-            </a:r>
-            <a:r>
-              <a:rPr sz="3790" b="1" i="0">
-                <a:solidFill>
-                  <a:srgbClr val="2A78D6"/>
-                </a:solidFill>
-                <a:latin typeface="Arial"/>
-              </a:rPr>
-              <a:t>Learning what to revise</a:t>
-            </a:r>
-          </a:p>
-        </p:txBody>
-      </p:sp>
-      <p:sp>
-        <p:nvSpPr>
-          <p:cNvPr id="87" name="TextBox 86"/>
+              <a:rPr sz="2460" b="0" i="0">
+                <a:solidFill>
+                  <a:srgbClr val="52514E"/>
+                </a:solidFill>
+                <a:latin typeface="Arial"/>
+              </a:rPr>
+              <a:t>construction variant; no wrong answers; no advantage from</a:t>
+            </a:r>
+          </a:p>
+        </p:txBody>
+      </p:sp>
+      <p:sp>
+        <p:nvSpPr>
+          <p:cNvPr id="88" name="TextBox 87"/>
           <p:cNvSpPr txBox="1"/>
           <p:nvPr/>
         </p:nvSpPr>
         <p:spPr>
           <a:xfrm>
-            <a:off x="20993701" y="16840784"/>
-            <a:ext cx="315238" cy="1186538"/>
+            <a:off x="10837874" y="37434074"/>
+            <a:ext cx="2473117" cy="312517"/>
           </a:xfrm>
           <a:prstGeom prst="rect">
             <a:avLst/>
@@ -6528,27 +6561,27 @@
           <a:lstStyle/>
           <a:p>
             <a:r>
-              <a:rPr sz="2080" b="0" i="0">
+              <a:rPr sz="2460" b="0" i="0">
                 <a:solidFill>
                   <a:srgbClr val="52514E"/>
                 </a:solidFill>
                 <a:latin typeface="Arial"/>
               </a:rPr>
-              <a:t>supported</a:t>
-            </a:r>
-          </a:p>
-        </p:txBody>
-      </p:sp>
-      <p:sp>
-        <p:nvSpPr>
-          <p:cNvPr id="88" name="TextBox 87"/>
+              <a:t>the failure record.</a:t>
+            </a:r>
+          </a:p>
+        </p:txBody>
+      </p:sp>
+      <p:sp>
+        <p:nvSpPr>
+          <p:cNvPr id="89" name="TextBox 88"/>
           <p:cNvSpPr txBox="1"/>
           <p:nvPr/>
         </p:nvSpPr>
         <p:spPr>
           <a:xfrm>
-            <a:off x="20739748" y="19252271"/>
-            <a:ext cx="7276805" cy="312774"/>
+            <a:off x="20739748" y="9336461"/>
+            <a:ext cx="6366857" cy="544059"/>
           </a:xfrm>
           <a:prstGeom prst="rect">
             <a:avLst/>
@@ -6562,54 +6595,63 @@
           <a:lstStyle/>
           <a:p>
             <a:r>
-              <a:rPr sz="2460" b="1" i="0">
-                <a:solidFill>
-                  <a:srgbClr val="0B0B0B"/>
-                </a:solidFill>
-                <a:latin typeface="Arial"/>
-              </a:rPr>
-              <a:t>Recognizing</a:t>
-            </a:r>
-            <a:r>
-              <a:rPr sz="2460" b="0" i="0">
-                <a:solidFill>
-                  <a:srgbClr val="0B0B0B"/>
-                </a:solidFill>
-                <a:latin typeface="Arial"/>
-              </a:rPr>
-              <a:t> an inadequate explanation:</a:t>
-            </a:r>
-            <a:r>
-              <a:rPr sz="2460" b="0" i="0">
-                <a:solidFill>
-                  <a:srgbClr val="0B0B0B"/>
+              <a:rPr sz="3790" b="1" i="0">
+                <a:solidFill>
+                  <a:srgbClr val="2A78D6"/>
+                </a:solidFill>
+                <a:latin typeface="Arial"/>
+              </a:rPr>
+              <a:t>3</a:t>
+            </a:r>
+            <a:r>
+              <a:rPr sz="4280" b="0" i="1">
+                <a:solidFill>
+                  <a:srgbClr val="2A78D6"/>
                 </a:solidFill>
                 <a:latin typeface="Arial"/>
               </a:rPr>
               <a:t> </a:t>
             </a:r>
             <a:r>
-              <a:rPr sz="2460" b="0" i="0">
-                <a:solidFill>
-                  <a:srgbClr val="0B0B0B"/>
-                </a:solidFill>
-                <a:latin typeface="Arial"/>
-              </a:rPr>
-              <a:t>partly built</a:t>
-            </a:r>
-          </a:p>
-        </p:txBody>
-      </p:sp>
-      <p:sp>
-        <p:nvSpPr>
-          <p:cNvPr id="89" name="TextBox 88"/>
+              <a:rPr sz="4280" b="0" i="1">
+                <a:solidFill>
+                  <a:srgbClr val="2A78D6"/>
+                </a:solidFill>
+                <a:latin typeface="Arial"/>
+              </a:rPr>
+              <a:t>·</a:t>
+            </a:r>
+            <a:r>
+              <a:rPr sz="3790" b="1" i="0">
+                <a:solidFill>
+                  <a:srgbClr val="2A78D6"/>
+                </a:solidFill>
+                <a:latin typeface="Arial"/>
+              </a:rPr>
+              <a:t> </a:t>
+            </a:r>
+            <a:r>
+              <a:rPr sz="3790" b="1" i="0">
+                <a:solidFill>
+                  <a:srgbClr val="2A78D6"/>
+                </a:solidFill>
+                <a:latin typeface="Arial"/>
+              </a:rPr>
+              <a:t>Learning what to revise</a:t>
+            </a:r>
+          </a:p>
+        </p:txBody>
+      </p:sp>
+      <p:sp>
+        <p:nvSpPr>
+          <p:cNvPr id="90" name="TextBox 89"/>
           <p:cNvSpPr txBox="1"/>
           <p:nvPr/>
         </p:nvSpPr>
         <p:spPr>
           <a:xfrm>
-            <a:off x="20739748" y="19657159"/>
-            <a:ext cx="8456804" cy="312774"/>
+            <a:off x="20993701" y="16840782"/>
+            <a:ext cx="315238" cy="1186538"/>
           </a:xfrm>
           <a:prstGeom prst="rect">
             <a:avLst/>
@@ -6623,72 +6665,27 @@
           <a:lstStyle/>
           <a:p>
             <a:r>
-              <a:rPr sz="2460" b="0" i="0">
-                <a:solidFill>
-                  <a:srgbClr val="0B0B0B"/>
-                </a:solidFill>
-                <a:latin typeface="Arial"/>
-              </a:rPr>
-              <a:t>(CORA-v2).</a:t>
-            </a:r>
-            <a:r>
-              <a:rPr sz="2460" b="1" i="0">
-                <a:solidFill>
-                  <a:srgbClr val="0B0B0B"/>
-                </a:solidFill>
-                <a:latin typeface="Arial"/>
-              </a:rPr>
-              <a:t> </a:t>
-            </a:r>
-            <a:r>
-              <a:rPr sz="2460" b="1" i="0">
-                <a:solidFill>
-                  <a:srgbClr val="0B0B0B"/>
-                </a:solidFill>
-                <a:latin typeface="Arial"/>
-              </a:rPr>
-              <a:t>Knowing which revision helps</a:t>
-            </a:r>
-            <a:r>
-              <a:rPr sz="2460" b="0" i="0">
-                <a:solidFill>
-                  <a:srgbClr val="0B0B0B"/>
-                </a:solidFill>
-                <a:latin typeface="Arial"/>
-              </a:rPr>
-              <a:t>:</a:t>
-            </a:r>
-            <a:r>
-              <a:rPr sz="2460" b="0" i="0">
-                <a:solidFill>
-                  <a:srgbClr val="0B0B0B"/>
-                </a:solidFill>
-                <a:latin typeface="Arial"/>
-              </a:rPr>
-              <a:t> </a:t>
-            </a:r>
-            <a:r>
-              <a:rPr sz="2460" b="0" i="0">
-                <a:solidFill>
-                  <a:srgbClr val="0B0B0B"/>
-                </a:solidFill>
-                <a:latin typeface="Arial"/>
-              </a:rPr>
-              <a:t>not yet shown.</a:t>
-            </a:r>
-          </a:p>
-        </p:txBody>
-      </p:sp>
-      <p:sp>
-        <p:nvSpPr>
-          <p:cNvPr id="90" name="TextBox 89"/>
+              <a:rPr sz="2080" b="0" i="0">
+                <a:solidFill>
+                  <a:srgbClr val="52514E"/>
+                </a:solidFill>
+                <a:latin typeface="Arial"/>
+              </a:rPr>
+              <a:t>supported</a:t>
+            </a:r>
+          </a:p>
+        </p:txBody>
+      </p:sp>
+      <p:sp>
+        <p:nvSpPr>
+          <p:cNvPr id="91" name="TextBox 90"/>
           <p:cNvSpPr txBox="1"/>
           <p:nvPr/>
         </p:nvSpPr>
         <p:spPr>
           <a:xfrm>
-            <a:off x="20739749" y="20062035"/>
-            <a:ext cx="5251091" cy="312515"/>
+            <a:off x="20739748" y="19252271"/>
+            <a:ext cx="7276805" cy="312774"/>
           </a:xfrm>
           <a:prstGeom prst="rect">
             <a:avLst/>
@@ -6702,27 +6699,54 @@
           <a:lstStyle/>
           <a:p>
             <a:r>
+              <a:rPr sz="2460" b="1" i="0">
+                <a:solidFill>
+                  <a:srgbClr val="0B0B0B"/>
+                </a:solidFill>
+                <a:latin typeface="Arial"/>
+              </a:rPr>
+              <a:t>Recognizing</a:t>
+            </a:r>
+            <a:r>
               <a:rPr sz="2460" b="0" i="0">
                 <a:solidFill>
-                  <a:srgbClr val="52514E"/>
-                </a:solidFill>
-                <a:latin typeface="Arial"/>
-              </a:rPr>
-              <a:t>CORA never sees the hidden answer.</a:t>
-            </a:r>
-          </a:p>
-        </p:txBody>
-      </p:sp>
-      <p:sp>
-        <p:nvSpPr>
-          <p:cNvPr id="91" name="TextBox 90"/>
+                  <a:srgbClr val="0B0B0B"/>
+                </a:solidFill>
+                <a:latin typeface="Arial"/>
+              </a:rPr>
+              <a:t> an inadequate explanation:</a:t>
+            </a:r>
+            <a:r>
+              <a:rPr sz="2460" b="0" i="0">
+                <a:solidFill>
+                  <a:srgbClr val="0B0B0B"/>
+                </a:solidFill>
+                <a:latin typeface="Arial"/>
+              </a:rPr>
+              <a:t> </a:t>
+            </a:r>
+            <a:r>
+              <a:rPr sz="2460" b="0" i="0">
+                <a:solidFill>
+                  <a:srgbClr val="0B0B0B"/>
+                </a:solidFill>
+                <a:latin typeface="Arial"/>
+              </a:rPr>
+              <a:t>partly built</a:t>
+            </a:r>
+          </a:p>
+        </p:txBody>
+      </p:sp>
+      <p:sp>
+        <p:nvSpPr>
+          <p:cNvPr id="92" name="TextBox 91"/>
           <p:cNvSpPr txBox="1"/>
           <p:nvPr/>
         </p:nvSpPr>
         <p:spPr>
           <a:xfrm>
-            <a:off x="20739735" y="21264574"/>
-            <a:ext cx="4800096" cy="480795"/>
+            <a:off x="20739748" y="19657159"/>
+            <a:ext cx="8456804" cy="312774"/>
           </a:xfrm>
           <a:prstGeom prst="rect">
             <a:avLst/>
@@ -6736,36 +6760,72 @@
           <a:lstStyle/>
           <a:p>
             <a:r>
-              <a:rPr sz="3790" b="1" i="0">
-                <a:solidFill>
-                  <a:srgbClr val="2A78D6"/>
-                </a:solidFill>
-                <a:latin typeface="Arial"/>
-              </a:rPr>
-              <a:t>CORA-v2</a:t>
+              <a:rPr sz="2460" b="0" i="0">
+                <a:solidFill>
+                  <a:srgbClr val="0B0B0B"/>
+                </a:solidFill>
+                <a:latin typeface="Arial"/>
+              </a:rPr>
+              <a:t>(CORA-v2).</a:t>
             </a:r>
             <a:r>
               <a:rPr sz="2460" b="1" i="0">
                 <a:solidFill>
-                  <a:srgbClr val="EB6834"/>
-                </a:solidFill>
-                <a:latin typeface="Arial"/>
-              </a:rPr>
-              <a:t> [DEVELOPMENT]</a:t>
-            </a:r>
-          </a:p>
-        </p:txBody>
-      </p:sp>
-      <p:sp>
-        <p:nvSpPr>
-          <p:cNvPr id="92" name="TextBox 91"/>
+                  <a:srgbClr val="0B0B0B"/>
+                </a:solidFill>
+                <a:latin typeface="Arial"/>
+              </a:rPr>
+              <a:t> </a:t>
+            </a:r>
+            <a:r>
+              <a:rPr sz="2460" b="1" i="0">
+                <a:solidFill>
+                  <a:srgbClr val="0B0B0B"/>
+                </a:solidFill>
+                <a:latin typeface="Arial"/>
+              </a:rPr>
+              <a:t>Knowing which revision helps</a:t>
+            </a:r>
+            <a:r>
+              <a:rPr sz="2460" b="0" i="0">
+                <a:solidFill>
+                  <a:srgbClr val="0B0B0B"/>
+                </a:solidFill>
+                <a:latin typeface="Arial"/>
+              </a:rPr>
+              <a:t>:</a:t>
+            </a:r>
+            <a:r>
+              <a:rPr sz="2460" b="0" i="0">
+                <a:solidFill>
+                  <a:srgbClr val="0B0B0B"/>
+                </a:solidFill>
+                <a:latin typeface="Arial"/>
+              </a:rPr>
+              <a:t> </a:t>
+            </a:r>
+            <a:r>
+              <a:rPr sz="2460" b="0" i="0">
+                <a:solidFill>
+                  <a:srgbClr val="0B0B0B"/>
+                </a:solidFill>
+                <a:latin typeface="Arial"/>
+              </a:rPr>
+              <a:t>not yet shown.</a:t>
+            </a:r>
+          </a:p>
+        </p:txBody>
+      </p:sp>
+      <p:sp>
+        <p:nvSpPr>
+          <p:cNvPr id="93" name="TextBox 92"/>
           <p:cNvSpPr txBox="1"/>
           <p:nvPr/>
         </p:nvSpPr>
         <p:spPr>
           <a:xfrm>
-            <a:off x="20739735" y="22401299"/>
-            <a:ext cx="7928009" cy="360596"/>
+            <a:off x="20739749" y="20062035"/>
+            <a:ext cx="5251091" cy="312515"/>
           </a:xfrm>
           <a:prstGeom prst="rect">
             <a:avLst/>
@@ -6779,27 +6839,27 @@
           <a:lstStyle/>
           <a:p>
             <a:r>
-              <a:rPr sz="2840" b="0" i="0">
-                <a:solidFill>
-                  <a:srgbClr val="0B0B0B"/>
-                </a:solidFill>
-                <a:latin typeface="Arial"/>
-              </a:rPr>
-              <a:t>Compares alternative executable hypotheses and</a:t>
-            </a:r>
-          </a:p>
-        </p:txBody>
-      </p:sp>
-      <p:sp>
-        <p:nvSpPr>
-          <p:cNvPr id="93" name="TextBox 92"/>
+              <a:rPr sz="2460" b="0" i="0">
+                <a:solidFill>
+                  <a:srgbClr val="52514E"/>
+                </a:solidFill>
+                <a:latin typeface="Arial"/>
+              </a:rPr>
+              <a:t>CORA never sees the hidden answer.</a:t>
+            </a:r>
+          </a:p>
+        </p:txBody>
+      </p:sp>
+      <p:sp>
+        <p:nvSpPr>
+          <p:cNvPr id="94" name="TextBox 93"/>
           <p:cNvSpPr txBox="1"/>
           <p:nvPr/>
         </p:nvSpPr>
         <p:spPr>
           <a:xfrm>
-            <a:off x="20739735" y="22882096"/>
-            <a:ext cx="4322774" cy="360596"/>
+            <a:off x="20739735" y="21264574"/>
+            <a:ext cx="4800096" cy="480795"/>
           </a:xfrm>
           <a:prstGeom prst="rect">
             <a:avLst/>
@@ -6813,27 +6873,36 @@
           <a:lstStyle/>
           <a:p>
             <a:r>
-              <a:rPr sz="2840" b="0" i="0">
-                <a:solidFill>
-                  <a:srgbClr val="0B0B0B"/>
-                </a:solidFill>
-                <a:latin typeface="Arial"/>
-              </a:rPr>
-              <a:t>records why it is uncertain.</a:t>
-            </a:r>
-          </a:p>
-        </p:txBody>
-      </p:sp>
-      <p:sp>
-        <p:nvSpPr>
-          <p:cNvPr id="94" name="TextBox 93"/>
+              <a:rPr sz="3790" b="1" i="0">
+                <a:solidFill>
+                  <a:srgbClr val="2A78D6"/>
+                </a:solidFill>
+                <a:latin typeface="Arial"/>
+              </a:rPr>
+              <a:t>CORA-v2</a:t>
+            </a:r>
+            <a:r>
+              <a:rPr sz="2460" b="1" i="0">
+                <a:solidFill>
+                  <a:srgbClr val="EB6834"/>
+                </a:solidFill>
+                <a:latin typeface="Arial"/>
+              </a:rPr>
+              <a:t> [DEVELOPMENT]</a:t>
+            </a:r>
+          </a:p>
+        </p:txBody>
+      </p:sp>
+      <p:sp>
+        <p:nvSpPr>
+          <p:cNvPr id="95" name="TextBox 94"/>
           <p:cNvSpPr txBox="1"/>
           <p:nvPr/>
         </p:nvSpPr>
         <p:spPr>
           <a:xfrm>
-            <a:off x="20739735" y="27585196"/>
-            <a:ext cx="8226558" cy="312517"/>
+            <a:off x="20739735" y="22401299"/>
+            <a:ext cx="7928009" cy="360596"/>
           </a:xfrm>
           <a:prstGeom prst="rect">
             <a:avLst/>
@@ -6847,45 +6916,27 @@
           <a:lstStyle/>
           <a:p>
             <a:r>
-              <a:rPr sz="2460" b="0" i="0">
-                <a:solidFill>
-                  <a:srgbClr val="52514E"/>
-                </a:solidFill>
-                <a:latin typeface="Arial"/>
-              </a:rPr>
-              <a:t>On 118 exposed development tasks:</a:t>
-            </a:r>
-            <a:r>
-              <a:rPr sz="2460" b="0" i="0">
-                <a:solidFill>
-                  <a:srgbClr val="52514E"/>
-                </a:solidFill>
-                <a:latin typeface="Arial"/>
-              </a:rPr>
-              <a:t> </a:t>
-            </a:r>
-            <a:r>
-              <a:rPr sz="2460" b="0" i="0">
-                <a:solidFill>
-                  <a:srgbClr val="52514E"/>
-                </a:solidFill>
-                <a:latin typeface="Arial"/>
-              </a:rPr>
-              <a:t>4 correct and 1 wrong</a:t>
-            </a:r>
-          </a:p>
-        </p:txBody>
-      </p:sp>
-      <p:sp>
-        <p:nvSpPr>
-          <p:cNvPr id="95" name="TextBox 94"/>
+              <a:rPr sz="2840" b="0" i="0">
+                <a:solidFill>
+                  <a:srgbClr val="0B0B0B"/>
+                </a:solidFill>
+                <a:latin typeface="Arial"/>
+              </a:rPr>
+              <a:t>Compares alternative executable hypotheses and</a:t>
+            </a:r>
+          </a:p>
+        </p:txBody>
+      </p:sp>
+      <p:sp>
+        <p:nvSpPr>
+          <p:cNvPr id="96" name="TextBox 95"/>
           <p:cNvSpPr txBox="1"/>
           <p:nvPr/>
         </p:nvSpPr>
         <p:spPr>
           <a:xfrm>
-            <a:off x="20739735" y="27990086"/>
-            <a:ext cx="5323284" cy="312517"/>
+            <a:off x="20739735" y="22882096"/>
+            <a:ext cx="4322774" cy="360596"/>
           </a:xfrm>
           <a:prstGeom prst="rect">
             <a:avLst/>
@@ -6899,27 +6950,27 @@
           <a:lstStyle/>
           <a:p>
             <a:r>
-              <a:rPr sz="2460" b="0" i="0">
-                <a:solidFill>
-                  <a:srgbClr val="52514E"/>
-                </a:solidFill>
-                <a:latin typeface="Arial"/>
-              </a:rPr>
-              <a:t>exploratory guesses; nothing certified.</a:t>
-            </a:r>
-          </a:p>
-        </p:txBody>
-      </p:sp>
-      <p:sp>
-        <p:nvSpPr>
-          <p:cNvPr id="96" name="TextBox 95"/>
+              <a:rPr sz="2840" b="0" i="0">
+                <a:solidFill>
+                  <a:srgbClr val="0B0B0B"/>
+                </a:solidFill>
+                <a:latin typeface="Arial"/>
+              </a:rPr>
+              <a:t>records why it is uncertain.</a:t>
+            </a:r>
+          </a:p>
+        </p:txBody>
+      </p:sp>
+      <p:sp>
+        <p:nvSpPr>
+          <p:cNvPr id="97" name="TextBox 96"/>
           <p:cNvSpPr txBox="1"/>
           <p:nvPr/>
         </p:nvSpPr>
         <p:spPr>
           <a:xfrm>
-            <a:off x="20739735" y="29255755"/>
-            <a:ext cx="7533909" cy="480795"/>
+            <a:off x="20739735" y="27585196"/>
+            <a:ext cx="8226558" cy="312517"/>
           </a:xfrm>
           <a:prstGeom prst="rect">
             <a:avLst/>
@@ -6933,36 +6984,45 @@
           <a:lstStyle/>
           <a:p>
             <a:r>
-              <a:rPr sz="3790" b="1" i="0">
-                <a:solidFill>
-                  <a:srgbClr val="2A78D6"/>
-                </a:solidFill>
-                <a:latin typeface="Arial"/>
-              </a:rPr>
-              <a:t>Inventing new operations</a:t>
-            </a:r>
-            <a:r>
-              <a:rPr sz="2460" b="1" i="0">
+              <a:rPr sz="2460" b="0" i="0">
                 <a:solidFill>
                   <a:srgbClr val="52514E"/>
                 </a:solidFill>
                 <a:latin typeface="Arial"/>
               </a:rPr>
-              <a:t> [RUNNING]</a:t>
-            </a:r>
-          </a:p>
-        </p:txBody>
-      </p:sp>
-      <p:sp>
-        <p:nvSpPr>
-          <p:cNvPr id="97" name="TextBox 96"/>
+              <a:t>On 118 exposed development tasks:</a:t>
+            </a:r>
+            <a:r>
+              <a:rPr sz="2460" b="0" i="0">
+                <a:solidFill>
+                  <a:srgbClr val="52514E"/>
+                </a:solidFill>
+                <a:latin typeface="Arial"/>
+              </a:rPr>
+              <a:t> </a:t>
+            </a:r>
+            <a:r>
+              <a:rPr sz="2460" b="0" i="0">
+                <a:solidFill>
+                  <a:srgbClr val="52514E"/>
+                </a:solidFill>
+                <a:latin typeface="Arial"/>
+              </a:rPr>
+              <a:t>4 correct and 1 wrong</a:t>
+            </a:r>
+          </a:p>
+        </p:txBody>
+      </p:sp>
+      <p:sp>
+        <p:nvSpPr>
+          <p:cNvPr id="98" name="TextBox 97"/>
           <p:cNvSpPr txBox="1"/>
           <p:nvPr/>
         </p:nvSpPr>
         <p:spPr>
           <a:xfrm>
-            <a:off x="20739735" y="30441707"/>
-            <a:ext cx="7883357" cy="312774"/>
+            <a:off x="20739735" y="27990086"/>
+            <a:ext cx="5323284" cy="312517"/>
           </a:xfrm>
           <a:prstGeom prst="rect">
             <a:avLst/>
@@ -6976,36 +7036,27 @@
           <a:lstStyle/>
           <a:p>
             <a:r>
-              <a:rPr sz="2460" b="1" i="0">
-                <a:solidFill>
-                  <a:srgbClr val="0B0B0B"/>
-                </a:solidFill>
-                <a:latin typeface="Arial"/>
-              </a:rPr>
-              <a:t>Automatic rule-language extension</a:t>
-            </a:r>
-            <a:r>
               <a:rPr sz="2460" b="0" i="0">
                 <a:solidFill>
-                  <a:srgbClr val="0B0B0B"/>
-                </a:solidFill>
-                <a:latin typeface="Arial"/>
-              </a:rPr>
-              <a:t>, a separate CORA</a:t>
-            </a:r>
-          </a:p>
-        </p:txBody>
-      </p:sp>
-      <p:sp>
-        <p:nvSpPr>
-          <p:cNvPr id="98" name="TextBox 97"/>
+                  <a:srgbClr val="52514E"/>
+                </a:solidFill>
+                <a:latin typeface="Arial"/>
+              </a:rPr>
+              <a:t>exploratory guesses; nothing certified.</a:t>
+            </a:r>
+          </a:p>
+        </p:txBody>
+      </p:sp>
+      <p:sp>
+        <p:nvSpPr>
+          <p:cNvPr id="99" name="TextBox 98"/>
           <p:cNvSpPr txBox="1"/>
           <p:nvPr/>
         </p:nvSpPr>
         <p:spPr>
           <a:xfrm>
-            <a:off x="20739735" y="30846597"/>
-            <a:ext cx="7843728" cy="312517"/>
+            <a:off x="20739735" y="29255755"/>
+            <a:ext cx="7533909" cy="480795"/>
           </a:xfrm>
           <a:prstGeom prst="rect">
             <a:avLst/>
@@ -7019,45 +7070,36 @@
           <a:lstStyle/>
           <a:p>
             <a:r>
-              <a:rPr sz="2460" b="0" i="0">
-                <a:solidFill>
-                  <a:srgbClr val="0B0B0B"/>
-                </a:solidFill>
-                <a:latin typeface="Arial"/>
-              </a:rPr>
-              <a:t>experiment:</a:t>
-            </a:r>
-            <a:r>
-              <a:rPr sz="2460" b="0" i="0">
-                <a:solidFill>
-                  <a:srgbClr val="0B0B0B"/>
-                </a:solidFill>
-                <a:latin typeface="Arial"/>
-              </a:rPr>
-              <a:t> </a:t>
-            </a:r>
-            <a:r>
-              <a:rPr sz="2460" b="0" i="0">
-                <a:solidFill>
-                  <a:srgbClr val="0B0B0B"/>
-                </a:solidFill>
-                <a:latin typeface="Arial"/>
-              </a:rPr>
-              <a:t>can a system build new reusable operations</a:t>
-            </a:r>
-          </a:p>
-        </p:txBody>
-      </p:sp>
-      <p:sp>
-        <p:nvSpPr>
-          <p:cNvPr id="99" name="TextBox 98"/>
+              <a:rPr sz="3790" b="1" i="0">
+                <a:solidFill>
+                  <a:srgbClr val="2A78D6"/>
+                </a:solidFill>
+                <a:latin typeface="Arial"/>
+              </a:rPr>
+              <a:t>Inventing new operations</a:t>
+            </a:r>
+            <a:r>
+              <a:rPr sz="2460" b="1" i="0">
+                <a:solidFill>
+                  <a:srgbClr val="52514E"/>
+                </a:solidFill>
+                <a:latin typeface="Arial"/>
+              </a:rPr>
+              <a:t> [RUNNING]</a:t>
+            </a:r>
+          </a:p>
+        </p:txBody>
+      </p:sp>
+      <p:sp>
+        <p:nvSpPr>
+          <p:cNvPr id="100" name="TextBox 99"/>
           <p:cNvSpPr txBox="1"/>
           <p:nvPr/>
         </p:nvSpPr>
         <p:spPr>
           <a:xfrm>
-            <a:off x="20739735" y="31251472"/>
-            <a:ext cx="7628095" cy="312517"/>
+            <a:off x="20739735" y="30441707"/>
+            <a:ext cx="7883357" cy="312774"/>
           </a:xfrm>
           <a:prstGeom prst="rect">
             <a:avLst/>
@@ -7071,45 +7113,36 @@
           <a:lstStyle/>
           <a:p>
             <a:r>
+              <a:rPr sz="2460" b="1" i="0">
+                <a:solidFill>
+                  <a:srgbClr val="0B0B0B"/>
+                </a:solidFill>
+                <a:latin typeface="Arial"/>
+              </a:rPr>
+              <a:t>Automatic rule-language extension</a:t>
+            </a:r>
+            <a:r>
               <a:rPr sz="2460" b="0" i="0">
                 <a:solidFill>
                   <a:srgbClr val="0B0B0B"/>
                 </a:solidFill>
                 <a:latin typeface="Arial"/>
               </a:rPr>
-              <a:t>itself?</a:t>
-            </a:r>
-            <a:r>
-              <a:rPr sz="2460" b="0" i="0">
-                <a:solidFill>
-                  <a:srgbClr val="0B0B0B"/>
-                </a:solidFill>
-                <a:latin typeface="Arial"/>
-              </a:rPr>
-              <a:t> </a:t>
-            </a:r>
-            <a:r>
-              <a:rPr sz="2460" b="0" i="0">
-                <a:solidFill>
-                  <a:srgbClr val="0B0B0B"/>
-                </a:solidFill>
-                <a:latin typeface="Arial"/>
-              </a:rPr>
-              <a:t>475 of 497 proposal units done (19 October); no</a:t>
-            </a:r>
-          </a:p>
-        </p:txBody>
-      </p:sp>
-      <p:sp>
-        <p:nvSpPr>
-          <p:cNvPr id="100" name="TextBox 99"/>
+              <a:t>, a separate CORA</a:t>
+            </a:r>
+          </a:p>
+        </p:txBody>
+      </p:sp>
+      <p:sp>
+        <p:nvSpPr>
+          <p:cNvPr id="101" name="TextBox 100"/>
           <p:cNvSpPr txBox="1"/>
           <p:nvPr/>
         </p:nvSpPr>
         <p:spPr>
           <a:xfrm>
-            <a:off x="20739735" y="31656359"/>
-            <a:ext cx="6837737" cy="312517"/>
+            <a:off x="20739735" y="30846597"/>
+            <a:ext cx="7843728" cy="312517"/>
           </a:xfrm>
           <a:prstGeom prst="rect">
             <a:avLst/>
@@ -7129,21 +7162,39 @@
                 </a:solidFill>
                 <a:latin typeface="Arial"/>
               </a:rPr>
-              <a:t>verdict; not part of CORA-v2 or any Kaggle entry.</a:t>
-            </a:r>
-          </a:p>
-        </p:txBody>
-      </p:sp>
-      <p:sp>
-        <p:nvSpPr>
-          <p:cNvPr id="101" name="TextBox 100"/>
+              <a:t>experiment:</a:t>
+            </a:r>
+            <a:r>
+              <a:rPr sz="2460" b="0" i="0">
+                <a:solidFill>
+                  <a:srgbClr val="0B0B0B"/>
+                </a:solidFill>
+                <a:latin typeface="Arial"/>
+              </a:rPr>
+              <a:t> </a:t>
+            </a:r>
+            <a:r>
+              <a:rPr sz="2460" b="0" i="0">
+                <a:solidFill>
+                  <a:srgbClr val="0B0B0B"/>
+                </a:solidFill>
+                <a:latin typeface="Arial"/>
+              </a:rPr>
+              <a:t>can a system build new reusable operations</a:t>
+            </a:r>
+          </a:p>
+        </p:txBody>
+      </p:sp>
+      <p:sp>
+        <p:nvSpPr>
+          <p:cNvPr id="102" name="TextBox 101"/>
           <p:cNvSpPr txBox="1"/>
           <p:nvPr/>
         </p:nvSpPr>
         <p:spPr>
           <a:xfrm>
-            <a:off x="20739735" y="32922030"/>
-            <a:ext cx="8571622" cy="480795"/>
+            <a:off x="20739735" y="31251472"/>
+            <a:ext cx="7628095" cy="312517"/>
           </a:xfrm>
           <a:prstGeom prst="rect">
             <a:avLst/>
@@ -7157,36 +7208,45 @@
           <a:lstStyle/>
           <a:p>
             <a:r>
-              <a:rPr sz="3790" b="1" i="0">
-                <a:solidFill>
-                  <a:srgbClr val="2A78D6"/>
-                </a:solidFill>
-                <a:latin typeface="Arial"/>
-              </a:rPr>
-              <a:t>From ARC to science</a:t>
-            </a:r>
-            <a:r>
-              <a:rPr sz="2460" b="1" i="0">
-                <a:solidFill>
-                  <a:srgbClr val="D03B3B"/>
-                </a:solidFill>
-                <a:latin typeface="Arial"/>
-              </a:rPr>
-              <a:t> [FUTURE, NOT TESTED]</a:t>
-            </a:r>
-          </a:p>
-        </p:txBody>
-      </p:sp>
-      <p:sp>
-        <p:nvSpPr>
-          <p:cNvPr id="102" name="TextBox 101"/>
+              <a:rPr sz="2460" b="0" i="0">
+                <a:solidFill>
+                  <a:srgbClr val="0B0B0B"/>
+                </a:solidFill>
+                <a:latin typeface="Arial"/>
+              </a:rPr>
+              <a:t>itself?</a:t>
+            </a:r>
+            <a:r>
+              <a:rPr sz="2460" b="0" i="0">
+                <a:solidFill>
+                  <a:srgbClr val="0B0B0B"/>
+                </a:solidFill>
+                <a:latin typeface="Arial"/>
+              </a:rPr>
+              <a:t> </a:t>
+            </a:r>
+            <a:r>
+              <a:rPr sz="2460" b="0" i="0">
+                <a:solidFill>
+                  <a:srgbClr val="0B0B0B"/>
+                </a:solidFill>
+                <a:latin typeface="Arial"/>
+              </a:rPr>
+              <a:t>475 of 497 proposal units done (19 October); no</a:t>
+            </a:r>
+          </a:p>
+        </p:txBody>
+      </p:sp>
+      <p:sp>
+        <p:nvSpPr>
+          <p:cNvPr id="103" name="TextBox 102"/>
           <p:cNvSpPr txBox="1"/>
           <p:nvPr/>
         </p:nvSpPr>
         <p:spPr>
           <a:xfrm>
-            <a:off x="20739735" y="36269038"/>
-            <a:ext cx="7869132" cy="322067"/>
+            <a:off x="20739735" y="31656359"/>
+            <a:ext cx="6837737" cy="312517"/>
           </a:xfrm>
           <a:prstGeom prst="rect">
             <a:avLst/>
@@ -7206,66 +7266,21 @@
                 </a:solidFill>
                 <a:latin typeface="Arial"/>
               </a:rPr>
-              <a:t>Proteins</a:t>
-            </a:r>
-            <a:r>
-              <a:rPr sz="2480" b="0" i="1">
-                <a:solidFill>
-                  <a:srgbClr val="0B0B0B"/>
-                </a:solidFill>
-                <a:latin typeface="Arial"/>
-              </a:rPr>
-              <a:t> ·</a:t>
-            </a:r>
-            <a:r>
-              <a:rPr sz="2460" b="0" i="0">
-                <a:solidFill>
-                  <a:srgbClr val="0B0B0B"/>
-                </a:solidFill>
-                <a:latin typeface="Arial"/>
-              </a:rPr>
-              <a:t> single-cell and omics data</a:t>
-            </a:r>
-            <a:r>
-              <a:rPr sz="2480" b="0" i="1">
-                <a:solidFill>
-                  <a:srgbClr val="0B0B0B"/>
-                </a:solidFill>
-                <a:latin typeface="Arial"/>
-              </a:rPr>
-              <a:t> ·</a:t>
-            </a:r>
-            <a:r>
-              <a:rPr sz="2460" b="0" i="0">
-                <a:solidFill>
-                  <a:srgbClr val="0B0B0B"/>
-                </a:solidFill>
-                <a:latin typeface="Arial"/>
-              </a:rPr>
-              <a:t> plant phenotypes</a:t>
-            </a:r>
-            <a:r>
-              <a:rPr sz="2480" b="0" i="1">
-                <a:solidFill>
-                  <a:srgbClr val="0B0B0B"/>
-                </a:solidFill>
-                <a:latin typeface="Arial"/>
-              </a:rPr>
-              <a:t> ·</a:t>
-            </a:r>
-          </a:p>
-        </p:txBody>
-      </p:sp>
-      <p:sp>
-        <p:nvSpPr>
-          <p:cNvPr id="103" name="TextBox 102"/>
+              <a:t>verdict; not part of CORA-v2 or any Kaggle entry.</a:t>
+            </a:r>
+          </a:p>
+        </p:txBody>
+      </p:sp>
+      <p:sp>
+        <p:nvSpPr>
+          <p:cNvPr id="104" name="TextBox 103"/>
           <p:cNvSpPr txBox="1"/>
           <p:nvPr/>
         </p:nvSpPr>
         <p:spPr>
           <a:xfrm>
-            <a:off x="20739732" y="36683466"/>
-            <a:ext cx="8136858" cy="312517"/>
+            <a:off x="20739735" y="32922030"/>
+            <a:ext cx="8571622" cy="480795"/>
           </a:xfrm>
           <a:prstGeom prst="rect">
             <a:avLst/>
@@ -7279,27 +7294,36 @@
           <a:lstStyle/>
           <a:p>
             <a:r>
-              <a:rPr sz="2460" b="0" i="0">
-                <a:solidFill>
-                  <a:srgbClr val="0B0B0B"/>
-                </a:solidFill>
-                <a:latin typeface="Arial"/>
-              </a:rPr>
-              <a:t>pathways suggested by maize lesion mimics, checked with</a:t>
-            </a:r>
-          </a:p>
-        </p:txBody>
-      </p:sp>
-      <p:sp>
-        <p:nvSpPr>
-          <p:cNvPr id="104" name="TextBox 103"/>
+              <a:rPr sz="3790" b="1" i="0">
+                <a:solidFill>
+                  <a:srgbClr val="2A78D6"/>
+                </a:solidFill>
+                <a:latin typeface="Arial"/>
+              </a:rPr>
+              <a:t>From ARC to science</a:t>
+            </a:r>
+            <a:r>
+              <a:rPr sz="2460" b="1" i="0">
+                <a:solidFill>
+                  <a:srgbClr val="D03B3B"/>
+                </a:solidFill>
+                <a:latin typeface="Arial"/>
+              </a:rPr>
+              <a:t> [FUTURE, NOT TESTED]</a:t>
+            </a:r>
+          </a:p>
+        </p:txBody>
+      </p:sp>
+      <p:sp>
+        <p:nvSpPr>
+          <p:cNvPr id="105" name="TextBox 104"/>
           <p:cNvSpPr txBox="1"/>
           <p:nvPr/>
         </p:nvSpPr>
         <p:spPr>
           <a:xfrm>
-            <a:off x="20739732" y="37088356"/>
-            <a:ext cx="8585634" cy="312517"/>
+            <a:off x="20739735" y="36269038"/>
+            <a:ext cx="7869132" cy="322067"/>
           </a:xfrm>
           <a:prstGeom prst="rect">
             <a:avLst/>
@@ -7319,7 +7343,16 @@
                 </a:solidFill>
                 <a:latin typeface="Arial"/>
               </a:rPr>
-              <a:t>molecular or perturbation evidence.</a:t>
+              <a:t>Proteins</a:t>
+            </a:r>
+            <a:r>
+              <a:rPr sz="2480" b="0" i="1">
+                <a:solidFill>
+                  <a:srgbClr val="0B0B0B"/>
+                </a:solidFill>
+                <a:latin typeface="Arial"/>
+              </a:rPr>
+              <a:t> ·</a:t>
             </a:r>
             <a:r>
               <a:rPr sz="2460" b="0" i="0">
@@ -7328,7 +7361,16 @@
                 </a:solidFill>
                 <a:latin typeface="Arial"/>
               </a:rPr>
-              <a:t> </a:t>
+              <a:t> single-cell and omics data</a:t>
+            </a:r>
+            <a:r>
+              <a:rPr sz="2480" b="0" i="1">
+                <a:solidFill>
+                  <a:srgbClr val="0B0B0B"/>
+                </a:solidFill>
+                <a:latin typeface="Arial"/>
+              </a:rPr>
+              <a:t> ·</a:t>
             </a:r>
             <a:r>
               <a:rPr sz="2460" b="0" i="0">
@@ -7337,21 +7379,30 @@
                 </a:solidFill>
                 <a:latin typeface="Arial"/>
               </a:rPr>
-              <a:t>What could transfer is the</a:t>
-            </a:r>
-          </a:p>
-        </p:txBody>
-      </p:sp>
-      <p:sp>
-        <p:nvSpPr>
-          <p:cNvPr id="105" name="TextBox 104"/>
+              <a:t> plant phenotypes</a:t>
+            </a:r>
+            <a:r>
+              <a:rPr sz="2480" b="0" i="1">
+                <a:solidFill>
+                  <a:srgbClr val="0B0B0B"/>
+                </a:solidFill>
+                <a:latin typeface="Arial"/>
+              </a:rPr>
+              <a:t> ·</a:t>
+            </a:r>
+          </a:p>
+        </p:txBody>
+      </p:sp>
+      <p:sp>
+        <p:nvSpPr>
+          <p:cNvPr id="106" name="TextBox 105"/>
           <p:cNvSpPr txBox="1"/>
           <p:nvPr/>
         </p:nvSpPr>
         <p:spPr>
           <a:xfrm>
-            <a:off x="20739732" y="37493230"/>
-            <a:ext cx="4952324" cy="312517"/>
+            <a:off x="20739732" y="36683466"/>
+            <a:ext cx="8136858" cy="312517"/>
           </a:xfrm>
           <a:prstGeom prst="rect">
             <a:avLst/>
@@ -7371,21 +7422,21 @@
                 </a:solidFill>
                 <a:latin typeface="Arial"/>
               </a:rPr>
-              <a:t>revision policy, not ARC operations.</a:t>
-            </a:r>
-          </a:p>
-        </p:txBody>
-      </p:sp>
-      <p:sp>
-        <p:nvSpPr>
-          <p:cNvPr id="106" name="TextBox 105"/>
+              <a:t>pathways suggested by maize lesion mimics, checked with</a:t>
+            </a:r>
+          </a:p>
+        </p:txBody>
+      </p:sp>
+      <p:sp>
+        <p:nvSpPr>
+          <p:cNvPr id="107" name="TextBox 106"/>
           <p:cNvSpPr txBox="1"/>
           <p:nvPr/>
         </p:nvSpPr>
         <p:spPr>
           <a:xfrm>
-            <a:off x="1058151" y="38983412"/>
-            <a:ext cx="17381508" cy="528876"/>
+            <a:off x="20739732" y="37088356"/>
+            <a:ext cx="8585634" cy="312517"/>
           </a:xfrm>
           <a:prstGeom prst="rect">
             <a:avLst/>
@@ -7399,27 +7450,45 @@
           <a:lstStyle/>
           <a:p>
             <a:r>
-              <a:rPr sz="4160" b="1" i="0">
-                <a:solidFill>
-                  <a:srgbClr val="0B0B0B"/>
-                </a:solidFill>
-                <a:latin typeface="Arial"/>
-              </a:rPr>
-              <a:t>Building a rule is not the same as learning which revision improves an</a:t>
-            </a:r>
-          </a:p>
-        </p:txBody>
-      </p:sp>
-      <p:sp>
-        <p:nvSpPr>
-          <p:cNvPr id="107" name="TextBox 106"/>
+              <a:rPr sz="2460" b="0" i="0">
+                <a:solidFill>
+                  <a:srgbClr val="0B0B0B"/>
+                </a:solidFill>
+                <a:latin typeface="Arial"/>
+              </a:rPr>
+              <a:t>molecular or perturbation evidence.</a:t>
+            </a:r>
+            <a:r>
+              <a:rPr sz="2460" b="0" i="0">
+                <a:solidFill>
+                  <a:srgbClr val="0B0B0B"/>
+                </a:solidFill>
+                <a:latin typeface="Arial"/>
+              </a:rPr>
+              <a:t> </a:t>
+            </a:r>
+            <a:r>
+              <a:rPr sz="2460" b="0" i="0">
+                <a:solidFill>
+                  <a:srgbClr val="0B0B0B"/>
+                </a:solidFill>
+                <a:latin typeface="Arial"/>
+              </a:rPr>
+              <a:t>What could transfer is the</a:t>
+            </a:r>
+          </a:p>
+        </p:txBody>
+      </p:sp>
+      <p:sp>
+        <p:nvSpPr>
+          <p:cNvPr id="108" name="TextBox 107"/>
           <p:cNvSpPr txBox="1"/>
           <p:nvPr/>
         </p:nvSpPr>
         <p:spPr>
           <a:xfrm>
-            <a:off x="1058151" y="39499551"/>
-            <a:ext cx="13065356" cy="528876"/>
+            <a:off x="20739732" y="37493230"/>
+            <a:ext cx="4952324" cy="312517"/>
           </a:xfrm>
           <a:prstGeom prst="rect">
             <a:avLst/>
@@ -7433,45 +7502,27 @@
           <a:lstStyle/>
           <a:p>
             <a:r>
-              <a:rPr sz="4160" b="1" i="0">
-                <a:solidFill>
-                  <a:srgbClr val="0B0B0B"/>
-                </a:solidFill>
-                <a:latin typeface="Arial"/>
-              </a:rPr>
-              <a:t>unseen prediction.</a:t>
-            </a:r>
-            <a:r>
-              <a:rPr sz="4160" b="1" i="0">
-                <a:solidFill>
-                  <a:srgbClr val="0B0B0B"/>
-                </a:solidFill>
-                <a:latin typeface="Arial"/>
-              </a:rPr>
-              <a:t> </a:t>
-            </a:r>
-            <a:r>
-              <a:rPr sz="4160" b="1" i="0">
-                <a:solidFill>
-                  <a:srgbClr val="0B0B0B"/>
-                </a:solidFill>
-                <a:latin typeface="Arial"/>
-              </a:rPr>
-              <a:t>That is what we are trying to test.</a:t>
-            </a:r>
-          </a:p>
-        </p:txBody>
-      </p:sp>
-      <p:sp>
-        <p:nvSpPr>
-          <p:cNvPr id="108" name="TextBox 107"/>
+              <a:rPr sz="2460" b="0" i="0">
+                <a:solidFill>
+                  <a:srgbClr val="0B0B0B"/>
+                </a:solidFill>
+                <a:latin typeface="Arial"/>
+              </a:rPr>
+              <a:t>revision policy, not ARC operations.</a:t>
+            </a:r>
+          </a:p>
+        </p:txBody>
+      </p:sp>
+      <p:sp>
+        <p:nvSpPr>
+          <p:cNvPr id="109" name="TextBox 108"/>
           <p:cNvSpPr txBox="1"/>
           <p:nvPr/>
         </p:nvSpPr>
         <p:spPr>
           <a:xfrm>
-            <a:off x="9571444" y="40453955"/>
-            <a:ext cx="5553286" cy="312517"/>
+            <a:off x="1058151" y="38983412"/>
+            <a:ext cx="17381508" cy="528876"/>
           </a:xfrm>
           <a:prstGeom prst="rect">
             <a:avLst/>
@@ -7485,45 +7536,27 @@
           <a:lstStyle/>
           <a:p>
             <a:r>
-              <a:rPr sz="2460" b="0" i="0">
-                <a:solidFill>
-                  <a:srgbClr val="0CA30C"/>
-                </a:solidFill>
-                <a:latin typeface="Arial"/>
-              </a:rPr>
-              <a:t>[DONE]</a:t>
-            </a:r>
-            <a:r>
-              <a:rPr sz="2460" b="0" i="0">
-                <a:solidFill>
-                  <a:srgbClr val="D03B3B"/>
-                </a:solidFill>
-                <a:latin typeface="Arial"/>
-              </a:rPr>
-              <a:t> [NEGATIVE]</a:t>
-            </a:r>
-            <a:r>
-              <a:rPr sz="2460" b="0" i="0">
-                <a:solidFill>
-                  <a:srgbClr val="EB6834"/>
-                </a:solidFill>
-                <a:latin typeface="Arial"/>
-              </a:rPr>
-              <a:t> [DEVELOPMENT]</a:t>
-            </a:r>
-          </a:p>
-        </p:txBody>
-      </p:sp>
-      <p:sp>
-        <p:nvSpPr>
-          <p:cNvPr id="109" name="TextBox 108"/>
+              <a:rPr sz="4160" b="1" i="0">
+                <a:solidFill>
+                  <a:srgbClr val="0B0B0B"/>
+                </a:solidFill>
+                <a:latin typeface="Arial"/>
+              </a:rPr>
+              <a:t>Building a rule is not the same as learning which revision improves an</a:t>
+            </a:r>
+          </a:p>
+        </p:txBody>
+      </p:sp>
+      <p:sp>
+        <p:nvSpPr>
+          <p:cNvPr id="110" name="TextBox 109"/>
           <p:cNvSpPr txBox="1"/>
           <p:nvPr/>
         </p:nvSpPr>
         <p:spPr>
           <a:xfrm>
-            <a:off x="9571444" y="40858833"/>
-            <a:ext cx="5338896" cy="312517"/>
+            <a:off x="1058151" y="39499551"/>
+            <a:ext cx="13065356" cy="528876"/>
           </a:xfrm>
           <a:prstGeom prst="rect">
             <a:avLst/>
@@ -7537,36 +7570,45 @@
           <a:lstStyle/>
           <a:p>
             <a:r>
-              <a:rPr sz="2460" b="0" i="0">
-                <a:solidFill>
-                  <a:srgbClr val="52514E"/>
-                </a:solidFill>
-                <a:latin typeface="Arial"/>
-              </a:rPr>
-              <a:t>[RUNNING]</a:t>
-            </a:r>
-            <a:r>
-              <a:rPr sz="2460" b="0" i="0">
-                <a:solidFill>
-                  <a:srgbClr val="D03B3B"/>
-                </a:solidFill>
-                <a:latin typeface="Arial"/>
-              </a:rPr>
-              <a:t> [FUTURE, NOT TESTED]</a:t>
-            </a:r>
-          </a:p>
-        </p:txBody>
-      </p:sp>
-      <p:sp>
-        <p:nvSpPr>
-          <p:cNvPr id="110" name="TextBox 109"/>
+              <a:rPr sz="4160" b="1" i="0">
+                <a:solidFill>
+                  <a:srgbClr val="0B0B0B"/>
+                </a:solidFill>
+                <a:latin typeface="Arial"/>
+              </a:rPr>
+              <a:t>unseen prediction.</a:t>
+            </a:r>
+            <a:r>
+              <a:rPr sz="4160" b="1" i="0">
+                <a:solidFill>
+                  <a:srgbClr val="0B0B0B"/>
+                </a:solidFill>
+                <a:latin typeface="Arial"/>
+              </a:rPr>
+              <a:t> </a:t>
+            </a:r>
+            <a:r>
+              <a:rPr sz="4160" b="1" i="0">
+                <a:solidFill>
+                  <a:srgbClr val="0B0B0B"/>
+                </a:solidFill>
+                <a:latin typeface="Arial"/>
+              </a:rPr>
+              <a:t>That is what we are trying to test.</a:t>
+            </a:r>
+          </a:p>
+        </p:txBody>
+      </p:sp>
+      <p:sp>
+        <p:nvSpPr>
+          <p:cNvPr id="111" name="TextBox 110"/>
           <p:cNvSpPr txBox="1"/>
           <p:nvPr/>
         </p:nvSpPr>
         <p:spPr>
           <a:xfrm>
-            <a:off x="19529945" y="38926172"/>
-            <a:ext cx="7730294" cy="288714"/>
+            <a:off x="9571444" y="40453955"/>
+            <a:ext cx="5553286" cy="312517"/>
           </a:xfrm>
           <a:prstGeom prst="rect">
             <a:avLst/>
@@ -7580,162 +7622,45 @@
           <a:lstStyle/>
           <a:p>
             <a:r>
-              <a:rPr sz="2270" b="1" i="0">
-                <a:solidFill>
-                  <a:srgbClr val="0B0B0B"/>
-                </a:solidFill>
-                <a:latin typeface="Arial"/>
-              </a:rPr>
-              <a:t>Two</a:t>
-            </a:r>
-            <a:r>
-              <a:rPr sz="2270" b="1" i="0">
-                <a:solidFill>
-                  <a:srgbClr val="0B0B0B"/>
-                </a:solidFill>
-                <a:latin typeface="Arial"/>
-              </a:rPr>
-              <a:t> </a:t>
-            </a:r>
-            <a:r>
-              <a:rPr sz="2270" b="1" i="0">
-                <a:solidFill>
-                  <a:srgbClr val="0B0B0B"/>
-                </a:solidFill>
-                <a:latin typeface="Arial"/>
-              </a:rPr>
-              <a:t>approaches</a:t>
-            </a:r>
-            <a:r>
-              <a:rPr sz="2270" b="1" i="0">
-                <a:solidFill>
-                  <a:srgbClr val="0B0B0B"/>
-                </a:solidFill>
-                <a:latin typeface="Arial"/>
-              </a:rPr>
-              <a:t> </a:t>
-            </a:r>
-            <a:r>
-              <a:rPr sz="2270" b="1" i="0">
-                <a:solidFill>
-                  <a:srgbClr val="0B0B0B"/>
-                </a:solidFill>
-                <a:latin typeface="Arial"/>
-              </a:rPr>
-              <a:t>to</a:t>
-            </a:r>
-            <a:r>
-              <a:rPr sz="2270" b="1" i="0">
-                <a:solidFill>
-                  <a:srgbClr val="0B0B0B"/>
-                </a:solidFill>
-                <a:latin typeface="Arial"/>
-              </a:rPr>
-              <a:t> </a:t>
-            </a:r>
-            <a:r>
-              <a:rPr sz="2270" b="1" i="0">
-                <a:solidFill>
-                  <a:srgbClr val="0B0B0B"/>
-                </a:solidFill>
-                <a:latin typeface="Arial"/>
-              </a:rPr>
-              <a:t>ARC</a:t>
-            </a:r>
-            <a:r>
-              <a:rPr sz="2270" b="0" i="0">
-                <a:solidFill>
-                  <a:srgbClr val="0B0B0B"/>
-                </a:solidFill>
-                <a:latin typeface="Arial"/>
-              </a:rPr>
-              <a:t>,</a:t>
-            </a:r>
-            <a:r>
-              <a:rPr sz="2270" b="0" i="0">
-                <a:solidFill>
-                  <a:srgbClr val="0B0B0B"/>
-                </a:solidFill>
-                <a:latin typeface="Arial"/>
-              </a:rPr>
-              <a:t> </a:t>
-            </a:r>
-            <a:r>
-              <a:rPr sz="2270" b="0" i="0">
-                <a:solidFill>
-                  <a:srgbClr val="0B0B0B"/>
-                </a:solidFill>
-                <a:latin typeface="Arial"/>
-              </a:rPr>
-              <a:t>official</a:t>
-            </a:r>
-            <a:r>
-              <a:rPr sz="2270" b="0" i="0">
-                <a:solidFill>
-                  <a:srgbClr val="0B0B0B"/>
-                </a:solidFill>
-                <a:latin typeface="Arial"/>
-              </a:rPr>
-              <a:t> </a:t>
-            </a:r>
-            <a:r>
-              <a:rPr sz="2270" b="0" i="0">
-                <a:solidFill>
-                  <a:srgbClr val="0B0B0B"/>
-                </a:solidFill>
-                <a:latin typeface="Arial"/>
-              </a:rPr>
-              <a:t>public</a:t>
-            </a:r>
-            <a:r>
-              <a:rPr sz="2270" b="0" i="0">
-                <a:solidFill>
-                  <a:srgbClr val="0B0B0B"/>
-                </a:solidFill>
-                <a:latin typeface="Arial"/>
-              </a:rPr>
-              <a:t> </a:t>
-            </a:r>
-            <a:r>
-              <a:rPr sz="2270" b="0" i="0">
-                <a:solidFill>
-                  <a:srgbClr val="0B0B0B"/>
-                </a:solidFill>
-                <a:latin typeface="Arial"/>
-              </a:rPr>
-              <a:t>ARC-AGI-2</a:t>
-            </a:r>
-            <a:r>
-              <a:rPr sz="2270" b="0" i="0">
-                <a:solidFill>
-                  <a:srgbClr val="0B0B0B"/>
-                </a:solidFill>
-                <a:latin typeface="Arial"/>
-              </a:rPr>
-              <a:t> </a:t>
-            </a:r>
-            <a:r>
-              <a:rPr sz="2270" b="0" i="0">
-                <a:solidFill>
-                  <a:srgbClr val="0B0B0B"/>
-                </a:solidFill>
-                <a:latin typeface="Arial"/>
-              </a:rPr>
-              <a:t>scores</a:t>
-            </a:r>
-          </a:p>
-        </p:txBody>
-      </p:sp>
-      <p:sp>
-        <p:nvSpPr>
-          <p:cNvPr id="111" name="TextBox 110"/>
+              <a:rPr sz="2460" b="0" i="0">
+                <a:solidFill>
+                  <a:srgbClr val="0CA30C"/>
+                </a:solidFill>
+                <a:latin typeface="Arial"/>
+              </a:rPr>
+              <a:t>[DONE]</a:t>
+            </a:r>
+            <a:r>
+              <a:rPr sz="2460" b="0" i="0">
+                <a:solidFill>
+                  <a:srgbClr val="D03B3B"/>
+                </a:solidFill>
+                <a:latin typeface="Arial"/>
+              </a:rPr>
+              <a:t> [NEGATIVE]</a:t>
+            </a:r>
+            <a:r>
+              <a:rPr sz="2460" b="0" i="0">
+                <a:solidFill>
+                  <a:srgbClr val="EB6834"/>
+                </a:solidFill>
+                <a:latin typeface="Arial"/>
+              </a:rPr>
+              <a:t> [DEVELOPMENT]</a:t>
+            </a:r>
+          </a:p>
+        </p:txBody>
+      </p:sp>
+      <p:sp>
+        <p:nvSpPr>
+          <p:cNvPr id="112" name="TextBox 111"/>
           <p:cNvSpPr txBox="1"/>
           <p:nvPr/>
         </p:nvSpPr>
         <p:spPr>
           <a:xfrm>
-            <a:off x="19529945" y="39314332"/>
-            <a:ext cx="3906868" cy="288475"/>
+            <a:off x="9571444" y="40858833"/>
+            <a:ext cx="5338896" cy="312517"/>
           </a:xfrm>
           <a:prstGeom prst="rect">
             <a:avLst/>
@@ -7749,81 +7674,36 @@
           <a:lstStyle/>
           <a:p>
             <a:r>
-              <a:rPr sz="2270" b="1" i="0">
-                <a:solidFill>
-                  <a:srgbClr val="0B0B0B"/>
-                </a:solidFill>
-                <a:latin typeface="Arial"/>
-              </a:rPr>
-              <a:t>NVARC</a:t>
-            </a:r>
-            <a:r>
-              <a:rPr sz="2270" b="1" i="0">
-                <a:solidFill>
-                  <a:srgbClr val="0B0B0B"/>
-                </a:solidFill>
-                <a:latin typeface="Arial"/>
-              </a:rPr>
-              <a:t> </a:t>
-            </a:r>
-            <a:r>
-              <a:rPr sz="2270" b="1" i="0">
-                <a:solidFill>
-                  <a:srgbClr val="0B0B0B"/>
-                </a:solidFill>
-                <a:latin typeface="Arial"/>
-              </a:rPr>
-              <a:t>/</a:t>
-            </a:r>
-            <a:r>
-              <a:rPr sz="2270" b="1" i="0">
-                <a:solidFill>
-                  <a:srgbClr val="0B0B0B"/>
-                </a:solidFill>
-                <a:latin typeface="Arial"/>
-              </a:rPr>
-              <a:t> </a:t>
-            </a:r>
-            <a:r>
-              <a:rPr sz="2270" b="1" i="0">
-                <a:solidFill>
-                  <a:srgbClr val="0B0B0B"/>
-                </a:solidFill>
-                <a:latin typeface="Arial"/>
-              </a:rPr>
-              <a:t>Qwen3-4B:</a:t>
-            </a:r>
-            <a:r>
-              <a:rPr sz="2270" b="1" i="0">
-                <a:solidFill>
-                  <a:srgbClr val="0B0B0B"/>
-                </a:solidFill>
-                <a:latin typeface="Arial"/>
-              </a:rPr>
-              <a:t> </a:t>
-            </a:r>
-            <a:r>
-              <a:rPr sz="2270" b="1" i="0">
-                <a:solidFill>
-                  <a:srgbClr val="0B0B0B"/>
-                </a:solidFill>
-                <a:latin typeface="Arial"/>
-              </a:rPr>
-              <a:t>27.64%</a:t>
-            </a:r>
-          </a:p>
-        </p:txBody>
-      </p:sp>
-      <p:sp>
-        <p:nvSpPr>
-          <p:cNvPr id="112" name="TextBox 111"/>
+              <a:rPr sz="2460" b="0" i="0">
+                <a:solidFill>
+                  <a:srgbClr val="52514E"/>
+                </a:solidFill>
+                <a:latin typeface="Arial"/>
+              </a:rPr>
+              <a:t>[RUNNING]</a:t>
+            </a:r>
+            <a:r>
+              <a:rPr sz="2460" b="0" i="0">
+                <a:solidFill>
+                  <a:srgbClr val="D03B3B"/>
+                </a:solidFill>
+                <a:latin typeface="Arial"/>
+              </a:rPr>
+              <a:t> [FUTURE, NOT TESTED]</a:t>
+            </a:r>
+          </a:p>
+        </p:txBody>
+      </p:sp>
+      <p:sp>
+        <p:nvSpPr>
+          <p:cNvPr id="113" name="TextBox 112"/>
           <p:cNvSpPr txBox="1"/>
           <p:nvPr/>
         </p:nvSpPr>
         <p:spPr>
           <a:xfrm>
-            <a:off x="24073742" y="39314093"/>
-            <a:ext cx="4154565" cy="288714"/>
+            <a:off x="19529945" y="38926172"/>
+            <a:ext cx="7730294" cy="288714"/>
           </a:xfrm>
           <a:prstGeom prst="rect">
             <a:avLst/>
@@ -7843,7 +7723,7 @@
                 </a:solidFill>
                 <a:latin typeface="Arial"/>
               </a:rPr>
-              <a:t>CORA:</a:t>
+              <a:t>Two</a:t>
             </a:r>
             <a:r>
               <a:rPr sz="2270" b="1" i="0">
@@ -7861,7 +7741,43 @@
                 </a:solidFill>
                 <a:latin typeface="Arial"/>
               </a:rPr>
-              <a:t>0.00%</a:t>
+              <a:t>approaches</a:t>
+            </a:r>
+            <a:r>
+              <a:rPr sz="2270" b="1" i="0">
+                <a:solidFill>
+                  <a:srgbClr val="0B0B0B"/>
+                </a:solidFill>
+                <a:latin typeface="Arial"/>
+              </a:rPr>
+              <a:t> </a:t>
+            </a:r>
+            <a:r>
+              <a:rPr sz="2270" b="1" i="0">
+                <a:solidFill>
+                  <a:srgbClr val="0B0B0B"/>
+                </a:solidFill>
+                <a:latin typeface="Arial"/>
+              </a:rPr>
+              <a:t>to</a:t>
+            </a:r>
+            <a:r>
+              <a:rPr sz="2270" b="1" i="0">
+                <a:solidFill>
+                  <a:srgbClr val="0B0B0B"/>
+                </a:solidFill>
+                <a:latin typeface="Arial"/>
+              </a:rPr>
+              <a:t> </a:t>
+            </a:r>
+            <a:r>
+              <a:rPr sz="2270" b="1" i="0">
+                <a:solidFill>
+                  <a:srgbClr val="0B0B0B"/>
+                </a:solidFill>
+                <a:latin typeface="Arial"/>
+              </a:rPr>
+              <a:t>ARC</a:t>
             </a:r>
             <a:r>
               <a:rPr sz="2270" b="0" i="0">
@@ -7870,6 +7786,15 @@
                 </a:solidFill>
                 <a:latin typeface="Arial"/>
               </a:rPr>
+              <a:t>,</a:t>
+            </a:r>
+            <a:r>
+              <a:rPr sz="2270" b="0" i="0">
+                <a:solidFill>
+                  <a:srgbClr val="0B0B0B"/>
+                </a:solidFill>
+                <a:latin typeface="Arial"/>
+              </a:rPr>
               <a:t> </a:t>
             </a:r>
             <a:r>
@@ -7879,7 +7804,7 @@
                 </a:solidFill>
                 <a:latin typeface="Arial"/>
               </a:rPr>
-              <a:t>(also</a:t>
+              <a:t>official</a:t>
             </a:r>
             <a:r>
               <a:rPr sz="2270" b="0" i="0">
@@ -7897,7 +7822,7 @@
                 </a:solidFill>
                 <a:latin typeface="Arial"/>
               </a:rPr>
-              <a:t>0.00%</a:t>
+              <a:t>public</a:t>
             </a:r>
             <a:r>
               <a:rPr sz="2270" b="0" i="0">
@@ -7915,21 +7840,39 @@
                 </a:solidFill>
                 <a:latin typeface="Arial"/>
               </a:rPr>
-              <a:t>with</a:t>
-            </a:r>
-          </a:p>
-        </p:txBody>
-      </p:sp>
-      <p:sp>
-        <p:nvSpPr>
-          <p:cNvPr id="113" name="TextBox 112"/>
+              <a:t>ARC-AGI-2</a:t>
+            </a:r>
+            <a:r>
+              <a:rPr sz="2270" b="0" i="0">
+                <a:solidFill>
+                  <a:srgbClr val="0B0B0B"/>
+                </a:solidFill>
+                <a:latin typeface="Arial"/>
+              </a:rPr>
+              <a:t> </a:t>
+            </a:r>
+            <a:r>
+              <a:rPr sz="2270" b="0" i="0">
+                <a:solidFill>
+                  <a:srgbClr val="0B0B0B"/>
+                </a:solidFill>
+                <a:latin typeface="Arial"/>
+              </a:rPr>
+              <a:t>scores</a:t>
+            </a:r>
+          </a:p>
+        </p:txBody>
+      </p:sp>
+      <p:sp>
+        <p:nvSpPr>
+          <p:cNvPr id="114" name="TextBox 113"/>
           <p:cNvSpPr txBox="1"/>
           <p:nvPr/>
         </p:nvSpPr>
         <p:spPr>
           <a:xfrm>
-            <a:off x="24073775" y="39681010"/>
-            <a:ext cx="2287647" cy="288475"/>
+            <a:off x="19529945" y="39314332"/>
+            <a:ext cx="3906868" cy="288475"/>
           </a:xfrm>
           <a:prstGeom prst="rect">
             <a:avLst/>
@@ -7943,16 +7886,16 @@
           <a:lstStyle/>
           <a:p>
             <a:r>
-              <a:rPr sz="2270" b="0" i="0">
-                <a:solidFill>
-                  <a:srgbClr val="0B0B0B"/>
-                </a:solidFill>
-                <a:latin typeface="Arial"/>
-              </a:rPr>
-              <a:t>rule</a:t>
-            </a:r>
-            <a:r>
-              <a:rPr sz="2270" b="0" i="0">
+              <a:rPr sz="2270" b="1" i="0">
+                <a:solidFill>
+                  <a:srgbClr val="0B0B0B"/>
+                </a:solidFill>
+                <a:latin typeface="Arial"/>
+              </a:rPr>
+              <a:t>NVARC</a:t>
+            </a:r>
+            <a:r>
+              <a:rPr sz="2270" b="1" i="0">
                 <a:solidFill>
                   <a:srgbClr val="0B0B0B"/>
                 </a:solidFill>
@@ -7961,27 +7904,63 @@
               <a:t> </a:t>
             </a:r>
             <a:r>
-              <a:rPr sz="2270" b="0" i="0">
-                <a:solidFill>
-                  <a:srgbClr val="0B0B0B"/>
-                </a:solidFill>
-                <a:latin typeface="Arial"/>
-              </a:rPr>
-              <a:t>construction)</a:t>
-            </a:r>
-          </a:p>
-        </p:txBody>
-      </p:sp>
-      <p:sp>
-        <p:nvSpPr>
-          <p:cNvPr id="114" name="TextBox 113"/>
+              <a:rPr sz="2270" b="1" i="0">
+                <a:solidFill>
+                  <a:srgbClr val="0B0B0B"/>
+                </a:solidFill>
+                <a:latin typeface="Arial"/>
+              </a:rPr>
+              <a:t>/</a:t>
+            </a:r>
+            <a:r>
+              <a:rPr sz="2270" b="1" i="0">
+                <a:solidFill>
+                  <a:srgbClr val="0B0B0B"/>
+                </a:solidFill>
+                <a:latin typeface="Arial"/>
+              </a:rPr>
+              <a:t> </a:t>
+            </a:r>
+            <a:r>
+              <a:rPr sz="2270" b="1" i="0">
+                <a:solidFill>
+                  <a:srgbClr val="0B0B0B"/>
+                </a:solidFill>
+                <a:latin typeface="Arial"/>
+              </a:rPr>
+              <a:t>Qwen3-4B:</a:t>
+            </a:r>
+            <a:r>
+              <a:rPr sz="2270" b="1" i="0">
+                <a:solidFill>
+                  <a:srgbClr val="0B0B0B"/>
+                </a:solidFill>
+                <a:latin typeface="Arial"/>
+              </a:rPr>
+              <a:t> </a:t>
+            </a:r>
+            <a:r>
+              <a:rPr sz="2270" b="1" i="0">
+                <a:solidFill>
+                  <a:srgbClr val="0B0B0B"/>
+                </a:solidFill>
+                <a:latin typeface="Arial"/>
+              </a:rPr>
+              <a:t>27.64%</a:t>
+            </a:r>
+          </a:p>
+        </p:txBody>
+      </p:sp>
+      <p:sp>
+        <p:nvSpPr>
+          <p:cNvPr id="115" name="TextBox 114"/>
           <p:cNvSpPr txBox="1"/>
           <p:nvPr/>
         </p:nvSpPr>
         <p:spPr>
           <a:xfrm>
-            <a:off x="19529944" y="40047936"/>
-            <a:ext cx="4054281" cy="288475"/>
+            <a:off x="24073742" y="39314093"/>
+            <a:ext cx="4154565" cy="288714"/>
           </a:xfrm>
           <a:prstGeom prst="rect">
             <a:avLst/>
@@ -7995,13 +7974,40 @@
           <a:lstStyle/>
           <a:p>
             <a:r>
+              <a:rPr sz="2270" b="1" i="0">
+                <a:solidFill>
+                  <a:srgbClr val="0B0B0B"/>
+                </a:solidFill>
+                <a:latin typeface="Arial"/>
+              </a:rPr>
+              <a:t>CORA:</a:t>
+            </a:r>
+            <a:r>
+              <a:rPr sz="2270" b="1" i="0">
+                <a:solidFill>
+                  <a:srgbClr val="0B0B0B"/>
+                </a:solidFill>
+                <a:latin typeface="Arial"/>
+              </a:rPr>
+              <a:t> </a:t>
+            </a:r>
+            <a:r>
+              <a:rPr sz="2270" b="1" i="0">
+                <a:solidFill>
+                  <a:srgbClr val="0B0B0B"/>
+                </a:solidFill>
+                <a:latin typeface="Arial"/>
+              </a:rPr>
+              <a:t>0.00%</a:t>
+            </a:r>
+            <a:r>
               <a:rPr sz="2270" b="0" i="0">
                 <a:solidFill>
                   <a:srgbClr val="0B0B0B"/>
                 </a:solidFill>
                 <a:latin typeface="Arial"/>
               </a:rPr>
-              <a:t>reproduced</a:t>
+              <a:t> </a:t>
             </a:r>
             <a:r>
               <a:rPr sz="2270" b="0" i="0">
@@ -8010,6 +8016,15 @@
                 </a:solidFill>
                 <a:latin typeface="Arial"/>
               </a:rPr>
+              <a:t>(also</a:t>
+            </a:r>
+            <a:r>
+              <a:rPr sz="2270" b="0" i="0">
+                <a:solidFill>
+                  <a:srgbClr val="0B0B0B"/>
+                </a:solidFill>
+                <a:latin typeface="Arial"/>
+              </a:rPr>
               <a:t> </a:t>
             </a:r>
             <a:r>
@@ -8019,7 +8034,7 @@
                 </a:solidFill>
                 <a:latin typeface="Arial"/>
               </a:rPr>
-              <a:t>third-party</a:t>
+              <a:t>0.00%</a:t>
             </a:r>
             <a:r>
               <a:rPr sz="2270" b="0" i="0">
@@ -8037,21 +8052,21 @@
                 </a:solidFill>
                 <a:latin typeface="Arial"/>
               </a:rPr>
-              <a:t>method,</a:t>
-            </a:r>
-          </a:p>
-        </p:txBody>
-      </p:sp>
-      <p:sp>
-        <p:nvSpPr>
-          <p:cNvPr id="115" name="TextBox 114"/>
+              <a:t>with</a:t>
+            </a:r>
+          </a:p>
+        </p:txBody>
+      </p:sp>
+      <p:sp>
+        <p:nvSpPr>
+          <p:cNvPr id="116" name="TextBox 115"/>
           <p:cNvSpPr txBox="1"/>
           <p:nvPr/>
         </p:nvSpPr>
         <p:spPr>
           <a:xfrm>
-            <a:off x="19529944" y="40414866"/>
-            <a:ext cx="4036480" cy="288714"/>
+            <a:off x="24073775" y="39681010"/>
+            <a:ext cx="2287647" cy="288475"/>
           </a:xfrm>
           <a:prstGeom prst="rect">
             <a:avLst/>
@@ -8065,16 +8080,16 @@
           <a:lstStyle/>
           <a:p>
             <a:r>
-              <a:rPr sz="2270" b="1" i="0">
-                <a:solidFill>
-                  <a:srgbClr val="0B0B0B"/>
-                </a:solidFill>
-                <a:latin typeface="Arial"/>
-              </a:rPr>
-              <a:t>not</a:t>
-            </a:r>
-            <a:r>
-              <a:rPr sz="2270" b="1" i="0">
+              <a:rPr sz="2270" b="0" i="0">
+                <a:solidFill>
+                  <a:srgbClr val="0B0B0B"/>
+                </a:solidFill>
+                <a:latin typeface="Arial"/>
+              </a:rPr>
+              <a:t>rule</a:t>
+            </a:r>
+            <a:r>
+              <a:rPr sz="2270" b="0" i="0">
                 <a:solidFill>
                   <a:srgbClr val="0B0B0B"/>
                 </a:solidFill>
@@ -8083,90 +8098,27 @@
               <a:t> </a:t>
             </a:r>
             <a:r>
-              <a:rPr sz="2270" b="1" i="0">
-                <a:solidFill>
-                  <a:srgbClr val="0B0B0B"/>
-                </a:solidFill>
-                <a:latin typeface="Arial"/>
-              </a:rPr>
-              <a:t>CORA</a:t>
-            </a:r>
-            <a:r>
               <a:rPr sz="2270" b="0" i="0">
                 <a:solidFill>
                   <a:srgbClr val="0B0B0B"/>
                 </a:solidFill>
                 <a:latin typeface="Arial"/>
               </a:rPr>
-              <a:t>;</a:t>
-            </a:r>
-            <a:r>
-              <a:rPr sz="2270" b="0" i="0">
-                <a:solidFill>
-                  <a:srgbClr val="0B0B0B"/>
-                </a:solidFill>
-                <a:latin typeface="Arial"/>
-              </a:rPr>
-              <a:t> </a:t>
-            </a:r>
-            <a:r>
-              <a:rPr sz="2270" b="0" i="0">
-                <a:solidFill>
-                  <a:srgbClr val="0B0B0B"/>
-                </a:solidFill>
-                <a:latin typeface="Arial"/>
-              </a:rPr>
-              <a:t>neural</a:t>
-            </a:r>
-            <a:r>
-              <a:rPr sz="2270" b="0" i="0">
-                <a:solidFill>
-                  <a:srgbClr val="0B0B0B"/>
-                </a:solidFill>
-                <a:latin typeface="Arial"/>
-              </a:rPr>
-              <a:t> </a:t>
-            </a:r>
-            <a:r>
-              <a:rPr sz="2270" b="0" i="0">
-                <a:solidFill>
-                  <a:srgbClr val="0B0B0B"/>
-                </a:solidFill>
-                <a:latin typeface="Arial"/>
-              </a:rPr>
-              <a:t>training</a:t>
-            </a:r>
-            <a:r>
-              <a:rPr sz="2270" b="0" i="0">
-                <a:solidFill>
-                  <a:srgbClr val="0B0B0B"/>
-                </a:solidFill>
-                <a:latin typeface="Arial"/>
-              </a:rPr>
-              <a:t> </a:t>
-            </a:r>
-            <a:r>
-              <a:rPr sz="2270" b="0" i="0">
-                <a:solidFill>
-                  <a:srgbClr val="0B0B0B"/>
-                </a:solidFill>
-                <a:latin typeface="Arial"/>
-              </a:rPr>
-              <a:t>and</a:t>
-            </a:r>
-          </a:p>
-        </p:txBody>
-      </p:sp>
-      <p:sp>
-        <p:nvSpPr>
-          <p:cNvPr id="116" name="TextBox 115"/>
+              <a:t>construction)</a:t>
+            </a:r>
+          </a:p>
+        </p:txBody>
+      </p:sp>
+      <p:sp>
+        <p:nvSpPr>
+          <p:cNvPr id="117" name="TextBox 116"/>
           <p:cNvSpPr txBox="1"/>
           <p:nvPr/>
         </p:nvSpPr>
         <p:spPr>
           <a:xfrm>
-            <a:off x="19529944" y="40781780"/>
-            <a:ext cx="2536028" cy="288475"/>
+            <a:off x="19529944" y="40047936"/>
+            <a:ext cx="4054281" cy="288475"/>
           </a:xfrm>
           <a:prstGeom prst="rect">
             <a:avLst/>
@@ -8186,7 +8138,7 @@
                 </a:solidFill>
                 <a:latin typeface="Arial"/>
               </a:rPr>
-              <a:t>per-task</a:t>
+              <a:t>reproduced</a:t>
             </a:r>
             <a:r>
               <a:rPr sz="2270" b="0" i="0">
@@ -8204,21 +8156,39 @@
                 </a:solidFill>
                 <a:latin typeface="Arial"/>
               </a:rPr>
-              <a:t>adaptation</a:t>
-            </a:r>
-          </a:p>
-        </p:txBody>
-      </p:sp>
-      <p:sp>
-        <p:nvSpPr>
-          <p:cNvPr id="117" name="TextBox 116"/>
+              <a:t>third-party</a:t>
+            </a:r>
+            <a:r>
+              <a:rPr sz="2270" b="0" i="0">
+                <a:solidFill>
+                  <a:srgbClr val="0B0B0B"/>
+                </a:solidFill>
+                <a:latin typeface="Arial"/>
+              </a:rPr>
+              <a:t> </a:t>
+            </a:r>
+            <a:r>
+              <a:rPr sz="2270" b="0" i="0">
+                <a:solidFill>
+                  <a:srgbClr val="0B0B0B"/>
+                </a:solidFill>
+                <a:latin typeface="Arial"/>
+              </a:rPr>
+              <a:t>method,</a:t>
+            </a:r>
+          </a:p>
+        </p:txBody>
+      </p:sp>
+      <p:sp>
+        <p:nvSpPr>
+          <p:cNvPr id="118" name="TextBox 117"/>
           <p:cNvSpPr txBox="1"/>
           <p:nvPr/>
         </p:nvSpPr>
         <p:spPr>
           <a:xfrm>
-            <a:off x="24073775" y="40047936"/>
-            <a:ext cx="3252609" cy="288475"/>
+            <a:off x="19529944" y="40414866"/>
+            <a:ext cx="4036480" cy="288714"/>
           </a:xfrm>
           <a:prstGeom prst="rect">
             <a:avLst/>
@@ -8232,13 +8202,40 @@
           <a:lstStyle/>
           <a:p>
             <a:r>
+              <a:rPr sz="2270" b="1" i="0">
+                <a:solidFill>
+                  <a:srgbClr val="0B0B0B"/>
+                </a:solidFill>
+                <a:latin typeface="Arial"/>
+              </a:rPr>
+              <a:t>not</a:t>
+            </a:r>
+            <a:r>
+              <a:rPr sz="2270" b="1" i="0">
+                <a:solidFill>
+                  <a:srgbClr val="0B0B0B"/>
+                </a:solidFill>
+                <a:latin typeface="Arial"/>
+              </a:rPr>
+              <a:t> </a:t>
+            </a:r>
+            <a:r>
+              <a:rPr sz="2270" b="1" i="0">
+                <a:solidFill>
+                  <a:srgbClr val="0B0B0B"/>
+                </a:solidFill>
+                <a:latin typeface="Arial"/>
+              </a:rPr>
+              <a:t>CORA</a:t>
+            </a:r>
+            <a:r>
               <a:rPr sz="2270" b="0" i="0">
                 <a:solidFill>
                   <a:srgbClr val="0B0B0B"/>
                 </a:solidFill>
                 <a:latin typeface="Arial"/>
               </a:rPr>
-              <a:t>original</a:t>
+              <a:t>;</a:t>
             </a:r>
             <a:r>
               <a:rPr sz="2270" b="0" i="0">
@@ -8256,7 +8253,7 @@
                 </a:solidFill>
                 <a:latin typeface="Arial"/>
               </a:rPr>
-              <a:t>research;</a:t>
+              <a:t>neural</a:t>
             </a:r>
             <a:r>
               <a:rPr sz="2270" b="0" i="0">
@@ -8274,21 +8271,39 @@
                 </a:solidFill>
                 <a:latin typeface="Arial"/>
               </a:rPr>
-              <a:t>explicit</a:t>
-            </a:r>
-          </a:p>
-        </p:txBody>
-      </p:sp>
-      <p:sp>
-        <p:nvSpPr>
-          <p:cNvPr id="118" name="TextBox 117"/>
+              <a:t>training</a:t>
+            </a:r>
+            <a:r>
+              <a:rPr sz="2270" b="0" i="0">
+                <a:solidFill>
+                  <a:srgbClr val="0B0B0B"/>
+                </a:solidFill>
+                <a:latin typeface="Arial"/>
+              </a:rPr>
+              <a:t> </a:t>
+            </a:r>
+            <a:r>
+              <a:rPr sz="2270" b="0" i="0">
+                <a:solidFill>
+                  <a:srgbClr val="0B0B0B"/>
+                </a:solidFill>
+                <a:latin typeface="Arial"/>
+              </a:rPr>
+              <a:t>and</a:t>
+            </a:r>
+          </a:p>
+        </p:txBody>
+      </p:sp>
+      <p:sp>
+        <p:nvSpPr>
+          <p:cNvPr id="119" name="TextBox 118"/>
           <p:cNvSpPr txBox="1"/>
           <p:nvPr/>
         </p:nvSpPr>
         <p:spPr>
           <a:xfrm>
-            <a:off x="24073775" y="40414866"/>
-            <a:ext cx="3700901" cy="288475"/>
+            <a:off x="19529944" y="40781780"/>
+            <a:ext cx="2536028" cy="288475"/>
           </a:xfrm>
           <a:prstGeom prst="rect">
             <a:avLst/>
@@ -8308,7 +8323,7 @@
                 </a:solidFill>
                 <a:latin typeface="Arial"/>
               </a:rPr>
-              <a:t>hypotheses,</a:t>
+              <a:t>per-task</a:t>
             </a:r>
             <a:r>
               <a:rPr sz="2270" b="0" i="0">
@@ -8326,39 +8341,21 @@
                 </a:solidFill>
                 <a:latin typeface="Arial"/>
               </a:rPr>
-              <a:t>tested</a:t>
-            </a:r>
-            <a:r>
-              <a:rPr sz="2270" b="0" i="0">
-                <a:solidFill>
-                  <a:srgbClr val="0B0B0B"/>
-                </a:solidFill>
-                <a:latin typeface="Arial"/>
-              </a:rPr>
-              <a:t> </a:t>
-            </a:r>
-            <a:r>
-              <a:rPr sz="2270" b="0" i="0">
-                <a:solidFill>
-                  <a:srgbClr val="0B0B0B"/>
-                </a:solidFill>
-                <a:latin typeface="Arial"/>
-              </a:rPr>
-              <a:t>revisions</a:t>
-            </a:r>
-          </a:p>
-        </p:txBody>
-      </p:sp>
-      <p:sp>
-        <p:nvSpPr>
-          <p:cNvPr id="119" name="TextBox 118"/>
+              <a:t>adaptation</a:t>
+            </a:r>
+          </a:p>
+        </p:txBody>
+      </p:sp>
+      <p:sp>
+        <p:nvSpPr>
+          <p:cNvPr id="120" name="TextBox 119"/>
           <p:cNvSpPr txBox="1"/>
           <p:nvPr/>
         </p:nvSpPr>
         <p:spPr>
           <a:xfrm>
-            <a:off x="19529944" y="41172649"/>
-            <a:ext cx="9234247" cy="288714"/>
+            <a:off x="24073775" y="40047936"/>
+            <a:ext cx="3252609" cy="288475"/>
           </a:xfrm>
           <a:prstGeom prst="rect">
             <a:avLst/>
@@ -8372,16 +8369,16 @@
           <a:lstStyle/>
           <a:p>
             <a:r>
-              <a:rPr sz="2270" b="1" i="0">
-                <a:solidFill>
-                  <a:srgbClr val="0B0B0B"/>
-                </a:solidFill>
-                <a:latin typeface="Arial"/>
-              </a:rPr>
-              <a:t>Open</a:t>
-            </a:r>
-            <a:r>
-              <a:rPr sz="2270" b="1" i="0">
+              <a:rPr sz="2270" b="0" i="0">
+                <a:solidFill>
+                  <a:srgbClr val="0B0B0B"/>
+                </a:solidFill>
+                <a:latin typeface="Arial"/>
+              </a:rPr>
+              <a:t>original</a:t>
+            </a:r>
+            <a:r>
+              <a:rPr sz="2270" b="0" i="0">
                 <a:solidFill>
                   <a:srgbClr val="0B0B0B"/>
                 </a:solidFill>
@@ -8390,21 +8387,21 @@
               <a:t> </a:t>
             </a:r>
             <a:r>
-              <a:rPr sz="2270" b="1" i="0">
-                <a:solidFill>
-                  <a:srgbClr val="0B0B0B"/>
-                </a:solidFill>
-                <a:latin typeface="Arial"/>
-              </a:rPr>
-              <a:t>question:</a:t>
-            </a:r>
-            <a:r>
               <a:rPr sz="2270" b="0" i="0">
                 <a:solidFill>
                   <a:srgbClr val="0B0B0B"/>
                 </a:solidFill>
                 <a:latin typeface="Arial"/>
               </a:rPr>
+              <a:t>research;</a:t>
+            </a:r>
+            <a:r>
+              <a:rPr sz="2270" b="0" i="0">
+                <a:solidFill>
+                  <a:srgbClr val="0B0B0B"/>
+                </a:solidFill>
+                <a:latin typeface="Arial"/>
+              </a:rPr>
               <a:t> </a:t>
             </a:r>
             <a:r>
@@ -8414,147 +8411,21 @@
                 </a:solidFill>
                 <a:latin typeface="Arial"/>
               </a:rPr>
-              <a:t>can</a:t>
-            </a:r>
-            <a:r>
-              <a:rPr sz="2270" b="0" i="0">
-                <a:solidFill>
-                  <a:srgbClr val="0B0B0B"/>
-                </a:solidFill>
-                <a:latin typeface="Arial"/>
-              </a:rPr>
-              <a:t> </a:t>
-            </a:r>
-            <a:r>
-              <a:rPr sz="2270" b="0" i="0">
-                <a:solidFill>
-                  <a:srgbClr val="0B0B0B"/>
-                </a:solidFill>
-                <a:latin typeface="Arial"/>
-              </a:rPr>
-              <a:t>learned</a:t>
-            </a:r>
-            <a:r>
-              <a:rPr sz="2270" b="0" i="0">
-                <a:solidFill>
-                  <a:srgbClr val="0B0B0B"/>
-                </a:solidFill>
-                <a:latin typeface="Arial"/>
-              </a:rPr>
-              <a:t> </a:t>
-            </a:r>
-            <a:r>
-              <a:rPr sz="2270" b="0" i="0">
-                <a:solidFill>
-                  <a:srgbClr val="0B0B0B"/>
-                </a:solidFill>
-                <a:latin typeface="Arial"/>
-              </a:rPr>
-              <a:t>neural</a:t>
-            </a:r>
-            <a:r>
-              <a:rPr sz="2270" b="0" i="0">
-                <a:solidFill>
-                  <a:srgbClr val="0B0B0B"/>
-                </a:solidFill>
-                <a:latin typeface="Arial"/>
-              </a:rPr>
-              <a:t> </a:t>
-            </a:r>
-            <a:r>
-              <a:rPr sz="2270" b="0" i="0">
-                <a:solidFill>
-                  <a:srgbClr val="0B0B0B"/>
-                </a:solidFill>
-                <a:latin typeface="Arial"/>
-              </a:rPr>
-              <a:t>proposals</a:t>
-            </a:r>
-            <a:r>
-              <a:rPr sz="2270" b="0" i="0">
-                <a:solidFill>
-                  <a:srgbClr val="0B0B0B"/>
-                </a:solidFill>
-                <a:latin typeface="Arial"/>
-              </a:rPr>
-              <a:t> </a:t>
-            </a:r>
-            <a:r>
-              <a:rPr sz="2270" b="0" i="0">
-                <a:solidFill>
-                  <a:srgbClr val="0B0B0B"/>
-                </a:solidFill>
-                <a:latin typeface="Arial"/>
-              </a:rPr>
-              <a:t>help</a:t>
-            </a:r>
-            <a:r>
-              <a:rPr sz="2270" b="0" i="0">
-                <a:solidFill>
-                  <a:srgbClr val="0B0B0B"/>
-                </a:solidFill>
-                <a:latin typeface="Arial"/>
-              </a:rPr>
-              <a:t> </a:t>
-            </a:r>
-            <a:r>
-              <a:rPr sz="2270" b="0" i="0">
-                <a:solidFill>
-                  <a:srgbClr val="0B0B0B"/>
-                </a:solidFill>
-                <a:latin typeface="Arial"/>
-              </a:rPr>
-              <a:t>an</a:t>
-            </a:r>
-            <a:r>
-              <a:rPr sz="2270" b="0" i="0">
-                <a:solidFill>
-                  <a:srgbClr val="0B0B0B"/>
-                </a:solidFill>
-                <a:latin typeface="Arial"/>
-              </a:rPr>
-              <a:t> </a:t>
-            </a:r>
-            <a:r>
-              <a:rPr sz="2270" b="0" i="0">
-                <a:solidFill>
-                  <a:srgbClr val="0B0B0B"/>
-                </a:solidFill>
-                <a:latin typeface="Arial"/>
-              </a:rPr>
-              <a:t>executable</a:t>
-            </a:r>
-            <a:r>
-              <a:rPr sz="2270" b="0" i="0">
-                <a:solidFill>
-                  <a:srgbClr val="0B0B0B"/>
-                </a:solidFill>
-                <a:latin typeface="Arial"/>
-              </a:rPr>
-              <a:t> </a:t>
-            </a:r>
-            <a:r>
-              <a:rPr sz="2270" b="0" i="0">
-                <a:solidFill>
-                  <a:srgbClr val="0B0B0B"/>
-                </a:solidFill>
-                <a:latin typeface="Arial"/>
-              </a:rPr>
-              <a:t>rea-</a:t>
-            </a:r>
-          </a:p>
-        </p:txBody>
-      </p:sp>
-      <p:sp>
-        <p:nvSpPr>
-          <p:cNvPr id="120" name="TextBox 119"/>
+              <a:t>explicit</a:t>
+            </a:r>
+          </a:p>
+        </p:txBody>
+      </p:sp>
+      <p:sp>
+        <p:nvSpPr>
+          <p:cNvPr id="121" name="TextBox 120"/>
           <p:cNvSpPr txBox="1"/>
           <p:nvPr/>
         </p:nvSpPr>
         <p:spPr>
           <a:xfrm>
-            <a:off x="19529944" y="41539579"/>
-            <a:ext cx="6185256" cy="288475"/>
+            <a:off x="24073775" y="40414866"/>
+            <a:ext cx="3700901" cy="288475"/>
           </a:xfrm>
           <a:prstGeom prst="rect">
             <a:avLst/>
@@ -8574,7 +8445,7 @@
                 </a:solidFill>
                 <a:latin typeface="Arial"/>
               </a:rPr>
-              <a:t>soner</a:t>
+              <a:t>hypotheses,</a:t>
             </a:r>
             <a:r>
               <a:rPr sz="2270" b="0" i="0">
@@ -8592,7 +8463,7 @@
                 </a:solidFill>
                 <a:latin typeface="Arial"/>
               </a:rPr>
-              <a:t>find</a:t>
+              <a:t>tested</a:t>
             </a:r>
             <a:r>
               <a:rPr sz="2270" b="0" i="0">
@@ -8610,129 +8481,21 @@
                 </a:solidFill>
                 <a:latin typeface="Arial"/>
               </a:rPr>
-              <a:t>which</a:t>
-            </a:r>
-            <a:r>
-              <a:rPr sz="2270" b="0" i="0">
-                <a:solidFill>
-                  <a:srgbClr val="0B0B0B"/>
-                </a:solidFill>
-                <a:latin typeface="Arial"/>
-              </a:rPr>
-              <a:t> </a:t>
-            </a:r>
-            <a:r>
-              <a:rPr sz="2270" b="0" i="0">
-                <a:solidFill>
-                  <a:srgbClr val="0B0B0B"/>
-                </a:solidFill>
-                <a:latin typeface="Arial"/>
-              </a:rPr>
-              <a:t>part</a:t>
-            </a:r>
-            <a:r>
-              <a:rPr sz="2270" b="0" i="0">
-                <a:solidFill>
-                  <a:srgbClr val="0B0B0B"/>
-                </a:solidFill>
-                <a:latin typeface="Arial"/>
-              </a:rPr>
-              <a:t> </a:t>
-            </a:r>
-            <a:r>
-              <a:rPr sz="2270" b="0" i="0">
-                <a:solidFill>
-                  <a:srgbClr val="0B0B0B"/>
-                </a:solidFill>
-                <a:latin typeface="Arial"/>
-              </a:rPr>
-              <a:t>of</a:t>
-            </a:r>
-            <a:r>
-              <a:rPr sz="2270" b="0" i="0">
-                <a:solidFill>
-                  <a:srgbClr val="0B0B0B"/>
-                </a:solidFill>
-                <a:latin typeface="Arial"/>
-              </a:rPr>
-              <a:t> </a:t>
-            </a:r>
-            <a:r>
-              <a:rPr sz="2270" b="0" i="0">
-                <a:solidFill>
-                  <a:srgbClr val="0B0B0B"/>
-                </a:solidFill>
-                <a:latin typeface="Arial"/>
-              </a:rPr>
-              <a:t>a</a:t>
-            </a:r>
-            <a:r>
-              <a:rPr sz="2270" b="0" i="0">
-                <a:solidFill>
-                  <a:srgbClr val="0B0B0B"/>
-                </a:solidFill>
-                <a:latin typeface="Arial"/>
-              </a:rPr>
-              <a:t> </a:t>
-            </a:r>
-            <a:r>
-              <a:rPr sz="2270" b="0" i="0">
-                <a:solidFill>
-                  <a:srgbClr val="0B0B0B"/>
-                </a:solidFill>
-                <a:latin typeface="Arial"/>
-              </a:rPr>
-              <a:t>hypothesis</a:t>
-            </a:r>
-            <a:r>
-              <a:rPr sz="2270" b="0" i="0">
-                <a:solidFill>
-                  <a:srgbClr val="0B0B0B"/>
-                </a:solidFill>
-                <a:latin typeface="Arial"/>
-              </a:rPr>
-              <a:t> </a:t>
-            </a:r>
-            <a:r>
-              <a:rPr sz="2270" b="0" i="0">
-                <a:solidFill>
-                  <a:srgbClr val="0B0B0B"/>
-                </a:solidFill>
-                <a:latin typeface="Arial"/>
-              </a:rPr>
-              <a:t>to</a:t>
-            </a:r>
-            <a:r>
-              <a:rPr sz="2270" b="0" i="0">
-                <a:solidFill>
-                  <a:srgbClr val="0B0B0B"/>
-                </a:solidFill>
-                <a:latin typeface="Arial"/>
-              </a:rPr>
-              <a:t> </a:t>
-            </a:r>
-            <a:r>
-              <a:rPr sz="2270" b="0" i="0">
-                <a:solidFill>
-                  <a:srgbClr val="0B0B0B"/>
-                </a:solidFill>
-                <a:latin typeface="Arial"/>
-              </a:rPr>
-              <a:t>revise?</a:t>
-            </a:r>
-          </a:p>
-        </p:txBody>
-      </p:sp>
-      <p:sp>
-        <p:nvSpPr>
-          <p:cNvPr id="121" name="TextBox 120"/>
+              <a:t>revisions</a:t>
+            </a:r>
+          </a:p>
+        </p:txBody>
+      </p:sp>
+      <p:sp>
+        <p:nvSpPr>
+          <p:cNvPr id="122" name="TextBox 121"/>
           <p:cNvSpPr txBox="1"/>
           <p:nvPr/>
         </p:nvSpPr>
         <p:spPr>
           <a:xfrm>
-            <a:off x="936003" y="42230048"/>
-            <a:ext cx="28454909" cy="264439"/>
+            <a:off x="19529944" y="41172649"/>
+            <a:ext cx="9234247" cy="288714"/>
           </a:xfrm>
           <a:prstGeom prst="rect">
             <a:avLst/>
@@ -8746,6 +8509,380 @@
           <a:lstStyle/>
           <a:p>
             <a:r>
+              <a:rPr sz="2270" b="1" i="0">
+                <a:solidFill>
+                  <a:srgbClr val="0B0B0B"/>
+                </a:solidFill>
+                <a:latin typeface="Arial"/>
+              </a:rPr>
+              <a:t>Open</a:t>
+            </a:r>
+            <a:r>
+              <a:rPr sz="2270" b="1" i="0">
+                <a:solidFill>
+                  <a:srgbClr val="0B0B0B"/>
+                </a:solidFill>
+                <a:latin typeface="Arial"/>
+              </a:rPr>
+              <a:t> </a:t>
+            </a:r>
+            <a:r>
+              <a:rPr sz="2270" b="1" i="0">
+                <a:solidFill>
+                  <a:srgbClr val="0B0B0B"/>
+                </a:solidFill>
+                <a:latin typeface="Arial"/>
+              </a:rPr>
+              <a:t>question:</a:t>
+            </a:r>
+            <a:r>
+              <a:rPr sz="2270" b="0" i="0">
+                <a:solidFill>
+                  <a:srgbClr val="0B0B0B"/>
+                </a:solidFill>
+                <a:latin typeface="Arial"/>
+              </a:rPr>
+              <a:t> </a:t>
+            </a:r>
+            <a:r>
+              <a:rPr sz="2270" b="0" i="0">
+                <a:solidFill>
+                  <a:srgbClr val="0B0B0B"/>
+                </a:solidFill>
+                <a:latin typeface="Arial"/>
+              </a:rPr>
+              <a:t>can</a:t>
+            </a:r>
+            <a:r>
+              <a:rPr sz="2270" b="0" i="0">
+                <a:solidFill>
+                  <a:srgbClr val="0B0B0B"/>
+                </a:solidFill>
+                <a:latin typeface="Arial"/>
+              </a:rPr>
+              <a:t> </a:t>
+            </a:r>
+            <a:r>
+              <a:rPr sz="2270" b="0" i="0">
+                <a:solidFill>
+                  <a:srgbClr val="0B0B0B"/>
+                </a:solidFill>
+                <a:latin typeface="Arial"/>
+              </a:rPr>
+              <a:t>learned</a:t>
+            </a:r>
+            <a:r>
+              <a:rPr sz="2270" b="0" i="0">
+                <a:solidFill>
+                  <a:srgbClr val="0B0B0B"/>
+                </a:solidFill>
+                <a:latin typeface="Arial"/>
+              </a:rPr>
+              <a:t> </a:t>
+            </a:r>
+            <a:r>
+              <a:rPr sz="2270" b="0" i="0">
+                <a:solidFill>
+                  <a:srgbClr val="0B0B0B"/>
+                </a:solidFill>
+                <a:latin typeface="Arial"/>
+              </a:rPr>
+              <a:t>neural</a:t>
+            </a:r>
+            <a:r>
+              <a:rPr sz="2270" b="0" i="0">
+                <a:solidFill>
+                  <a:srgbClr val="0B0B0B"/>
+                </a:solidFill>
+                <a:latin typeface="Arial"/>
+              </a:rPr>
+              <a:t> </a:t>
+            </a:r>
+            <a:r>
+              <a:rPr sz="2270" b="0" i="0">
+                <a:solidFill>
+                  <a:srgbClr val="0B0B0B"/>
+                </a:solidFill>
+                <a:latin typeface="Arial"/>
+              </a:rPr>
+              <a:t>proposals</a:t>
+            </a:r>
+            <a:r>
+              <a:rPr sz="2270" b="0" i="0">
+                <a:solidFill>
+                  <a:srgbClr val="0B0B0B"/>
+                </a:solidFill>
+                <a:latin typeface="Arial"/>
+              </a:rPr>
+              <a:t> </a:t>
+            </a:r>
+            <a:r>
+              <a:rPr sz="2270" b="0" i="0">
+                <a:solidFill>
+                  <a:srgbClr val="0B0B0B"/>
+                </a:solidFill>
+                <a:latin typeface="Arial"/>
+              </a:rPr>
+              <a:t>help</a:t>
+            </a:r>
+            <a:r>
+              <a:rPr sz="2270" b="0" i="0">
+                <a:solidFill>
+                  <a:srgbClr val="0B0B0B"/>
+                </a:solidFill>
+                <a:latin typeface="Arial"/>
+              </a:rPr>
+              <a:t> </a:t>
+            </a:r>
+            <a:r>
+              <a:rPr sz="2270" b="0" i="0">
+                <a:solidFill>
+                  <a:srgbClr val="0B0B0B"/>
+                </a:solidFill>
+                <a:latin typeface="Arial"/>
+              </a:rPr>
+              <a:t>an</a:t>
+            </a:r>
+            <a:r>
+              <a:rPr sz="2270" b="0" i="0">
+                <a:solidFill>
+                  <a:srgbClr val="0B0B0B"/>
+                </a:solidFill>
+                <a:latin typeface="Arial"/>
+              </a:rPr>
+              <a:t> </a:t>
+            </a:r>
+            <a:r>
+              <a:rPr sz="2270" b="0" i="0">
+                <a:solidFill>
+                  <a:srgbClr val="0B0B0B"/>
+                </a:solidFill>
+                <a:latin typeface="Arial"/>
+              </a:rPr>
+              <a:t>executable</a:t>
+            </a:r>
+            <a:r>
+              <a:rPr sz="2270" b="0" i="0">
+                <a:solidFill>
+                  <a:srgbClr val="0B0B0B"/>
+                </a:solidFill>
+                <a:latin typeface="Arial"/>
+              </a:rPr>
+              <a:t> </a:t>
+            </a:r>
+            <a:r>
+              <a:rPr sz="2270" b="0" i="0">
+                <a:solidFill>
+                  <a:srgbClr val="0B0B0B"/>
+                </a:solidFill>
+                <a:latin typeface="Arial"/>
+              </a:rPr>
+              <a:t>rea-</a:t>
+            </a:r>
+          </a:p>
+        </p:txBody>
+      </p:sp>
+      <p:sp>
+        <p:nvSpPr>
+          <p:cNvPr id="123" name="TextBox 122"/>
+          <p:cNvSpPr txBox="1"/>
+          <p:nvPr/>
+        </p:nvSpPr>
+        <p:spPr>
+          <a:xfrm>
+            <a:off x="19529944" y="41539579"/>
+            <a:ext cx="6185256" cy="288475"/>
+          </a:xfrm>
+          <a:prstGeom prst="rect">
+            <a:avLst/>
+          </a:prstGeom>
+          <a:noFill/>
+        </p:spPr>
+        <p:txBody>
+          <a:bodyPr wrap="none" lIns="0" rIns="0" tIns="0" bIns="0">
+            <a:spAutoFit/>
+          </a:bodyPr>
+          <a:lstStyle/>
+          <a:p>
+            <a:r>
+              <a:rPr sz="2270" b="0" i="0">
+                <a:solidFill>
+                  <a:srgbClr val="0B0B0B"/>
+                </a:solidFill>
+                <a:latin typeface="Arial"/>
+              </a:rPr>
+              <a:t>soner</a:t>
+            </a:r>
+            <a:r>
+              <a:rPr sz="2270" b="0" i="0">
+                <a:solidFill>
+                  <a:srgbClr val="0B0B0B"/>
+                </a:solidFill>
+                <a:latin typeface="Arial"/>
+              </a:rPr>
+              <a:t> </a:t>
+            </a:r>
+            <a:r>
+              <a:rPr sz="2270" b="0" i="0">
+                <a:solidFill>
+                  <a:srgbClr val="0B0B0B"/>
+                </a:solidFill>
+                <a:latin typeface="Arial"/>
+              </a:rPr>
+              <a:t>find</a:t>
+            </a:r>
+            <a:r>
+              <a:rPr sz="2270" b="0" i="0">
+                <a:solidFill>
+                  <a:srgbClr val="0B0B0B"/>
+                </a:solidFill>
+                <a:latin typeface="Arial"/>
+              </a:rPr>
+              <a:t> </a:t>
+            </a:r>
+            <a:r>
+              <a:rPr sz="2270" b="0" i="0">
+                <a:solidFill>
+                  <a:srgbClr val="0B0B0B"/>
+                </a:solidFill>
+                <a:latin typeface="Arial"/>
+              </a:rPr>
+              <a:t>which</a:t>
+            </a:r>
+            <a:r>
+              <a:rPr sz="2270" b="0" i="0">
+                <a:solidFill>
+                  <a:srgbClr val="0B0B0B"/>
+                </a:solidFill>
+                <a:latin typeface="Arial"/>
+              </a:rPr>
+              <a:t> </a:t>
+            </a:r>
+            <a:r>
+              <a:rPr sz="2270" b="0" i="0">
+                <a:solidFill>
+                  <a:srgbClr val="0B0B0B"/>
+                </a:solidFill>
+                <a:latin typeface="Arial"/>
+              </a:rPr>
+              <a:t>part</a:t>
+            </a:r>
+            <a:r>
+              <a:rPr sz="2270" b="0" i="0">
+                <a:solidFill>
+                  <a:srgbClr val="0B0B0B"/>
+                </a:solidFill>
+                <a:latin typeface="Arial"/>
+              </a:rPr>
+              <a:t> </a:t>
+            </a:r>
+            <a:r>
+              <a:rPr sz="2270" b="0" i="0">
+                <a:solidFill>
+                  <a:srgbClr val="0B0B0B"/>
+                </a:solidFill>
+                <a:latin typeface="Arial"/>
+              </a:rPr>
+              <a:t>of</a:t>
+            </a:r>
+            <a:r>
+              <a:rPr sz="2270" b="0" i="0">
+                <a:solidFill>
+                  <a:srgbClr val="0B0B0B"/>
+                </a:solidFill>
+                <a:latin typeface="Arial"/>
+              </a:rPr>
+              <a:t> </a:t>
+            </a:r>
+            <a:r>
+              <a:rPr sz="2270" b="0" i="0">
+                <a:solidFill>
+                  <a:srgbClr val="0B0B0B"/>
+                </a:solidFill>
+                <a:latin typeface="Arial"/>
+              </a:rPr>
+              <a:t>a</a:t>
+            </a:r>
+            <a:r>
+              <a:rPr sz="2270" b="0" i="0">
+                <a:solidFill>
+                  <a:srgbClr val="0B0B0B"/>
+                </a:solidFill>
+                <a:latin typeface="Arial"/>
+              </a:rPr>
+              <a:t> </a:t>
+            </a:r>
+            <a:r>
+              <a:rPr sz="2270" b="0" i="0">
+                <a:solidFill>
+                  <a:srgbClr val="0B0B0B"/>
+                </a:solidFill>
+                <a:latin typeface="Arial"/>
+              </a:rPr>
+              <a:t>hypothesis</a:t>
+            </a:r>
+            <a:r>
+              <a:rPr sz="2270" b="0" i="0">
+                <a:solidFill>
+                  <a:srgbClr val="0B0B0B"/>
+                </a:solidFill>
+                <a:latin typeface="Arial"/>
+              </a:rPr>
+              <a:t> </a:t>
+            </a:r>
+            <a:r>
+              <a:rPr sz="2270" b="0" i="0">
+                <a:solidFill>
+                  <a:srgbClr val="0B0B0B"/>
+                </a:solidFill>
+                <a:latin typeface="Arial"/>
+              </a:rPr>
+              <a:t>to</a:t>
+            </a:r>
+            <a:r>
+              <a:rPr sz="2270" b="0" i="0">
+                <a:solidFill>
+                  <a:srgbClr val="0B0B0B"/>
+                </a:solidFill>
+                <a:latin typeface="Arial"/>
+              </a:rPr>
+              <a:t> </a:t>
+            </a:r>
+            <a:r>
+              <a:rPr sz="2270" b="0" i="0">
+                <a:solidFill>
+                  <a:srgbClr val="0B0B0B"/>
+                </a:solidFill>
+                <a:latin typeface="Arial"/>
+              </a:rPr>
+              <a:t>revise?</a:t>
+            </a:r>
+          </a:p>
+        </p:txBody>
+      </p:sp>
+      <p:sp>
+        <p:nvSpPr>
+          <p:cNvPr id="124" name="TextBox 123"/>
+          <p:cNvSpPr txBox="1"/>
+          <p:nvPr/>
+        </p:nvSpPr>
+        <p:spPr>
+          <a:xfrm>
+            <a:off x="936003" y="42230048"/>
+            <a:ext cx="28454909" cy="264439"/>
+          </a:xfrm>
+          <a:prstGeom prst="rect">
+            <a:avLst/>
+          </a:prstGeom>
+          <a:noFill/>
+        </p:spPr>
+        <p:txBody>
+          <a:bodyPr wrap="none" lIns="0" rIns="0" tIns="0" bIns="0">
+            <a:spAutoFit/>
+          </a:bodyPr>
+          <a:lstStyle/>
+          <a:p>
+            <a:r>
               <a:rPr sz="2080" b="0" i="0">
                 <a:solidFill>
                   <a:srgbClr val="52514E"/>
@@ -8795,7 +8932,7 @@
       </p:sp>
       <p:sp>
         <p:nvSpPr>
-          <p:cNvPr id="122" name="TextBox 121"/>
+          <p:cNvPr id="125" name="TextBox 124"/>
           <p:cNvSpPr txBox="1"/>
           <p:nvPr/>
         </p:nvSpPr>
